--- a/slides/apresentacao_house_prices_c3.pptx
+++ b/slides/apresentacao_house_prices_c3.pptx
@@ -5,7 +5,7 @@
     <p:sldMasterId id="2147483648" r:id="rId1"/>
   </p:sldMasterIdLst>
   <p:notesMasterIdLst>
-    <p:notesMasterId r:id="rId14"/>
+    <p:notesMasterId r:id="rId15"/>
   </p:notesMasterIdLst>
   <p:sldIdLst>
     <p:sldId id="256" r:id="rId2"/>
@@ -20,6 +20,7 @@
     <p:sldId id="265" r:id="rId11"/>
     <p:sldId id="266" r:id="rId12"/>
     <p:sldId id="267" r:id="rId13"/>
+    <p:sldId id="268" r:id="rId14"/>
   </p:sldIdLst>
   <p:sldSz cx="12192000" cy="6858000"/>
   <p:notesSz cx="6858000" cy="9144000"/>
@@ -118,11 +119,6 @@
       </a:defRPr>
     </a:lvl9pPr>
   </p:defaultTextStyle>
-  <p:extLst>
-    <p:ext uri="{EFAFB233-063F-42B5-8137-9DF3F51BA10A}">
-      <p15:sldGuideLst xmlns:p15="http://schemas.microsoft.com/office/powerpoint/2012/main"/>
-    </p:ext>
-  </p:extLst>
 </p:presentation>
 </file>
 
@@ -206,7 +202,7 @@
             </a:lvl1pPr>
           </a:lstStyle>
           <a:p>
-            <a:fld id="{B7BA7779-418D-4B2C-B560-E6B578682822}" type="datetimeFigureOut">
+            <a:fld id="{36FAF916-7DF5-44F7-B041-D31F93773F13}" type="datetimeFigureOut">
               <a:rPr lang="pt-BR" smtClean="0"/>
               <a:t>17/06/2026</a:t>
             </a:fld>
@@ -364,7 +360,7 @@
             </a:lvl1pPr>
           </a:lstStyle>
           <a:p>
-            <a:fld id="{9C992DF0-A449-41ED-A0D9-8199815A2919}" type="slidenum">
+            <a:fld id="{0D586C5D-8289-43D5-BEF5-015B367EF2D7}" type="slidenum">
               <a:rPr lang="pt-BR" smtClean="0"/>
               <a:t>‹nº›</a:t>
             </a:fld>
@@ -375,7 +371,7 @@
     </p:spTree>
     <p:extLst>
       <p:ext uri="{BB962C8B-B14F-4D97-AF65-F5344CB8AC3E}">
-        <p14:creationId xmlns:p14="http://schemas.microsoft.com/office/powerpoint/2010/main" val="1654220506"/>
+        <p14:creationId xmlns:p14="http://schemas.microsoft.com/office/powerpoint/2010/main" val="2005664393"/>
       </p:ext>
     </p:extLst>
   </p:cSld>
@@ -521,7 +517,7 @@
           <a:p>
             <a:r>
               <a:rPr lang="pt-BR"/>
-              <a:t>Abertura por Vitor. Apresentar objetivo: entender quais características explicam melhor o preço das casas e construir um fluxo completo de análise de dados e machine learning.</a:t>
+              <a:t>Vitor abre com a pergunta central: quais características ajudam a explicar e prever o preço das casas?</a:t>
             </a:r>
           </a:p>
         </p:txBody>
@@ -541,7 +537,7 @@
           <a:bodyPr/>
           <a:lstStyle/>
           <a:p>
-            <a:fld id="{9C992DF0-A449-41ED-A0D9-8199815A2919}" type="slidenum">
+            <a:fld id="{0D586C5D-8289-43D5-BEF5-015B367EF2D7}" type="slidenum">
               <a:rPr lang="pt-BR" smtClean="0"/>
               <a:t>1</a:t>
             </a:fld>
@@ -552,7 +548,7 @@
     </p:spTree>
     <p:extLst>
       <p:ext uri="{BB962C8B-B14F-4D97-AF65-F5344CB8AC3E}">
-        <p14:creationId xmlns:p14="http://schemas.microsoft.com/office/powerpoint/2010/main" val="1270478351"/>
+        <p14:creationId xmlns:p14="http://schemas.microsoft.com/office/powerpoint/2010/main" val="566233936"/>
       </p:ext>
     </p:extLst>
   </p:cSld>
@@ -608,7 +604,7 @@
           <a:p>
             <a:r>
               <a:rPr lang="pt-BR"/>
-              <a:t>Natalia: reforçar que a etapa de visualização não é decoração; ela conecta dados, modelos e interpretação para o leitor.</a:t>
+              <a:t>Natalia: explicar que esse slide responde diretamente ao feedback da avaliação: faltavam gráficos dos modelos no notebook 06.</a:t>
             </a:r>
           </a:p>
         </p:txBody>
@@ -628,7 +624,7 @@
           <a:bodyPr/>
           <a:lstStyle/>
           <a:p>
-            <a:fld id="{9C992DF0-A449-41ED-A0D9-8199815A2919}" type="slidenum">
+            <a:fld id="{0D586C5D-8289-43D5-BEF5-015B367EF2D7}" type="slidenum">
               <a:rPr lang="pt-BR" smtClean="0"/>
               <a:t>10</a:t>
             </a:fld>
@@ -639,7 +635,7 @@
     </p:spTree>
     <p:extLst>
       <p:ext uri="{BB962C8B-B14F-4D97-AF65-F5344CB8AC3E}">
-        <p14:creationId xmlns:p14="http://schemas.microsoft.com/office/powerpoint/2010/main" val="747275147"/>
+        <p14:creationId xmlns:p14="http://schemas.microsoft.com/office/powerpoint/2010/main" val="4048604703"/>
       </p:ext>
     </p:extLst>
   </p:cSld>
@@ -695,7 +691,7 @@
           <a:p>
             <a:r>
               <a:rPr lang="pt-BR"/>
-              <a:t>Vitor fecha: resumir o fluxo completo e reforçar a principal conclusão: preço é multivariado, e a combinação de boas features com modelos adequados gera previsões e interpretações melhores.</a:t>
+              <a:t>Natalia: reforçar que visualização é usada para guiar o leitor, não apenas ilustrar.</a:t>
             </a:r>
           </a:p>
         </p:txBody>
@@ -715,7 +711,7 @@
           <a:bodyPr/>
           <a:lstStyle/>
           <a:p>
-            <a:fld id="{9C992DF0-A449-41ED-A0D9-8199815A2919}" type="slidenum">
+            <a:fld id="{0D586C5D-8289-43D5-BEF5-015B367EF2D7}" type="slidenum">
               <a:rPr lang="pt-BR" smtClean="0"/>
               <a:t>11</a:t>
             </a:fld>
@@ -726,7 +722,7 @@
     </p:spTree>
     <p:extLst>
       <p:ext uri="{BB962C8B-B14F-4D97-AF65-F5344CB8AC3E}">
-        <p14:creationId xmlns:p14="http://schemas.microsoft.com/office/powerpoint/2010/main" val="2310524527"/>
+        <p14:creationId xmlns:p14="http://schemas.microsoft.com/office/powerpoint/2010/main" val="2206641937"/>
       </p:ext>
     </p:extLst>
   </p:cSld>
@@ -782,7 +778,7 @@
           <a:p>
             <a:r>
               <a:rPr lang="pt-BR"/>
-              <a:t>Backup para perguntas: feature engineering foi importante porque traduziu colunas em conceitos imobiliários; PCA foi usado para visualização; SalePrice não entrou no treino dos clusters.</a:t>
+              <a:t>Fechamento: mencionar que a última rodada de ajustes mira exatamente os descontos da avaliação: visualização e storytelling.</a:t>
             </a:r>
           </a:p>
         </p:txBody>
@@ -802,7 +798,7 @@
           <a:bodyPr/>
           <a:lstStyle/>
           <a:p>
-            <a:fld id="{9C992DF0-A449-41ED-A0D9-8199815A2919}" type="slidenum">
+            <a:fld id="{0D586C5D-8289-43D5-BEF5-015B367EF2D7}" type="slidenum">
               <a:rPr lang="pt-BR" smtClean="0"/>
               <a:t>12</a:t>
             </a:fld>
@@ -813,7 +809,94 @@
     </p:spTree>
     <p:extLst>
       <p:ext uri="{BB962C8B-B14F-4D97-AF65-F5344CB8AC3E}">
-        <p14:creationId xmlns:p14="http://schemas.microsoft.com/office/powerpoint/2010/main" val="137332569"/>
+        <p14:creationId xmlns:p14="http://schemas.microsoft.com/office/powerpoint/2010/main" val="2300275305"/>
+      </p:ext>
+    </p:extLst>
+  </p:cSld>
+  <p:clrMapOvr>
+    <a:masterClrMapping/>
+  </p:clrMapOvr>
+</p:notes>
+</file>
+
+<file path=ppt/notesSlides/notesSlide13.xml><?xml version="1.0" encoding="utf-8"?>
+<p:notes xmlns:a="http://schemas.openxmlformats.org/drawingml/2006/main" xmlns:r="http://schemas.openxmlformats.org/officeDocument/2006/relationships" xmlns:p="http://schemas.openxmlformats.org/presentationml/2006/main">
+  <p:cSld>
+    <p:spTree>
+      <p:nvGrpSpPr>
+        <p:cNvPr id="1" name=""/>
+        <p:cNvGrpSpPr/>
+        <p:nvPr/>
+      </p:nvGrpSpPr>
+      <p:grpSpPr>
+        <a:xfrm>
+          <a:off x="0" y="0"/>
+          <a:ext cx="0" cy="0"/>
+          <a:chOff x="0" y="0"/>
+          <a:chExt cx="0" cy="0"/>
+        </a:xfrm>
+      </p:grpSpPr>
+      <p:sp>
+        <p:nvSpPr>
+          <p:cNvPr id="2" name="Espaço Reservado para Imagem de Slide 1"/>
+          <p:cNvSpPr>
+            <a:spLocks noGrp="1" noRot="1" noChangeAspect="1"/>
+          </p:cNvSpPr>
+          <p:nvPr>
+            <p:ph type="sldImg"/>
+          </p:nvPr>
+        </p:nvSpPr>
+        <p:spPr/>
+      </p:sp>
+      <p:sp>
+        <p:nvSpPr>
+          <p:cNvPr id="3" name="Espaço Reservado para Anotações 2"/>
+          <p:cNvSpPr>
+            <a:spLocks noGrp="1"/>
+          </p:cNvSpPr>
+          <p:nvPr>
+            <p:ph type="body" idx="1"/>
+          </p:nvPr>
+        </p:nvSpPr>
+        <p:spPr/>
+        <p:txBody>
+          <a:bodyPr/>
+          <a:lstStyle/>
+          <a:p>
+            <a:r>
+              <a:rPr lang="pt-BR"/>
+              <a:t>Backup: explicar PCA como visualização, SalePrice fora do treino dos clusters e importância do feature engineering.</a:t>
+            </a:r>
+          </a:p>
+        </p:txBody>
+      </p:sp>
+      <p:sp>
+        <p:nvSpPr>
+          <p:cNvPr id="4" name="Espaço Reservado para Número de Slide 3"/>
+          <p:cNvSpPr>
+            <a:spLocks noGrp="1"/>
+          </p:cNvSpPr>
+          <p:nvPr>
+            <p:ph type="sldNum" sz="quarter" idx="5"/>
+          </p:nvPr>
+        </p:nvSpPr>
+        <p:spPr/>
+        <p:txBody>
+          <a:bodyPr/>
+          <a:lstStyle/>
+          <a:p>
+            <a:fld id="{0D586C5D-8289-43D5-BEF5-015B367EF2D7}" type="slidenum">
+              <a:rPr lang="pt-BR" smtClean="0"/>
+              <a:t>13</a:t>
+            </a:fld>
+            <a:endParaRPr lang="pt-BR"/>
+          </a:p>
+        </p:txBody>
+      </p:sp>
+    </p:spTree>
+    <p:extLst>
+      <p:ext uri="{BB962C8B-B14F-4D97-AF65-F5344CB8AC3E}">
+        <p14:creationId xmlns:p14="http://schemas.microsoft.com/office/powerpoint/2010/main" val="2073481423"/>
       </p:ext>
     </p:extLst>
   </p:cSld>
@@ -869,7 +952,7 @@
           <a:p>
             <a:r>
               <a:rPr lang="pt-BR"/>
-              <a:t>Vitor apresenta rapidamente a divisão e reforça que a apresentação foi montada como uma história contínua, não como seis partes desconectadas.</a:t>
+              <a:t>Explicar que a fala é dividida por etapa, mas a narrativa é única.</a:t>
             </a:r>
           </a:p>
         </p:txBody>
@@ -889,7 +972,7 @@
           <a:bodyPr/>
           <a:lstStyle/>
           <a:p>
-            <a:fld id="{9C992DF0-A449-41ED-A0D9-8199815A2919}" type="slidenum">
+            <a:fld id="{0D586C5D-8289-43D5-BEF5-015B367EF2D7}" type="slidenum">
               <a:rPr lang="pt-BR" smtClean="0"/>
               <a:t>2</a:t>
             </a:fld>
@@ -900,7 +983,7 @@
     </p:spTree>
     <p:extLst>
       <p:ext uri="{BB962C8B-B14F-4D97-AF65-F5344CB8AC3E}">
-        <p14:creationId xmlns:p14="http://schemas.microsoft.com/office/powerpoint/2010/main" val="3579505443"/>
+        <p14:creationId xmlns:p14="http://schemas.microsoft.com/office/powerpoint/2010/main" val="2588890300"/>
       </p:ext>
     </p:extLst>
   </p:cSld>
@@ -956,7 +1039,7 @@
           <a:p>
             <a:r>
               <a:rPr lang="pt-BR"/>
-              <a:t>Transição para Vitor: explicar que a primeira parte foi preparar dados confiáveis para que os modelos tivessem bons sinais de entrada.</a:t>
+              <a:t>Fazer a ponte para a limpeza e preparação dos dados.</a:t>
             </a:r>
           </a:p>
         </p:txBody>
@@ -976,7 +1059,7 @@
           <a:bodyPr/>
           <a:lstStyle/>
           <a:p>
-            <a:fld id="{9C992DF0-A449-41ED-A0D9-8199815A2919}" type="slidenum">
+            <a:fld id="{0D586C5D-8289-43D5-BEF5-015B367EF2D7}" type="slidenum">
               <a:rPr lang="pt-BR" smtClean="0"/>
               <a:t>3</a:t>
             </a:fld>
@@ -987,7 +1070,7 @@
     </p:spTree>
     <p:extLst>
       <p:ext uri="{BB962C8B-B14F-4D97-AF65-F5344CB8AC3E}">
-        <p14:creationId xmlns:p14="http://schemas.microsoft.com/office/powerpoint/2010/main" val="1357787702"/>
+        <p14:creationId xmlns:p14="http://schemas.microsoft.com/office/powerpoint/2010/main" val="3114856927"/>
       </p:ext>
     </p:extLst>
   </p:cSld>
@@ -1043,7 +1126,7 @@
           <a:p>
             <a:r>
               <a:rPr lang="pt-BR"/>
-              <a:t>Vitor: destacar que antes de qualquer modelo foi necessário entender distribuição, nulos, outliers e relações iniciais entre variáveis e preço.</a:t>
+              <a:t>Vitor: enfatizar que a análise começa entendendo distribuição, nulos, outliers e relações iniciais.</a:t>
             </a:r>
           </a:p>
         </p:txBody>
@@ -1063,7 +1146,7 @@
           <a:bodyPr/>
           <a:lstStyle/>
           <a:p>
-            <a:fld id="{9C992DF0-A449-41ED-A0D9-8199815A2919}" type="slidenum">
+            <a:fld id="{0D586C5D-8289-43D5-BEF5-015B367EF2D7}" type="slidenum">
               <a:rPr lang="pt-BR" smtClean="0"/>
               <a:t>4</a:t>
             </a:fld>
@@ -1074,7 +1157,7 @@
     </p:spTree>
     <p:extLst>
       <p:ext uri="{BB962C8B-B14F-4D97-AF65-F5344CB8AC3E}">
-        <p14:creationId xmlns:p14="http://schemas.microsoft.com/office/powerpoint/2010/main" val="2288108026"/>
+        <p14:creationId xmlns:p14="http://schemas.microsoft.com/office/powerpoint/2010/main" val="3821644362"/>
       </p:ext>
     </p:extLst>
   </p:cSld>
@@ -1130,7 +1213,7 @@
           <a:p>
             <a:r>
               <a:rPr lang="pt-BR"/>
-              <a:t>Vitor: explicar que feature engineering transforma colunas técnicas em sinais mais próximos da lógica de mercado imobiliário.</a:t>
+              <a:t>Explicar que as novas features aproximam o dataset da lógica imobiliária.</a:t>
             </a:r>
           </a:p>
         </p:txBody>
@@ -1150,7 +1233,7 @@
           <a:bodyPr/>
           <a:lstStyle/>
           <a:p>
-            <a:fld id="{9C992DF0-A449-41ED-A0D9-8199815A2919}" type="slidenum">
+            <a:fld id="{0D586C5D-8289-43D5-BEF5-015B367EF2D7}" type="slidenum">
               <a:rPr lang="pt-BR" smtClean="0"/>
               <a:t>5</a:t>
             </a:fld>
@@ -1161,7 +1244,7 @@
     </p:spTree>
     <p:extLst>
       <p:ext uri="{BB962C8B-B14F-4D97-AF65-F5344CB8AC3E}">
-        <p14:creationId xmlns:p14="http://schemas.microsoft.com/office/powerpoint/2010/main" val="2982958902"/>
+        <p14:creationId xmlns:p14="http://schemas.microsoft.com/office/powerpoint/2010/main" val="2110233597"/>
       </p:ext>
     </p:extLst>
   </p:cSld>
@@ -1217,7 +1300,7 @@
           <a:p>
             <a:r>
               <a:rPr lang="pt-BR"/>
-              <a:t>Luis Felipe: explicar diferença entre regressão simples e múltipla. Frase-chave: usar apenas área ajuda, mas combinar qualidade, área total, banheiros e garagem explica muito mais.</a:t>
+              <a:t>Luis Felipe: explicar que múltiplas variáveis capturam muito mais do que apenas área habitável.</a:t>
             </a:r>
           </a:p>
         </p:txBody>
@@ -1237,7 +1320,7 @@
           <a:bodyPr/>
           <a:lstStyle/>
           <a:p>
-            <a:fld id="{9C992DF0-A449-41ED-A0D9-8199815A2919}" type="slidenum">
+            <a:fld id="{0D586C5D-8289-43D5-BEF5-015B367EF2D7}" type="slidenum">
               <a:rPr lang="pt-BR" smtClean="0"/>
               <a:t>6</a:t>
             </a:fld>
@@ -1248,7 +1331,7 @@
     </p:spTree>
     <p:extLst>
       <p:ext uri="{BB962C8B-B14F-4D97-AF65-F5344CB8AC3E}">
-        <p14:creationId xmlns:p14="http://schemas.microsoft.com/office/powerpoint/2010/main" val="3236431097"/>
+        <p14:creationId xmlns:p14="http://schemas.microsoft.com/office/powerpoint/2010/main" val="3667113662"/>
       </p:ext>
     </p:extLst>
   </p:cSld>
@@ -1304,7 +1387,7 @@
           <a:p>
             <a:r>
               <a:rPr lang="pt-BR"/>
-              <a:t>Emanuel: destacar que as classes ficaram balanceadas pela mediana e que o desempenho alto mostra que a base separa bem imóveis acima e abaixo da mediana.</a:t>
+              <a:t>Emanuel: destacar que as classes ficaram balanceadas e os modelos performaram bem.</a:t>
             </a:r>
           </a:p>
         </p:txBody>
@@ -1324,7 +1407,7 @@
           <a:bodyPr/>
           <a:lstStyle/>
           <a:p>
-            <a:fld id="{9C992DF0-A449-41ED-A0D9-8199815A2919}" type="slidenum">
+            <a:fld id="{0D586C5D-8289-43D5-BEF5-015B367EF2D7}" type="slidenum">
               <a:rPr lang="pt-BR" smtClean="0"/>
               <a:t>7</a:t>
             </a:fld>
@@ -1335,7 +1418,7 @@
     </p:spTree>
     <p:extLst>
       <p:ext uri="{BB962C8B-B14F-4D97-AF65-F5344CB8AC3E}">
-        <p14:creationId xmlns:p14="http://schemas.microsoft.com/office/powerpoint/2010/main" val="47712435"/>
+        <p14:creationId xmlns:p14="http://schemas.microsoft.com/office/powerpoint/2010/main" val="3302073178"/>
       </p:ext>
     </p:extLst>
   </p:cSld>
@@ -1391,7 +1474,7 @@
           <a:p>
             <a:r>
               <a:rPr lang="pt-BR"/>
-              <a:t>Rogeres: se perguntarem sobre silhouette baixo, responder que dados imobiliários têm sobreposição real, mas os perfis médios ainda são interpretáveis.</a:t>
+              <a:t>Rogeres: ressaltar que PCA é visualização, não substitui a base completa.</a:t>
             </a:r>
           </a:p>
         </p:txBody>
@@ -1411,7 +1494,7 @@
           <a:bodyPr/>
           <a:lstStyle/>
           <a:p>
-            <a:fld id="{9C992DF0-A449-41ED-A0D9-8199815A2919}" type="slidenum">
+            <a:fld id="{0D586C5D-8289-43D5-BEF5-015B367EF2D7}" type="slidenum">
               <a:rPr lang="pt-BR" smtClean="0"/>
               <a:t>8</a:t>
             </a:fld>
@@ -1422,7 +1505,7 @@
     </p:spTree>
     <p:extLst>
       <p:ext uri="{BB962C8B-B14F-4D97-AF65-F5344CB8AC3E}">
-        <p14:creationId xmlns:p14="http://schemas.microsoft.com/office/powerpoint/2010/main" val="2888104212"/>
+        <p14:creationId xmlns:p14="http://schemas.microsoft.com/office/powerpoint/2010/main" val="2431590333"/>
       </p:ext>
     </p:extLst>
   </p:cSld>
@@ -1478,7 +1561,7 @@
           <a:p>
             <a:r>
               <a:rPr lang="pt-BR"/>
-              <a:t>Alessandro: explicar em linguagem simples que Apriori encontra combinações frequentes e LOF encontra pontos fora do padrão local.</a:t>
+              <a:t>Alessandro: conectar Apriori e LOF com interpretação de padrões e anomalias.</a:t>
             </a:r>
           </a:p>
         </p:txBody>
@@ -1498,7 +1581,7 @@
           <a:bodyPr/>
           <a:lstStyle/>
           <a:p>
-            <a:fld id="{9C992DF0-A449-41ED-A0D9-8199815A2919}" type="slidenum">
+            <a:fld id="{0D586C5D-8289-43D5-BEF5-015B367EF2D7}" type="slidenum">
               <a:rPr lang="pt-BR" smtClean="0"/>
               <a:t>9</a:t>
             </a:fld>
@@ -1509,7 +1592,7 @@
     </p:spTree>
     <p:extLst>
       <p:ext uri="{BB962C8B-B14F-4D97-AF65-F5344CB8AC3E}">
-        <p14:creationId xmlns:p14="http://schemas.microsoft.com/office/powerpoint/2010/main" val="1730113109"/>
+        <p14:creationId xmlns:p14="http://schemas.microsoft.com/office/powerpoint/2010/main" val="3832128471"/>
       </p:ext>
     </p:extLst>
   </p:cSld>
@@ -1541,7 +1624,7 @@
           <p:cNvPr id="2" name="Título 1">
             <a:extLst>
               <a:ext uri="{FF2B5EF4-FFF2-40B4-BE49-F238E27FC236}">
-                <a16:creationId xmlns:a16="http://schemas.microsoft.com/office/drawing/2014/main" id="{EB189EF1-61FF-C7BD-68D1-8E4A72C4C7FB}"/>
+                <a16:creationId xmlns:a16="http://schemas.microsoft.com/office/drawing/2014/main" id="{43E84ED8-9D86-946D-C357-FC64D4C3E63A}"/>
               </a:ext>
             </a:extLst>
           </p:cNvPr>
@@ -1578,7 +1661,7 @@
           <p:cNvPr id="3" name="Subtítulo 2">
             <a:extLst>
               <a:ext uri="{FF2B5EF4-FFF2-40B4-BE49-F238E27FC236}">
-                <a16:creationId xmlns:a16="http://schemas.microsoft.com/office/drawing/2014/main" id="{56F87CB1-E8EA-9CFD-DCBB-8D84C3610206}"/>
+                <a16:creationId xmlns:a16="http://schemas.microsoft.com/office/drawing/2014/main" id="{6E5DF886-0762-5955-7D9E-9FC050E2D888}"/>
               </a:ext>
             </a:extLst>
           </p:cNvPr>
@@ -1648,7 +1731,7 @@
           <p:cNvPr id="4" name="Espaço Reservado para Data 3">
             <a:extLst>
               <a:ext uri="{FF2B5EF4-FFF2-40B4-BE49-F238E27FC236}">
-                <a16:creationId xmlns:a16="http://schemas.microsoft.com/office/drawing/2014/main" id="{8DCCF3BB-A5D4-BB13-CEEB-12ED862B9887}"/>
+                <a16:creationId xmlns:a16="http://schemas.microsoft.com/office/drawing/2014/main" id="{B46E9AE8-A548-31B0-0969-09CA428516E5}"/>
               </a:ext>
             </a:extLst>
           </p:cNvPr>
@@ -1664,7 +1747,7 @@
           <a:bodyPr/>
           <a:lstStyle/>
           <a:p>
-            <a:fld id="{4D1B437B-2330-4EDA-BC0F-19C015E2505B}" type="datetimeFigureOut">
+            <a:fld id="{61A49896-4688-4C38-ACB0-A9EE9149AFE1}" type="datetimeFigureOut">
               <a:rPr lang="pt-BR" smtClean="0"/>
               <a:t>17/06/2026</a:t>
             </a:fld>
@@ -1677,7 +1760,7 @@
           <p:cNvPr id="5" name="Espaço Reservado para Rodapé 4">
             <a:extLst>
               <a:ext uri="{FF2B5EF4-FFF2-40B4-BE49-F238E27FC236}">
-                <a16:creationId xmlns:a16="http://schemas.microsoft.com/office/drawing/2014/main" id="{23F4642E-4551-A0CF-4C0F-63C9438F4F77}"/>
+                <a16:creationId xmlns:a16="http://schemas.microsoft.com/office/drawing/2014/main" id="{4CFE2352-9C36-80FF-9D4A-24E1801F7C12}"/>
               </a:ext>
             </a:extLst>
           </p:cNvPr>
@@ -1702,7 +1785,7 @@
           <p:cNvPr id="6" name="Espaço Reservado para Número de Slide 5">
             <a:extLst>
               <a:ext uri="{FF2B5EF4-FFF2-40B4-BE49-F238E27FC236}">
-                <a16:creationId xmlns:a16="http://schemas.microsoft.com/office/drawing/2014/main" id="{ACE5A7EF-DEBD-413D-5D89-3A2E9D0A034B}"/>
+                <a16:creationId xmlns:a16="http://schemas.microsoft.com/office/drawing/2014/main" id="{B22839F0-C348-6309-476C-612DC1551853}"/>
               </a:ext>
             </a:extLst>
           </p:cNvPr>
@@ -1718,7 +1801,7 @@
           <a:bodyPr/>
           <a:lstStyle/>
           <a:p>
-            <a:fld id="{72929FCF-42D2-4232-A1D1-73027802DFFE}" type="slidenum">
+            <a:fld id="{7CC8D46C-8D4F-4DC0-B08B-32377543F026}" type="slidenum">
               <a:rPr lang="pt-BR" smtClean="0"/>
               <a:t>‹nº›</a:t>
             </a:fld>
@@ -1729,7 +1812,7 @@
     </p:spTree>
     <p:extLst>
       <p:ext uri="{BB962C8B-B14F-4D97-AF65-F5344CB8AC3E}">
-        <p14:creationId xmlns:p14="http://schemas.microsoft.com/office/powerpoint/2010/main" val="1234974727"/>
+        <p14:creationId xmlns:p14="http://schemas.microsoft.com/office/powerpoint/2010/main" val="2428712690"/>
       </p:ext>
     </p:extLst>
   </p:cSld>
@@ -1761,7 +1844,7 @@
           <p:cNvPr id="2" name="Título 1">
             <a:extLst>
               <a:ext uri="{FF2B5EF4-FFF2-40B4-BE49-F238E27FC236}">
-                <a16:creationId xmlns:a16="http://schemas.microsoft.com/office/drawing/2014/main" id="{D5170514-6B9B-328A-5320-9A5F13EB055E}"/>
+                <a16:creationId xmlns:a16="http://schemas.microsoft.com/office/drawing/2014/main" id="{A93C635F-8FE5-6900-94C3-76DC1D38A5AF}"/>
               </a:ext>
             </a:extLst>
           </p:cNvPr>
@@ -1789,7 +1872,7 @@
           <p:cNvPr id="3" name="Espaço Reservado para Texto Vertical 2">
             <a:extLst>
               <a:ext uri="{FF2B5EF4-FFF2-40B4-BE49-F238E27FC236}">
-                <a16:creationId xmlns:a16="http://schemas.microsoft.com/office/drawing/2014/main" id="{99CE667C-1144-5C30-B441-F990461F1E68}"/>
+                <a16:creationId xmlns:a16="http://schemas.microsoft.com/office/drawing/2014/main" id="{3C8FADEB-CE0F-6BDA-CC7A-10FDFB6D715B}"/>
               </a:ext>
             </a:extLst>
           </p:cNvPr>
@@ -1846,7 +1929,7 @@
           <p:cNvPr id="4" name="Espaço Reservado para Data 3">
             <a:extLst>
               <a:ext uri="{FF2B5EF4-FFF2-40B4-BE49-F238E27FC236}">
-                <a16:creationId xmlns:a16="http://schemas.microsoft.com/office/drawing/2014/main" id="{A4608ADF-F82C-1777-B3A2-484B79EAF544}"/>
+                <a16:creationId xmlns:a16="http://schemas.microsoft.com/office/drawing/2014/main" id="{477A5EFD-ED49-1E3D-BB49-ADB574739D71}"/>
               </a:ext>
             </a:extLst>
           </p:cNvPr>
@@ -1862,7 +1945,7 @@
           <a:bodyPr/>
           <a:lstStyle/>
           <a:p>
-            <a:fld id="{4D1B437B-2330-4EDA-BC0F-19C015E2505B}" type="datetimeFigureOut">
+            <a:fld id="{61A49896-4688-4C38-ACB0-A9EE9149AFE1}" type="datetimeFigureOut">
               <a:rPr lang="pt-BR" smtClean="0"/>
               <a:t>17/06/2026</a:t>
             </a:fld>
@@ -1875,7 +1958,7 @@
           <p:cNvPr id="5" name="Espaço Reservado para Rodapé 4">
             <a:extLst>
               <a:ext uri="{FF2B5EF4-FFF2-40B4-BE49-F238E27FC236}">
-                <a16:creationId xmlns:a16="http://schemas.microsoft.com/office/drawing/2014/main" id="{0249BE82-C108-EDDC-629D-EAD493C131E3}"/>
+                <a16:creationId xmlns:a16="http://schemas.microsoft.com/office/drawing/2014/main" id="{9365E0A9-8FF2-B19F-ADC2-E9AF181709BB}"/>
               </a:ext>
             </a:extLst>
           </p:cNvPr>
@@ -1900,7 +1983,7 @@
           <p:cNvPr id="6" name="Espaço Reservado para Número de Slide 5">
             <a:extLst>
               <a:ext uri="{FF2B5EF4-FFF2-40B4-BE49-F238E27FC236}">
-                <a16:creationId xmlns:a16="http://schemas.microsoft.com/office/drawing/2014/main" id="{65D5F883-E3CD-EE05-F1BE-826865C3CFF8}"/>
+                <a16:creationId xmlns:a16="http://schemas.microsoft.com/office/drawing/2014/main" id="{DE7C3DAA-602F-F06F-6820-4EC3D1FB8445}"/>
               </a:ext>
             </a:extLst>
           </p:cNvPr>
@@ -1916,7 +1999,7 @@
           <a:bodyPr/>
           <a:lstStyle/>
           <a:p>
-            <a:fld id="{72929FCF-42D2-4232-A1D1-73027802DFFE}" type="slidenum">
+            <a:fld id="{7CC8D46C-8D4F-4DC0-B08B-32377543F026}" type="slidenum">
               <a:rPr lang="pt-BR" smtClean="0"/>
               <a:t>‹nº›</a:t>
             </a:fld>
@@ -1927,7 +2010,7 @@
     </p:spTree>
     <p:extLst>
       <p:ext uri="{BB962C8B-B14F-4D97-AF65-F5344CB8AC3E}">
-        <p14:creationId xmlns:p14="http://schemas.microsoft.com/office/powerpoint/2010/main" val="4114536464"/>
+        <p14:creationId xmlns:p14="http://schemas.microsoft.com/office/powerpoint/2010/main" val="1515522055"/>
       </p:ext>
     </p:extLst>
   </p:cSld>
@@ -1959,7 +2042,7 @@
           <p:cNvPr id="2" name="Título Vertical 1">
             <a:extLst>
               <a:ext uri="{FF2B5EF4-FFF2-40B4-BE49-F238E27FC236}">
-                <a16:creationId xmlns:a16="http://schemas.microsoft.com/office/drawing/2014/main" id="{2F40F1A9-B321-6550-9BC0-1442D5D838D3}"/>
+                <a16:creationId xmlns:a16="http://schemas.microsoft.com/office/drawing/2014/main" id="{8540E9C2-35A7-8B63-50E2-B50AA0E10889}"/>
               </a:ext>
             </a:extLst>
           </p:cNvPr>
@@ -1992,7 +2075,7 @@
           <p:cNvPr id="3" name="Espaço Reservado para Texto Vertical 2">
             <a:extLst>
               <a:ext uri="{FF2B5EF4-FFF2-40B4-BE49-F238E27FC236}">
-                <a16:creationId xmlns:a16="http://schemas.microsoft.com/office/drawing/2014/main" id="{323A41F4-6A65-D3AA-5925-7321DC008E20}"/>
+                <a16:creationId xmlns:a16="http://schemas.microsoft.com/office/drawing/2014/main" id="{721C6C55-27E7-878D-62EF-3B655C8D2C3E}"/>
               </a:ext>
             </a:extLst>
           </p:cNvPr>
@@ -2054,7 +2137,7 @@
           <p:cNvPr id="4" name="Espaço Reservado para Data 3">
             <a:extLst>
               <a:ext uri="{FF2B5EF4-FFF2-40B4-BE49-F238E27FC236}">
-                <a16:creationId xmlns:a16="http://schemas.microsoft.com/office/drawing/2014/main" id="{D5FBD53D-B9F0-5340-1D01-B6F3F6F151C7}"/>
+                <a16:creationId xmlns:a16="http://schemas.microsoft.com/office/drawing/2014/main" id="{2811D382-6E18-9362-536F-EB5507C62C94}"/>
               </a:ext>
             </a:extLst>
           </p:cNvPr>
@@ -2070,7 +2153,7 @@
           <a:bodyPr/>
           <a:lstStyle/>
           <a:p>
-            <a:fld id="{4D1B437B-2330-4EDA-BC0F-19C015E2505B}" type="datetimeFigureOut">
+            <a:fld id="{61A49896-4688-4C38-ACB0-A9EE9149AFE1}" type="datetimeFigureOut">
               <a:rPr lang="pt-BR" smtClean="0"/>
               <a:t>17/06/2026</a:t>
             </a:fld>
@@ -2083,7 +2166,7 @@
           <p:cNvPr id="5" name="Espaço Reservado para Rodapé 4">
             <a:extLst>
               <a:ext uri="{FF2B5EF4-FFF2-40B4-BE49-F238E27FC236}">
-                <a16:creationId xmlns:a16="http://schemas.microsoft.com/office/drawing/2014/main" id="{188A933C-E21B-8462-CD7A-5EDC7BFAB5D9}"/>
+                <a16:creationId xmlns:a16="http://schemas.microsoft.com/office/drawing/2014/main" id="{7BC8AE64-8C0B-AC73-77E8-BF7F143CF969}"/>
               </a:ext>
             </a:extLst>
           </p:cNvPr>
@@ -2108,7 +2191,7 @@
           <p:cNvPr id="6" name="Espaço Reservado para Número de Slide 5">
             <a:extLst>
               <a:ext uri="{FF2B5EF4-FFF2-40B4-BE49-F238E27FC236}">
-                <a16:creationId xmlns:a16="http://schemas.microsoft.com/office/drawing/2014/main" id="{B64AB837-773F-48EA-7F16-0C020199380C}"/>
+                <a16:creationId xmlns:a16="http://schemas.microsoft.com/office/drawing/2014/main" id="{44B39271-DF1B-9F88-A54E-1D29848CB70E}"/>
               </a:ext>
             </a:extLst>
           </p:cNvPr>
@@ -2124,7 +2207,7 @@
           <a:bodyPr/>
           <a:lstStyle/>
           <a:p>
-            <a:fld id="{72929FCF-42D2-4232-A1D1-73027802DFFE}" type="slidenum">
+            <a:fld id="{7CC8D46C-8D4F-4DC0-B08B-32377543F026}" type="slidenum">
               <a:rPr lang="pt-BR" smtClean="0"/>
               <a:t>‹nº›</a:t>
             </a:fld>
@@ -2135,7 +2218,7 @@
     </p:spTree>
     <p:extLst>
       <p:ext uri="{BB962C8B-B14F-4D97-AF65-F5344CB8AC3E}">
-        <p14:creationId xmlns:p14="http://schemas.microsoft.com/office/powerpoint/2010/main" val="1272880712"/>
+        <p14:creationId xmlns:p14="http://schemas.microsoft.com/office/powerpoint/2010/main" val="1686046007"/>
       </p:ext>
     </p:extLst>
   </p:cSld>
@@ -2167,7 +2250,7 @@
           <p:cNvPr id="2" name="Título 1">
             <a:extLst>
               <a:ext uri="{FF2B5EF4-FFF2-40B4-BE49-F238E27FC236}">
-                <a16:creationId xmlns:a16="http://schemas.microsoft.com/office/drawing/2014/main" id="{534373F5-6A0A-48CD-57CC-F9A980DA399C}"/>
+                <a16:creationId xmlns:a16="http://schemas.microsoft.com/office/drawing/2014/main" id="{1390FD8F-CC5E-D948-979F-D7AB0460B3C3}"/>
               </a:ext>
             </a:extLst>
           </p:cNvPr>
@@ -2195,7 +2278,7 @@
           <p:cNvPr id="3" name="Espaço Reservado para Conteúdo 2">
             <a:extLst>
               <a:ext uri="{FF2B5EF4-FFF2-40B4-BE49-F238E27FC236}">
-                <a16:creationId xmlns:a16="http://schemas.microsoft.com/office/drawing/2014/main" id="{4ADDFB41-1856-3360-58CE-A315E9B2ED14}"/>
+                <a16:creationId xmlns:a16="http://schemas.microsoft.com/office/drawing/2014/main" id="{FB039817-EC1B-9CD3-9CC6-AA633579DEFB}"/>
               </a:ext>
             </a:extLst>
           </p:cNvPr>
@@ -2252,7 +2335,7 @@
           <p:cNvPr id="4" name="Espaço Reservado para Data 3">
             <a:extLst>
               <a:ext uri="{FF2B5EF4-FFF2-40B4-BE49-F238E27FC236}">
-                <a16:creationId xmlns:a16="http://schemas.microsoft.com/office/drawing/2014/main" id="{AF968790-DEA9-9372-4692-A9DCD2F65174}"/>
+                <a16:creationId xmlns:a16="http://schemas.microsoft.com/office/drawing/2014/main" id="{04979C0D-9204-B7FC-CFF3-82BBC46E3473}"/>
               </a:ext>
             </a:extLst>
           </p:cNvPr>
@@ -2268,7 +2351,7 @@
           <a:bodyPr/>
           <a:lstStyle/>
           <a:p>
-            <a:fld id="{4D1B437B-2330-4EDA-BC0F-19C015E2505B}" type="datetimeFigureOut">
+            <a:fld id="{61A49896-4688-4C38-ACB0-A9EE9149AFE1}" type="datetimeFigureOut">
               <a:rPr lang="pt-BR" smtClean="0"/>
               <a:t>17/06/2026</a:t>
             </a:fld>
@@ -2281,7 +2364,7 @@
           <p:cNvPr id="5" name="Espaço Reservado para Rodapé 4">
             <a:extLst>
               <a:ext uri="{FF2B5EF4-FFF2-40B4-BE49-F238E27FC236}">
-                <a16:creationId xmlns:a16="http://schemas.microsoft.com/office/drawing/2014/main" id="{69D1E247-D1BD-FF94-EE25-87B9FB9299DA}"/>
+                <a16:creationId xmlns:a16="http://schemas.microsoft.com/office/drawing/2014/main" id="{71B1282B-7D20-509D-72AF-ADF1404FCBDB}"/>
               </a:ext>
             </a:extLst>
           </p:cNvPr>
@@ -2306,7 +2389,7 @@
           <p:cNvPr id="6" name="Espaço Reservado para Número de Slide 5">
             <a:extLst>
               <a:ext uri="{FF2B5EF4-FFF2-40B4-BE49-F238E27FC236}">
-                <a16:creationId xmlns:a16="http://schemas.microsoft.com/office/drawing/2014/main" id="{7FF35C98-8705-33ED-F73E-08D167B71752}"/>
+                <a16:creationId xmlns:a16="http://schemas.microsoft.com/office/drawing/2014/main" id="{54C17D56-9541-665F-977D-901C17506188}"/>
               </a:ext>
             </a:extLst>
           </p:cNvPr>
@@ -2322,7 +2405,7 @@
           <a:bodyPr/>
           <a:lstStyle/>
           <a:p>
-            <a:fld id="{72929FCF-42D2-4232-A1D1-73027802DFFE}" type="slidenum">
+            <a:fld id="{7CC8D46C-8D4F-4DC0-B08B-32377543F026}" type="slidenum">
               <a:rPr lang="pt-BR" smtClean="0"/>
               <a:t>‹nº›</a:t>
             </a:fld>
@@ -2333,7 +2416,7 @@
     </p:spTree>
     <p:extLst>
       <p:ext uri="{BB962C8B-B14F-4D97-AF65-F5344CB8AC3E}">
-        <p14:creationId xmlns:p14="http://schemas.microsoft.com/office/powerpoint/2010/main" val="3979205832"/>
+        <p14:creationId xmlns:p14="http://schemas.microsoft.com/office/powerpoint/2010/main" val="1107507253"/>
       </p:ext>
     </p:extLst>
   </p:cSld>
@@ -2365,7 +2448,7 @@
           <p:cNvPr id="2" name="Título 1">
             <a:extLst>
               <a:ext uri="{FF2B5EF4-FFF2-40B4-BE49-F238E27FC236}">
-                <a16:creationId xmlns:a16="http://schemas.microsoft.com/office/drawing/2014/main" id="{5644E9F0-4B4D-74D3-C3BC-5A88B4F5BA8A}"/>
+                <a16:creationId xmlns:a16="http://schemas.microsoft.com/office/drawing/2014/main" id="{8AE902C5-D081-A01B-2AAE-CB26225D970D}"/>
               </a:ext>
             </a:extLst>
           </p:cNvPr>
@@ -2402,7 +2485,7 @@
           <p:cNvPr id="3" name="Espaço Reservado para Texto 2">
             <a:extLst>
               <a:ext uri="{FF2B5EF4-FFF2-40B4-BE49-F238E27FC236}">
-                <a16:creationId xmlns:a16="http://schemas.microsoft.com/office/drawing/2014/main" id="{9CBA6269-FE93-2FA6-DCBA-587C13BC906B}"/>
+                <a16:creationId xmlns:a16="http://schemas.microsoft.com/office/drawing/2014/main" id="{DBA66425-1213-4E58-46AA-E7FB91D1EB25}"/>
               </a:ext>
             </a:extLst>
           </p:cNvPr>
@@ -2527,7 +2610,7 @@
           <p:cNvPr id="4" name="Espaço Reservado para Data 3">
             <a:extLst>
               <a:ext uri="{FF2B5EF4-FFF2-40B4-BE49-F238E27FC236}">
-                <a16:creationId xmlns:a16="http://schemas.microsoft.com/office/drawing/2014/main" id="{C51A1C60-8C48-78C2-C567-DC229B9E0B48}"/>
+                <a16:creationId xmlns:a16="http://schemas.microsoft.com/office/drawing/2014/main" id="{918DDB37-D9CC-6FD7-2FC6-750B9DF90066}"/>
               </a:ext>
             </a:extLst>
           </p:cNvPr>
@@ -2543,7 +2626,7 @@
           <a:bodyPr/>
           <a:lstStyle/>
           <a:p>
-            <a:fld id="{4D1B437B-2330-4EDA-BC0F-19C015E2505B}" type="datetimeFigureOut">
+            <a:fld id="{61A49896-4688-4C38-ACB0-A9EE9149AFE1}" type="datetimeFigureOut">
               <a:rPr lang="pt-BR" smtClean="0"/>
               <a:t>17/06/2026</a:t>
             </a:fld>
@@ -2556,7 +2639,7 @@
           <p:cNvPr id="5" name="Espaço Reservado para Rodapé 4">
             <a:extLst>
               <a:ext uri="{FF2B5EF4-FFF2-40B4-BE49-F238E27FC236}">
-                <a16:creationId xmlns:a16="http://schemas.microsoft.com/office/drawing/2014/main" id="{68C448AF-6A0D-8A15-4A81-7580EFC4DA2F}"/>
+                <a16:creationId xmlns:a16="http://schemas.microsoft.com/office/drawing/2014/main" id="{50997000-C236-7DCB-DD2C-D698BE4030FD}"/>
               </a:ext>
             </a:extLst>
           </p:cNvPr>
@@ -2581,7 +2664,7 @@
           <p:cNvPr id="6" name="Espaço Reservado para Número de Slide 5">
             <a:extLst>
               <a:ext uri="{FF2B5EF4-FFF2-40B4-BE49-F238E27FC236}">
-                <a16:creationId xmlns:a16="http://schemas.microsoft.com/office/drawing/2014/main" id="{9E103657-ABB5-F59D-67C7-611D98449B74}"/>
+                <a16:creationId xmlns:a16="http://schemas.microsoft.com/office/drawing/2014/main" id="{01E9FA03-5246-9D96-5F43-3630327F5A85}"/>
               </a:ext>
             </a:extLst>
           </p:cNvPr>
@@ -2597,7 +2680,7 @@
           <a:bodyPr/>
           <a:lstStyle/>
           <a:p>
-            <a:fld id="{72929FCF-42D2-4232-A1D1-73027802DFFE}" type="slidenum">
+            <a:fld id="{7CC8D46C-8D4F-4DC0-B08B-32377543F026}" type="slidenum">
               <a:rPr lang="pt-BR" smtClean="0"/>
               <a:t>‹nº›</a:t>
             </a:fld>
@@ -2608,7 +2691,7 @@
     </p:spTree>
     <p:extLst>
       <p:ext uri="{BB962C8B-B14F-4D97-AF65-F5344CB8AC3E}">
-        <p14:creationId xmlns:p14="http://schemas.microsoft.com/office/powerpoint/2010/main" val="760350140"/>
+        <p14:creationId xmlns:p14="http://schemas.microsoft.com/office/powerpoint/2010/main" val="2639287841"/>
       </p:ext>
     </p:extLst>
   </p:cSld>
@@ -2640,7 +2723,7 @@
           <p:cNvPr id="2" name="Título 1">
             <a:extLst>
               <a:ext uri="{FF2B5EF4-FFF2-40B4-BE49-F238E27FC236}">
-                <a16:creationId xmlns:a16="http://schemas.microsoft.com/office/drawing/2014/main" id="{3A248CC6-5517-6893-ADC7-DC55B003B082}"/>
+                <a16:creationId xmlns:a16="http://schemas.microsoft.com/office/drawing/2014/main" id="{C4303B9B-6608-31DD-870B-83C25AAB51DC}"/>
               </a:ext>
             </a:extLst>
           </p:cNvPr>
@@ -2668,7 +2751,7 @@
           <p:cNvPr id="3" name="Espaço Reservado para Conteúdo 2">
             <a:extLst>
               <a:ext uri="{FF2B5EF4-FFF2-40B4-BE49-F238E27FC236}">
-                <a16:creationId xmlns:a16="http://schemas.microsoft.com/office/drawing/2014/main" id="{F0200858-B110-DAD4-9F06-0DCA7647B935}"/>
+                <a16:creationId xmlns:a16="http://schemas.microsoft.com/office/drawing/2014/main" id="{D8C21603-3B37-B207-3965-503715B11A72}"/>
               </a:ext>
             </a:extLst>
           </p:cNvPr>
@@ -2730,7 +2813,7 @@
           <p:cNvPr id="4" name="Espaço Reservado para Conteúdo 3">
             <a:extLst>
               <a:ext uri="{FF2B5EF4-FFF2-40B4-BE49-F238E27FC236}">
-                <a16:creationId xmlns:a16="http://schemas.microsoft.com/office/drawing/2014/main" id="{8CEDC5A8-842D-547B-35E7-B7E981817808}"/>
+                <a16:creationId xmlns:a16="http://schemas.microsoft.com/office/drawing/2014/main" id="{9F68862C-FBA8-5E8B-121C-A098180FBCDC}"/>
               </a:ext>
             </a:extLst>
           </p:cNvPr>
@@ -2792,7 +2875,7 @@
           <p:cNvPr id="5" name="Espaço Reservado para Data 4">
             <a:extLst>
               <a:ext uri="{FF2B5EF4-FFF2-40B4-BE49-F238E27FC236}">
-                <a16:creationId xmlns:a16="http://schemas.microsoft.com/office/drawing/2014/main" id="{9A9F34A6-DFB9-5FC8-B112-EED107D9E061}"/>
+                <a16:creationId xmlns:a16="http://schemas.microsoft.com/office/drawing/2014/main" id="{F993D396-93D5-27AE-CB28-47B725D7EDFE}"/>
               </a:ext>
             </a:extLst>
           </p:cNvPr>
@@ -2808,7 +2891,7 @@
           <a:bodyPr/>
           <a:lstStyle/>
           <a:p>
-            <a:fld id="{4D1B437B-2330-4EDA-BC0F-19C015E2505B}" type="datetimeFigureOut">
+            <a:fld id="{61A49896-4688-4C38-ACB0-A9EE9149AFE1}" type="datetimeFigureOut">
               <a:rPr lang="pt-BR" smtClean="0"/>
               <a:t>17/06/2026</a:t>
             </a:fld>
@@ -2821,7 +2904,7 @@
           <p:cNvPr id="6" name="Espaço Reservado para Rodapé 5">
             <a:extLst>
               <a:ext uri="{FF2B5EF4-FFF2-40B4-BE49-F238E27FC236}">
-                <a16:creationId xmlns:a16="http://schemas.microsoft.com/office/drawing/2014/main" id="{B1775A45-F513-C627-DCEE-8587F9986F5E}"/>
+                <a16:creationId xmlns:a16="http://schemas.microsoft.com/office/drawing/2014/main" id="{21793123-ACE7-5F17-B1A7-75E9AE4FD547}"/>
               </a:ext>
             </a:extLst>
           </p:cNvPr>
@@ -2846,7 +2929,7 @@
           <p:cNvPr id="7" name="Espaço Reservado para Número de Slide 6">
             <a:extLst>
               <a:ext uri="{FF2B5EF4-FFF2-40B4-BE49-F238E27FC236}">
-                <a16:creationId xmlns:a16="http://schemas.microsoft.com/office/drawing/2014/main" id="{861789CC-1704-8A77-D692-306E114CAB21}"/>
+                <a16:creationId xmlns:a16="http://schemas.microsoft.com/office/drawing/2014/main" id="{82100AD5-72E5-DB2E-C48D-B5A5118AAB8C}"/>
               </a:ext>
             </a:extLst>
           </p:cNvPr>
@@ -2862,7 +2945,7 @@
           <a:bodyPr/>
           <a:lstStyle/>
           <a:p>
-            <a:fld id="{72929FCF-42D2-4232-A1D1-73027802DFFE}" type="slidenum">
+            <a:fld id="{7CC8D46C-8D4F-4DC0-B08B-32377543F026}" type="slidenum">
               <a:rPr lang="pt-BR" smtClean="0"/>
               <a:t>‹nº›</a:t>
             </a:fld>
@@ -2873,7 +2956,7 @@
     </p:spTree>
     <p:extLst>
       <p:ext uri="{BB962C8B-B14F-4D97-AF65-F5344CB8AC3E}">
-        <p14:creationId xmlns:p14="http://schemas.microsoft.com/office/powerpoint/2010/main" val="3668756086"/>
+        <p14:creationId xmlns:p14="http://schemas.microsoft.com/office/powerpoint/2010/main" val="53554352"/>
       </p:ext>
     </p:extLst>
   </p:cSld>
@@ -2905,7 +2988,7 @@
           <p:cNvPr id="2" name="Título 1">
             <a:extLst>
               <a:ext uri="{FF2B5EF4-FFF2-40B4-BE49-F238E27FC236}">
-                <a16:creationId xmlns:a16="http://schemas.microsoft.com/office/drawing/2014/main" id="{B8501A3A-73DA-04F6-3AEB-B51412CD17DC}"/>
+                <a16:creationId xmlns:a16="http://schemas.microsoft.com/office/drawing/2014/main" id="{8A876112-2702-865E-E62A-9AE19850BDEA}"/>
               </a:ext>
             </a:extLst>
           </p:cNvPr>
@@ -2938,7 +3021,7 @@
           <p:cNvPr id="3" name="Espaço Reservado para Texto 2">
             <a:extLst>
               <a:ext uri="{FF2B5EF4-FFF2-40B4-BE49-F238E27FC236}">
-                <a16:creationId xmlns:a16="http://schemas.microsoft.com/office/drawing/2014/main" id="{49E67357-3D82-DE19-F10B-172549E25D7C}"/>
+                <a16:creationId xmlns:a16="http://schemas.microsoft.com/office/drawing/2014/main" id="{F1891F6A-F381-3BAA-2CE2-1A6AD8841729}"/>
               </a:ext>
             </a:extLst>
           </p:cNvPr>
@@ -3009,7 +3092,7 @@
           <p:cNvPr id="4" name="Espaço Reservado para Conteúdo 3">
             <a:extLst>
               <a:ext uri="{FF2B5EF4-FFF2-40B4-BE49-F238E27FC236}">
-                <a16:creationId xmlns:a16="http://schemas.microsoft.com/office/drawing/2014/main" id="{4E1DE6EC-65C1-DEA9-2BAE-94E51FD36AC7}"/>
+                <a16:creationId xmlns:a16="http://schemas.microsoft.com/office/drawing/2014/main" id="{9C6B67A7-B491-8F85-09B1-54567055481E}"/>
               </a:ext>
             </a:extLst>
           </p:cNvPr>
@@ -3071,7 +3154,7 @@
           <p:cNvPr id="5" name="Espaço Reservado para Texto 4">
             <a:extLst>
               <a:ext uri="{FF2B5EF4-FFF2-40B4-BE49-F238E27FC236}">
-                <a16:creationId xmlns:a16="http://schemas.microsoft.com/office/drawing/2014/main" id="{060F4FD5-22CC-CA59-7E3F-A9B4273C68A6}"/>
+                <a16:creationId xmlns:a16="http://schemas.microsoft.com/office/drawing/2014/main" id="{3A996AA9-1086-BB78-8BB7-3F1FE2C60BB1}"/>
               </a:ext>
             </a:extLst>
           </p:cNvPr>
@@ -3142,7 +3225,7 @@
           <p:cNvPr id="6" name="Espaço Reservado para Conteúdo 5">
             <a:extLst>
               <a:ext uri="{FF2B5EF4-FFF2-40B4-BE49-F238E27FC236}">
-                <a16:creationId xmlns:a16="http://schemas.microsoft.com/office/drawing/2014/main" id="{6565BCA6-8607-D8E1-9AEF-FFD3A4C4400E}"/>
+                <a16:creationId xmlns:a16="http://schemas.microsoft.com/office/drawing/2014/main" id="{EE593297-F125-2BA4-8745-BCEAAC428A77}"/>
               </a:ext>
             </a:extLst>
           </p:cNvPr>
@@ -3204,7 +3287,7 @@
           <p:cNvPr id="7" name="Espaço Reservado para Data 6">
             <a:extLst>
               <a:ext uri="{FF2B5EF4-FFF2-40B4-BE49-F238E27FC236}">
-                <a16:creationId xmlns:a16="http://schemas.microsoft.com/office/drawing/2014/main" id="{E1B5B6AA-5A0D-DA6B-E452-2FB921DBA063}"/>
+                <a16:creationId xmlns:a16="http://schemas.microsoft.com/office/drawing/2014/main" id="{34D29276-0084-164C-A4EE-30FB1F73BB00}"/>
               </a:ext>
             </a:extLst>
           </p:cNvPr>
@@ -3220,7 +3303,7 @@
           <a:bodyPr/>
           <a:lstStyle/>
           <a:p>
-            <a:fld id="{4D1B437B-2330-4EDA-BC0F-19C015E2505B}" type="datetimeFigureOut">
+            <a:fld id="{61A49896-4688-4C38-ACB0-A9EE9149AFE1}" type="datetimeFigureOut">
               <a:rPr lang="pt-BR" smtClean="0"/>
               <a:t>17/06/2026</a:t>
             </a:fld>
@@ -3233,7 +3316,7 @@
           <p:cNvPr id="8" name="Espaço Reservado para Rodapé 7">
             <a:extLst>
               <a:ext uri="{FF2B5EF4-FFF2-40B4-BE49-F238E27FC236}">
-                <a16:creationId xmlns:a16="http://schemas.microsoft.com/office/drawing/2014/main" id="{ABDCB189-0F98-4D5E-5F95-60AB3A7247D6}"/>
+                <a16:creationId xmlns:a16="http://schemas.microsoft.com/office/drawing/2014/main" id="{7A72AAC4-63FD-A3AD-0C73-2828EE139E27}"/>
               </a:ext>
             </a:extLst>
           </p:cNvPr>
@@ -3258,7 +3341,7 @@
           <p:cNvPr id="9" name="Espaço Reservado para Número de Slide 8">
             <a:extLst>
               <a:ext uri="{FF2B5EF4-FFF2-40B4-BE49-F238E27FC236}">
-                <a16:creationId xmlns:a16="http://schemas.microsoft.com/office/drawing/2014/main" id="{6840FB54-9EFE-C73C-B21E-8B6533D9BDE3}"/>
+                <a16:creationId xmlns:a16="http://schemas.microsoft.com/office/drawing/2014/main" id="{F30CD597-60AB-86C3-8226-CF63D5B53834}"/>
               </a:ext>
             </a:extLst>
           </p:cNvPr>
@@ -3274,7 +3357,7 @@
           <a:bodyPr/>
           <a:lstStyle/>
           <a:p>
-            <a:fld id="{72929FCF-42D2-4232-A1D1-73027802DFFE}" type="slidenum">
+            <a:fld id="{7CC8D46C-8D4F-4DC0-B08B-32377543F026}" type="slidenum">
               <a:rPr lang="pt-BR" smtClean="0"/>
               <a:t>‹nº›</a:t>
             </a:fld>
@@ -3285,7 +3368,7 @@
     </p:spTree>
     <p:extLst>
       <p:ext uri="{BB962C8B-B14F-4D97-AF65-F5344CB8AC3E}">
-        <p14:creationId xmlns:p14="http://schemas.microsoft.com/office/powerpoint/2010/main" val="1220953909"/>
+        <p14:creationId xmlns:p14="http://schemas.microsoft.com/office/powerpoint/2010/main" val="3075511103"/>
       </p:ext>
     </p:extLst>
   </p:cSld>
@@ -3317,7 +3400,7 @@
           <p:cNvPr id="2" name="Título 1">
             <a:extLst>
               <a:ext uri="{FF2B5EF4-FFF2-40B4-BE49-F238E27FC236}">
-                <a16:creationId xmlns:a16="http://schemas.microsoft.com/office/drawing/2014/main" id="{B3CF64F4-56AA-1C90-98FC-F5E9AEBA07FB}"/>
+                <a16:creationId xmlns:a16="http://schemas.microsoft.com/office/drawing/2014/main" id="{4C575ACB-52A5-423F-8BB3-DF2EC9596588}"/>
               </a:ext>
             </a:extLst>
           </p:cNvPr>
@@ -3345,7 +3428,7 @@
           <p:cNvPr id="3" name="Espaço Reservado para Data 2">
             <a:extLst>
               <a:ext uri="{FF2B5EF4-FFF2-40B4-BE49-F238E27FC236}">
-                <a16:creationId xmlns:a16="http://schemas.microsoft.com/office/drawing/2014/main" id="{389E1D8B-E749-3285-2F9A-FE31B8B57C12}"/>
+                <a16:creationId xmlns:a16="http://schemas.microsoft.com/office/drawing/2014/main" id="{6F410677-B4B9-F080-24E7-6E21048F0A9A}"/>
               </a:ext>
             </a:extLst>
           </p:cNvPr>
@@ -3361,7 +3444,7 @@
           <a:bodyPr/>
           <a:lstStyle/>
           <a:p>
-            <a:fld id="{4D1B437B-2330-4EDA-BC0F-19C015E2505B}" type="datetimeFigureOut">
+            <a:fld id="{61A49896-4688-4C38-ACB0-A9EE9149AFE1}" type="datetimeFigureOut">
               <a:rPr lang="pt-BR" smtClean="0"/>
               <a:t>17/06/2026</a:t>
             </a:fld>
@@ -3374,7 +3457,7 @@
           <p:cNvPr id="4" name="Espaço Reservado para Rodapé 3">
             <a:extLst>
               <a:ext uri="{FF2B5EF4-FFF2-40B4-BE49-F238E27FC236}">
-                <a16:creationId xmlns:a16="http://schemas.microsoft.com/office/drawing/2014/main" id="{7238001D-D605-FB88-8650-F4EAFA003A5A}"/>
+                <a16:creationId xmlns:a16="http://schemas.microsoft.com/office/drawing/2014/main" id="{DA9ECE8A-E640-86C0-87CD-434C18766581}"/>
               </a:ext>
             </a:extLst>
           </p:cNvPr>
@@ -3399,7 +3482,7 @@
           <p:cNvPr id="5" name="Espaço Reservado para Número de Slide 4">
             <a:extLst>
               <a:ext uri="{FF2B5EF4-FFF2-40B4-BE49-F238E27FC236}">
-                <a16:creationId xmlns:a16="http://schemas.microsoft.com/office/drawing/2014/main" id="{11CD2981-CC3B-AC7F-C698-FB968FDCFF6E}"/>
+                <a16:creationId xmlns:a16="http://schemas.microsoft.com/office/drawing/2014/main" id="{59FD8E92-FFE9-16EA-2F59-39474E86E738}"/>
               </a:ext>
             </a:extLst>
           </p:cNvPr>
@@ -3415,7 +3498,7 @@
           <a:bodyPr/>
           <a:lstStyle/>
           <a:p>
-            <a:fld id="{72929FCF-42D2-4232-A1D1-73027802DFFE}" type="slidenum">
+            <a:fld id="{7CC8D46C-8D4F-4DC0-B08B-32377543F026}" type="slidenum">
               <a:rPr lang="pt-BR" smtClean="0"/>
               <a:t>‹nº›</a:t>
             </a:fld>
@@ -3426,7 +3509,7 @@
     </p:spTree>
     <p:extLst>
       <p:ext uri="{BB962C8B-B14F-4D97-AF65-F5344CB8AC3E}">
-        <p14:creationId xmlns:p14="http://schemas.microsoft.com/office/powerpoint/2010/main" val="1282873798"/>
+        <p14:creationId xmlns:p14="http://schemas.microsoft.com/office/powerpoint/2010/main" val="3495587989"/>
       </p:ext>
     </p:extLst>
   </p:cSld>
@@ -3458,7 +3541,7 @@
           <p:cNvPr id="2" name="Espaço Reservado para Data 1">
             <a:extLst>
               <a:ext uri="{FF2B5EF4-FFF2-40B4-BE49-F238E27FC236}">
-                <a16:creationId xmlns:a16="http://schemas.microsoft.com/office/drawing/2014/main" id="{E8D172E1-A916-F282-4EBE-802A32F6D2CE}"/>
+                <a16:creationId xmlns:a16="http://schemas.microsoft.com/office/drawing/2014/main" id="{AA20BF20-F6E7-0DBB-E608-FD3A7D691305}"/>
               </a:ext>
             </a:extLst>
           </p:cNvPr>
@@ -3474,7 +3557,7 @@
           <a:bodyPr/>
           <a:lstStyle/>
           <a:p>
-            <a:fld id="{4D1B437B-2330-4EDA-BC0F-19C015E2505B}" type="datetimeFigureOut">
+            <a:fld id="{61A49896-4688-4C38-ACB0-A9EE9149AFE1}" type="datetimeFigureOut">
               <a:rPr lang="pt-BR" smtClean="0"/>
               <a:t>17/06/2026</a:t>
             </a:fld>
@@ -3487,7 +3570,7 @@
           <p:cNvPr id="3" name="Espaço Reservado para Rodapé 2">
             <a:extLst>
               <a:ext uri="{FF2B5EF4-FFF2-40B4-BE49-F238E27FC236}">
-                <a16:creationId xmlns:a16="http://schemas.microsoft.com/office/drawing/2014/main" id="{17AF841B-1F7A-D803-7493-1A829ADF4B7D}"/>
+                <a16:creationId xmlns:a16="http://schemas.microsoft.com/office/drawing/2014/main" id="{6AB813F2-924D-771C-7139-758733426A71}"/>
               </a:ext>
             </a:extLst>
           </p:cNvPr>
@@ -3512,7 +3595,7 @@
           <p:cNvPr id="4" name="Espaço Reservado para Número de Slide 3">
             <a:extLst>
               <a:ext uri="{FF2B5EF4-FFF2-40B4-BE49-F238E27FC236}">
-                <a16:creationId xmlns:a16="http://schemas.microsoft.com/office/drawing/2014/main" id="{CD2A6498-3EAD-489A-97E6-D8D53992A269}"/>
+                <a16:creationId xmlns:a16="http://schemas.microsoft.com/office/drawing/2014/main" id="{822CFAC8-1D2A-5754-070D-826159266F17}"/>
               </a:ext>
             </a:extLst>
           </p:cNvPr>
@@ -3528,7 +3611,7 @@
           <a:bodyPr/>
           <a:lstStyle/>
           <a:p>
-            <a:fld id="{72929FCF-42D2-4232-A1D1-73027802DFFE}" type="slidenum">
+            <a:fld id="{7CC8D46C-8D4F-4DC0-B08B-32377543F026}" type="slidenum">
               <a:rPr lang="pt-BR" smtClean="0"/>
               <a:t>‹nº›</a:t>
             </a:fld>
@@ -3539,7 +3622,7 @@
     </p:spTree>
     <p:extLst>
       <p:ext uri="{BB962C8B-B14F-4D97-AF65-F5344CB8AC3E}">
-        <p14:creationId xmlns:p14="http://schemas.microsoft.com/office/powerpoint/2010/main" val="930859482"/>
+        <p14:creationId xmlns:p14="http://schemas.microsoft.com/office/powerpoint/2010/main" val="2177510707"/>
       </p:ext>
     </p:extLst>
   </p:cSld>
@@ -3571,7 +3654,7 @@
           <p:cNvPr id="2" name="Título 1">
             <a:extLst>
               <a:ext uri="{FF2B5EF4-FFF2-40B4-BE49-F238E27FC236}">
-                <a16:creationId xmlns:a16="http://schemas.microsoft.com/office/drawing/2014/main" id="{D7A5A619-BFF1-9637-C5E7-67BFA1C32D1F}"/>
+                <a16:creationId xmlns:a16="http://schemas.microsoft.com/office/drawing/2014/main" id="{677D0632-6C53-5EC5-D7DC-F88173E661F2}"/>
               </a:ext>
             </a:extLst>
           </p:cNvPr>
@@ -3608,7 +3691,7 @@
           <p:cNvPr id="3" name="Espaço Reservado para Conteúdo 2">
             <a:extLst>
               <a:ext uri="{FF2B5EF4-FFF2-40B4-BE49-F238E27FC236}">
-                <a16:creationId xmlns:a16="http://schemas.microsoft.com/office/drawing/2014/main" id="{34F89CF7-56D2-C8DB-E94C-6DE847A7FE5F}"/>
+                <a16:creationId xmlns:a16="http://schemas.microsoft.com/office/drawing/2014/main" id="{B84C9202-4576-D5CB-1A3E-97CABE1B2DB9}"/>
               </a:ext>
             </a:extLst>
           </p:cNvPr>
@@ -3698,7 +3781,7 @@
           <p:cNvPr id="4" name="Espaço Reservado para Texto 3">
             <a:extLst>
               <a:ext uri="{FF2B5EF4-FFF2-40B4-BE49-F238E27FC236}">
-                <a16:creationId xmlns:a16="http://schemas.microsoft.com/office/drawing/2014/main" id="{BEA6FBA4-2323-D5F9-4547-E0ACFD40AECD}"/>
+                <a16:creationId xmlns:a16="http://schemas.microsoft.com/office/drawing/2014/main" id="{0945C719-F053-A2D4-747E-AFDDC4B03B81}"/>
               </a:ext>
             </a:extLst>
           </p:cNvPr>
@@ -3769,7 +3852,7 @@
           <p:cNvPr id="5" name="Espaço Reservado para Data 4">
             <a:extLst>
               <a:ext uri="{FF2B5EF4-FFF2-40B4-BE49-F238E27FC236}">
-                <a16:creationId xmlns:a16="http://schemas.microsoft.com/office/drawing/2014/main" id="{E16FA41B-3BF4-59BB-1559-E6FEED318FA6}"/>
+                <a16:creationId xmlns:a16="http://schemas.microsoft.com/office/drawing/2014/main" id="{D8FFB6EC-1824-E892-B286-3EA6301AEAF2}"/>
               </a:ext>
             </a:extLst>
           </p:cNvPr>
@@ -3785,7 +3868,7 @@
           <a:bodyPr/>
           <a:lstStyle/>
           <a:p>
-            <a:fld id="{4D1B437B-2330-4EDA-BC0F-19C015E2505B}" type="datetimeFigureOut">
+            <a:fld id="{61A49896-4688-4C38-ACB0-A9EE9149AFE1}" type="datetimeFigureOut">
               <a:rPr lang="pt-BR" smtClean="0"/>
               <a:t>17/06/2026</a:t>
             </a:fld>
@@ -3798,7 +3881,7 @@
           <p:cNvPr id="6" name="Espaço Reservado para Rodapé 5">
             <a:extLst>
               <a:ext uri="{FF2B5EF4-FFF2-40B4-BE49-F238E27FC236}">
-                <a16:creationId xmlns:a16="http://schemas.microsoft.com/office/drawing/2014/main" id="{0040A0A6-E598-F0A8-989D-A4CE2E069218}"/>
+                <a16:creationId xmlns:a16="http://schemas.microsoft.com/office/drawing/2014/main" id="{5941B5A5-A8B2-CE08-9E4F-186B9B7446A1}"/>
               </a:ext>
             </a:extLst>
           </p:cNvPr>
@@ -3823,7 +3906,7 @@
           <p:cNvPr id="7" name="Espaço Reservado para Número de Slide 6">
             <a:extLst>
               <a:ext uri="{FF2B5EF4-FFF2-40B4-BE49-F238E27FC236}">
-                <a16:creationId xmlns:a16="http://schemas.microsoft.com/office/drawing/2014/main" id="{6F2560D9-FB7A-5C6D-C3C0-C802465B9065}"/>
+                <a16:creationId xmlns:a16="http://schemas.microsoft.com/office/drawing/2014/main" id="{A321FAE4-ECB4-3948-38C5-4D13F05BB6FC}"/>
               </a:ext>
             </a:extLst>
           </p:cNvPr>
@@ -3839,7 +3922,7 @@
           <a:bodyPr/>
           <a:lstStyle/>
           <a:p>
-            <a:fld id="{72929FCF-42D2-4232-A1D1-73027802DFFE}" type="slidenum">
+            <a:fld id="{7CC8D46C-8D4F-4DC0-B08B-32377543F026}" type="slidenum">
               <a:rPr lang="pt-BR" smtClean="0"/>
               <a:t>‹nº›</a:t>
             </a:fld>
@@ -3850,7 +3933,7 @@
     </p:spTree>
     <p:extLst>
       <p:ext uri="{BB962C8B-B14F-4D97-AF65-F5344CB8AC3E}">
-        <p14:creationId xmlns:p14="http://schemas.microsoft.com/office/powerpoint/2010/main" val="3031960446"/>
+        <p14:creationId xmlns:p14="http://schemas.microsoft.com/office/powerpoint/2010/main" val="1667658754"/>
       </p:ext>
     </p:extLst>
   </p:cSld>
@@ -3882,7 +3965,7 @@
           <p:cNvPr id="2" name="Título 1">
             <a:extLst>
               <a:ext uri="{FF2B5EF4-FFF2-40B4-BE49-F238E27FC236}">
-                <a16:creationId xmlns:a16="http://schemas.microsoft.com/office/drawing/2014/main" id="{E08DB209-88C4-F342-EE24-3B2A7A9A2FA4}"/>
+                <a16:creationId xmlns:a16="http://schemas.microsoft.com/office/drawing/2014/main" id="{54B60A3B-BB9D-CC24-8483-58AD1CF1AE74}"/>
               </a:ext>
             </a:extLst>
           </p:cNvPr>
@@ -3919,7 +4002,7 @@
           <p:cNvPr id="3" name="Espaço Reservado para Imagem 2">
             <a:extLst>
               <a:ext uri="{FF2B5EF4-FFF2-40B4-BE49-F238E27FC236}">
-                <a16:creationId xmlns:a16="http://schemas.microsoft.com/office/drawing/2014/main" id="{33A25048-1EDC-D7A8-44DA-20BA5E18A30B}"/>
+                <a16:creationId xmlns:a16="http://schemas.microsoft.com/office/drawing/2014/main" id="{2365A430-066A-FAF2-C142-5A86A68C6513}"/>
               </a:ext>
             </a:extLst>
           </p:cNvPr>
@@ -3986,7 +4069,7 @@
           <p:cNvPr id="4" name="Espaço Reservado para Texto 3">
             <a:extLst>
               <a:ext uri="{FF2B5EF4-FFF2-40B4-BE49-F238E27FC236}">
-                <a16:creationId xmlns:a16="http://schemas.microsoft.com/office/drawing/2014/main" id="{A44201C2-75D7-3407-5054-FFAA284E5469}"/>
+                <a16:creationId xmlns:a16="http://schemas.microsoft.com/office/drawing/2014/main" id="{EA42F790-8778-8613-D981-AF0EB9BD4D42}"/>
               </a:ext>
             </a:extLst>
           </p:cNvPr>
@@ -4057,7 +4140,7 @@
           <p:cNvPr id="5" name="Espaço Reservado para Data 4">
             <a:extLst>
               <a:ext uri="{FF2B5EF4-FFF2-40B4-BE49-F238E27FC236}">
-                <a16:creationId xmlns:a16="http://schemas.microsoft.com/office/drawing/2014/main" id="{3F17BE42-BE83-E7A2-7938-AC425B09F8CD}"/>
+                <a16:creationId xmlns:a16="http://schemas.microsoft.com/office/drawing/2014/main" id="{6125C3A9-B95D-BAE6-67DF-8D1701262FD1}"/>
               </a:ext>
             </a:extLst>
           </p:cNvPr>
@@ -4073,7 +4156,7 @@
           <a:bodyPr/>
           <a:lstStyle/>
           <a:p>
-            <a:fld id="{4D1B437B-2330-4EDA-BC0F-19C015E2505B}" type="datetimeFigureOut">
+            <a:fld id="{61A49896-4688-4C38-ACB0-A9EE9149AFE1}" type="datetimeFigureOut">
               <a:rPr lang="pt-BR" smtClean="0"/>
               <a:t>17/06/2026</a:t>
             </a:fld>
@@ -4086,7 +4169,7 @@
           <p:cNvPr id="6" name="Espaço Reservado para Rodapé 5">
             <a:extLst>
               <a:ext uri="{FF2B5EF4-FFF2-40B4-BE49-F238E27FC236}">
-                <a16:creationId xmlns:a16="http://schemas.microsoft.com/office/drawing/2014/main" id="{9377806D-DB0A-FEE4-CC55-977A1EFD5FAF}"/>
+                <a16:creationId xmlns:a16="http://schemas.microsoft.com/office/drawing/2014/main" id="{B04B85F5-603A-4834-2836-2CAA10925DD4}"/>
               </a:ext>
             </a:extLst>
           </p:cNvPr>
@@ -4111,7 +4194,7 @@
           <p:cNvPr id="7" name="Espaço Reservado para Número de Slide 6">
             <a:extLst>
               <a:ext uri="{FF2B5EF4-FFF2-40B4-BE49-F238E27FC236}">
-                <a16:creationId xmlns:a16="http://schemas.microsoft.com/office/drawing/2014/main" id="{2708EC6C-84CA-8EBE-C3A4-B37781C01CB9}"/>
+                <a16:creationId xmlns:a16="http://schemas.microsoft.com/office/drawing/2014/main" id="{928997FA-4714-2A98-151F-57EEE9A442FF}"/>
               </a:ext>
             </a:extLst>
           </p:cNvPr>
@@ -4127,7 +4210,7 @@
           <a:bodyPr/>
           <a:lstStyle/>
           <a:p>
-            <a:fld id="{72929FCF-42D2-4232-A1D1-73027802DFFE}" type="slidenum">
+            <a:fld id="{7CC8D46C-8D4F-4DC0-B08B-32377543F026}" type="slidenum">
               <a:rPr lang="pt-BR" smtClean="0"/>
               <a:t>‹nº›</a:t>
             </a:fld>
@@ -4138,7 +4221,7 @@
     </p:spTree>
     <p:extLst>
       <p:ext uri="{BB962C8B-B14F-4D97-AF65-F5344CB8AC3E}">
-        <p14:creationId xmlns:p14="http://schemas.microsoft.com/office/powerpoint/2010/main" val="659784763"/>
+        <p14:creationId xmlns:p14="http://schemas.microsoft.com/office/powerpoint/2010/main" val="934196270"/>
       </p:ext>
     </p:extLst>
   </p:cSld>
@@ -4175,7 +4258,7 @@
           <p:cNvPr id="2" name="Espaço Reservado para Título 1">
             <a:extLst>
               <a:ext uri="{FF2B5EF4-FFF2-40B4-BE49-F238E27FC236}">
-                <a16:creationId xmlns:a16="http://schemas.microsoft.com/office/drawing/2014/main" id="{596A4D8F-1036-C4E3-E7AB-FE87D0DC7FB2}"/>
+                <a16:creationId xmlns:a16="http://schemas.microsoft.com/office/drawing/2014/main" id="{DF6ED92F-44F6-1616-0B03-5F4D6F94454D}"/>
               </a:ext>
             </a:extLst>
           </p:cNvPr>
@@ -4213,7 +4296,7 @@
           <p:cNvPr id="3" name="Espaço Reservado para Texto 2">
             <a:extLst>
               <a:ext uri="{FF2B5EF4-FFF2-40B4-BE49-F238E27FC236}">
-                <a16:creationId xmlns:a16="http://schemas.microsoft.com/office/drawing/2014/main" id="{0F95C02F-F2BA-7473-AA90-9D55CCA8DC77}"/>
+                <a16:creationId xmlns:a16="http://schemas.microsoft.com/office/drawing/2014/main" id="{70C40325-F41A-3C65-38F2-75C60FE99389}"/>
               </a:ext>
             </a:extLst>
           </p:cNvPr>
@@ -4280,7 +4363,7 @@
           <p:cNvPr id="4" name="Espaço Reservado para Data 3">
             <a:extLst>
               <a:ext uri="{FF2B5EF4-FFF2-40B4-BE49-F238E27FC236}">
-                <a16:creationId xmlns:a16="http://schemas.microsoft.com/office/drawing/2014/main" id="{66CD291F-9F2D-A144-ECC7-5BF4FB5306D5}"/>
+                <a16:creationId xmlns:a16="http://schemas.microsoft.com/office/drawing/2014/main" id="{47E24413-6CDC-3A46-F1D1-EDE7C25F78EF}"/>
               </a:ext>
             </a:extLst>
           </p:cNvPr>
@@ -4314,7 +4397,7 @@
             </a:lvl1pPr>
           </a:lstStyle>
           <a:p>
-            <a:fld id="{4D1B437B-2330-4EDA-BC0F-19C015E2505B}" type="datetimeFigureOut">
+            <a:fld id="{61A49896-4688-4C38-ACB0-A9EE9149AFE1}" type="datetimeFigureOut">
               <a:rPr lang="pt-BR" smtClean="0"/>
               <a:t>17/06/2026</a:t>
             </a:fld>
@@ -4327,7 +4410,7 @@
           <p:cNvPr id="5" name="Espaço Reservado para Rodapé 4">
             <a:extLst>
               <a:ext uri="{FF2B5EF4-FFF2-40B4-BE49-F238E27FC236}">
-                <a16:creationId xmlns:a16="http://schemas.microsoft.com/office/drawing/2014/main" id="{8BE87085-F405-4A9A-15B1-F1633CE31867}"/>
+                <a16:creationId xmlns:a16="http://schemas.microsoft.com/office/drawing/2014/main" id="{9047499E-A39B-CEB5-FC1E-C162F1D9482B}"/>
               </a:ext>
             </a:extLst>
           </p:cNvPr>
@@ -4370,7 +4453,7 @@
           <p:cNvPr id="6" name="Espaço Reservado para Número de Slide 5">
             <a:extLst>
               <a:ext uri="{FF2B5EF4-FFF2-40B4-BE49-F238E27FC236}">
-                <a16:creationId xmlns:a16="http://schemas.microsoft.com/office/drawing/2014/main" id="{751D5D19-7894-0F68-A191-036129019427}"/>
+                <a16:creationId xmlns:a16="http://schemas.microsoft.com/office/drawing/2014/main" id="{B712D2E0-E284-1E01-9E3F-66A94A3E35A7}"/>
               </a:ext>
             </a:extLst>
           </p:cNvPr>
@@ -4404,7 +4487,7 @@
             </a:lvl1pPr>
           </a:lstStyle>
           <a:p>
-            <a:fld id="{72929FCF-42D2-4232-A1D1-73027802DFFE}" type="slidenum">
+            <a:fld id="{7CC8D46C-8D4F-4DC0-B08B-32377543F026}" type="slidenum">
               <a:rPr lang="pt-BR" smtClean="0"/>
               <a:t>‹nº›</a:t>
             </a:fld>
@@ -4415,7 +4498,7 @@
     </p:spTree>
     <p:extLst>
       <p:ext uri="{BB962C8B-B14F-4D97-AF65-F5344CB8AC3E}">
-        <p14:creationId xmlns:p14="http://schemas.microsoft.com/office/powerpoint/2010/main" val="4045609535"/>
+        <p14:creationId xmlns:p14="http://schemas.microsoft.com/office/powerpoint/2010/main" val="1374743589"/>
       </p:ext>
     </p:extLst>
   </p:cSld>
@@ -4746,7 +4829,7 @@
           <p:cNvPr id="2" name="Retângulo 1">
             <a:extLst>
               <a:ext uri="{FF2B5EF4-FFF2-40B4-BE49-F238E27FC236}">
-                <a16:creationId xmlns:a16="http://schemas.microsoft.com/office/drawing/2014/main" id="{102AEA42-B3AC-9C46-9D02-A8755ABDFC09}"/>
+                <a16:creationId xmlns:a16="http://schemas.microsoft.com/office/drawing/2014/main" id="{8CBE437C-60F5-EC3F-EFDA-FA95CCC79DFC}"/>
               </a:ext>
             </a:extLst>
           </p:cNvPr>
@@ -4814,7 +4897,7 @@
           <p:cNvPr id="3" name="CaixaDeTexto 2">
             <a:extLst>
               <a:ext uri="{FF2B5EF4-FFF2-40B4-BE49-F238E27FC236}">
-                <a16:creationId xmlns:a16="http://schemas.microsoft.com/office/drawing/2014/main" id="{0D4E5809-8245-9D43-8A00-66F222657770}"/>
+                <a16:creationId xmlns:a16="http://schemas.microsoft.com/office/drawing/2014/main" id="{3D4A126F-7BB6-6390-003B-25AD03D941A0}"/>
               </a:ext>
             </a:extLst>
           </p:cNvPr>
@@ -4824,7 +4907,7 @@
         <p:spPr>
           <a:xfrm>
             <a:off x="355600" y="127000"/>
-            <a:ext cx="8890000" cy="420628"/>
+            <a:ext cx="8636000" cy="420628"/>
           </a:xfrm>
           <a:prstGeom prst="rect">
             <a:avLst/>
@@ -4860,7 +4943,7 @@
           <p:cNvPr id="4" name="CaixaDeTexto 3">
             <a:extLst>
               <a:ext uri="{FF2B5EF4-FFF2-40B4-BE49-F238E27FC236}">
-                <a16:creationId xmlns:a16="http://schemas.microsoft.com/office/drawing/2014/main" id="{4EB0E1C5-4682-4B24-1811-26C5C3D455A7}"/>
+                <a16:creationId xmlns:a16="http://schemas.microsoft.com/office/drawing/2014/main" id="{816DF02D-2DA3-5CDB-DDFC-5455FAAF0740}"/>
               </a:ext>
             </a:extLst>
           </p:cNvPr>
@@ -4869,8 +4952,8 @@
         </p:nvSpPr>
         <p:spPr>
           <a:xfrm>
-            <a:off x="8890000" y="190500"/>
-            <a:ext cx="2946400" cy="235962"/>
+            <a:off x="8763000" y="190500"/>
+            <a:ext cx="3073400" cy="235962"/>
           </a:xfrm>
           <a:prstGeom prst="rect">
             <a:avLst/>
@@ -4901,7 +4984,7 @@
           <p:cNvPr id="5" name="CaixaDeTexto 4">
             <a:extLst>
               <a:ext uri="{FF2B5EF4-FFF2-40B4-BE49-F238E27FC236}">
-                <a16:creationId xmlns:a16="http://schemas.microsoft.com/office/drawing/2014/main" id="{70625787-EDC9-47C8-84F4-C709C15CE7FB}"/>
+                <a16:creationId xmlns:a16="http://schemas.microsoft.com/office/drawing/2014/main" id="{9D6023A8-FF38-597D-AD2B-3A2C4B41BC6A}"/>
               </a:ext>
             </a:extLst>
           </p:cNvPr>
@@ -4910,8 +4993,8 @@
         </p:nvSpPr>
         <p:spPr>
           <a:xfrm>
-            <a:off x="889000" y="1498600"/>
-            <a:ext cx="10414000" cy="851515"/>
+            <a:off x="1016000" y="1549400"/>
+            <a:ext cx="10160000" cy="851515"/>
           </a:xfrm>
           <a:prstGeom prst="rect">
             <a:avLst/>
@@ -4942,7 +5025,7 @@
           <p:cNvPr id="6" name="Retângulo 5">
             <a:extLst>
               <a:ext uri="{FF2B5EF4-FFF2-40B4-BE49-F238E27FC236}">
-                <a16:creationId xmlns:a16="http://schemas.microsoft.com/office/drawing/2014/main" id="{3BCEEDA9-FBA8-4BC2-7152-58843140C899}"/>
+                <a16:creationId xmlns:a16="http://schemas.microsoft.com/office/drawing/2014/main" id="{A416C9AD-9328-03D9-AE2A-462A1D3F8402}"/>
               </a:ext>
             </a:extLst>
           </p:cNvPr>
@@ -4951,8 +5034,8 @@
         </p:nvSpPr>
         <p:spPr>
           <a:xfrm>
-            <a:off x="1333500" y="3194844"/>
-            <a:ext cx="2286000" cy="1168400"/>
+            <a:off x="1333500" y="3302000"/>
+            <a:ext cx="2286000" cy="1117600"/>
           </a:xfrm>
           <a:prstGeom prst="rect">
             <a:avLst/>
@@ -4987,7 +5070,7 @@
           <a:lstStyle/>
           <a:p>
             <a:pPr algn="ctr"/>
-            <a:endParaRPr lang="pt-BR" dirty="0"/>
+            <a:endParaRPr lang="pt-BR"/>
           </a:p>
         </p:txBody>
       </p:sp>
@@ -4996,7 +5079,7 @@
           <p:cNvPr id="7" name="CaixaDeTexto 6">
             <a:extLst>
               <a:ext uri="{FF2B5EF4-FFF2-40B4-BE49-F238E27FC236}">
-                <a16:creationId xmlns:a16="http://schemas.microsoft.com/office/drawing/2014/main" id="{5A286178-25F1-AC72-55C4-A192E33CD954}"/>
+                <a16:creationId xmlns:a16="http://schemas.microsoft.com/office/drawing/2014/main" id="{3638C45A-CFBB-1177-7265-8F5A243D835E}"/>
               </a:ext>
             </a:extLst>
           </p:cNvPr>
@@ -5005,8 +5088,8 @@
         </p:nvSpPr>
         <p:spPr>
           <a:xfrm>
-            <a:off x="1460500" y="3429000"/>
-            <a:ext cx="2032000" cy="451406"/>
+            <a:off x="1460500" y="3416300"/>
+            <a:ext cx="2032000" cy="436017"/>
           </a:xfrm>
           <a:prstGeom prst="rect">
             <a:avLst/>
@@ -5021,7 +5104,7 @@
           <a:p>
             <a:pPr algn="ctr"/>
             <a:r>
-              <a:rPr lang="pt-BR" sz="2600" b="1">
+              <a:rPr lang="pt-BR" sz="2500" b="1">
                 <a:solidFill>
                   <a:srgbClr val="268984"/>
                 </a:solidFill>
@@ -5037,7 +5120,7 @@
           <p:cNvPr id="8" name="CaixaDeTexto 7">
             <a:extLst>
               <a:ext uri="{FF2B5EF4-FFF2-40B4-BE49-F238E27FC236}">
-                <a16:creationId xmlns:a16="http://schemas.microsoft.com/office/drawing/2014/main" id="{DF1AA862-8FB1-0DF1-B0FC-DE9320D3D865}"/>
+                <a16:creationId xmlns:a16="http://schemas.microsoft.com/office/drawing/2014/main" id="{EB74B013-C7C3-A3FB-71A2-F6DB3819AFF6}"/>
               </a:ext>
             </a:extLst>
           </p:cNvPr>
@@ -5046,8 +5129,8 @@
         </p:nvSpPr>
         <p:spPr>
           <a:xfrm>
-            <a:off x="1460500" y="3937000"/>
-            <a:ext cx="2032000" cy="251351"/>
+            <a:off x="1460500" y="3924300"/>
+            <a:ext cx="2032000" cy="235962"/>
           </a:xfrm>
           <a:prstGeom prst="rect">
             <a:avLst/>
@@ -5062,7 +5145,7 @@
           <a:p>
             <a:pPr algn="ctr"/>
             <a:r>
-              <a:rPr lang="pt-BR" sz="1300">
+              <a:rPr lang="pt-BR" sz="1200">
                 <a:solidFill>
                   <a:srgbClr val="585F69"/>
                 </a:solidFill>
@@ -5078,7 +5161,7 @@
           <p:cNvPr id="9" name="Retângulo 8">
             <a:extLst>
               <a:ext uri="{FF2B5EF4-FFF2-40B4-BE49-F238E27FC236}">
-                <a16:creationId xmlns:a16="http://schemas.microsoft.com/office/drawing/2014/main" id="{944FA3FF-89BC-E0CF-B181-A09C3A2E3FA4}"/>
+                <a16:creationId xmlns:a16="http://schemas.microsoft.com/office/drawing/2014/main" id="{7F2D3D3C-77CE-0466-B21A-4CA0C76545C4}"/>
               </a:ext>
             </a:extLst>
           </p:cNvPr>
@@ -5087,8 +5170,8 @@
         </p:nvSpPr>
         <p:spPr>
           <a:xfrm>
-            <a:off x="3810000" y="3201988"/>
-            <a:ext cx="2286000" cy="1168400"/>
+            <a:off x="3810000" y="3302000"/>
+            <a:ext cx="2286000" cy="1117600"/>
           </a:xfrm>
           <a:prstGeom prst="rect">
             <a:avLst/>
@@ -5132,7 +5215,7 @@
           <p:cNvPr id="10" name="CaixaDeTexto 9">
             <a:extLst>
               <a:ext uri="{FF2B5EF4-FFF2-40B4-BE49-F238E27FC236}">
-                <a16:creationId xmlns:a16="http://schemas.microsoft.com/office/drawing/2014/main" id="{27176026-8CFD-ADC9-11EC-88D3CBB6D355}"/>
+                <a16:creationId xmlns:a16="http://schemas.microsoft.com/office/drawing/2014/main" id="{F633D2C1-E9E9-D5FF-A2CD-6C7EF119E32F}"/>
               </a:ext>
             </a:extLst>
           </p:cNvPr>
@@ -5141,8 +5224,8 @@
         </p:nvSpPr>
         <p:spPr>
           <a:xfrm>
-            <a:off x="3937000" y="3429000"/>
-            <a:ext cx="2032000" cy="451406"/>
+            <a:off x="3937000" y="3416300"/>
+            <a:ext cx="2032000" cy="436017"/>
           </a:xfrm>
           <a:prstGeom prst="rect">
             <a:avLst/>
@@ -5157,7 +5240,7 @@
           <a:p>
             <a:pPr algn="ctr"/>
             <a:r>
-              <a:rPr lang="pt-BR" sz="2600" b="1">
+              <a:rPr lang="pt-BR" sz="2500" b="1">
                 <a:solidFill>
                   <a:srgbClr val="E87E42"/>
                 </a:solidFill>
@@ -5173,7 +5256,7 @@
           <p:cNvPr id="11" name="CaixaDeTexto 10">
             <a:extLst>
               <a:ext uri="{FF2B5EF4-FFF2-40B4-BE49-F238E27FC236}">
-                <a16:creationId xmlns:a16="http://schemas.microsoft.com/office/drawing/2014/main" id="{66E2C59A-FE5B-3106-186E-8D249EBFF5D2}"/>
+                <a16:creationId xmlns:a16="http://schemas.microsoft.com/office/drawing/2014/main" id="{78B8BA93-89D0-097A-4CD9-DB2CFA3778C3}"/>
               </a:ext>
             </a:extLst>
           </p:cNvPr>
@@ -5182,8 +5265,8 @@
         </p:nvSpPr>
         <p:spPr>
           <a:xfrm>
-            <a:off x="3937000" y="3937000"/>
-            <a:ext cx="2032000" cy="251351"/>
+            <a:off x="3937000" y="3924300"/>
+            <a:ext cx="2032000" cy="235962"/>
           </a:xfrm>
           <a:prstGeom prst="rect">
             <a:avLst/>
@@ -5198,7 +5281,7 @@
           <a:p>
             <a:pPr algn="ctr"/>
             <a:r>
-              <a:rPr lang="pt-BR" sz="1300">
+              <a:rPr lang="pt-BR" sz="1200">
                 <a:solidFill>
                   <a:srgbClr val="585F69"/>
                 </a:solidFill>
@@ -5214,7 +5297,7 @@
           <p:cNvPr id="12" name="Retângulo 11">
             <a:extLst>
               <a:ext uri="{FF2B5EF4-FFF2-40B4-BE49-F238E27FC236}">
-                <a16:creationId xmlns:a16="http://schemas.microsoft.com/office/drawing/2014/main" id="{28426363-9E9D-D2C3-9D36-63A926115917}"/>
+                <a16:creationId xmlns:a16="http://schemas.microsoft.com/office/drawing/2014/main" id="{AD14F07B-7BA0-219C-A32C-5D8B0780EFED}"/>
               </a:ext>
             </a:extLst>
           </p:cNvPr>
@@ -5223,8 +5306,8 @@
         </p:nvSpPr>
         <p:spPr>
           <a:xfrm>
-            <a:off x="6286500" y="3216275"/>
-            <a:ext cx="2286000" cy="1168400"/>
+            <a:off x="6286500" y="3302000"/>
+            <a:ext cx="2286000" cy="1117600"/>
           </a:xfrm>
           <a:prstGeom prst="rect">
             <a:avLst/>
@@ -5268,7 +5351,7 @@
           <p:cNvPr id="13" name="CaixaDeTexto 12">
             <a:extLst>
               <a:ext uri="{FF2B5EF4-FFF2-40B4-BE49-F238E27FC236}">
-                <a16:creationId xmlns:a16="http://schemas.microsoft.com/office/drawing/2014/main" id="{78A67024-7D13-1A5D-2C78-C44239627CCC}"/>
+                <a16:creationId xmlns:a16="http://schemas.microsoft.com/office/drawing/2014/main" id="{251F9764-6622-9E11-D2B4-EC0977FAF20B}"/>
               </a:ext>
             </a:extLst>
           </p:cNvPr>
@@ -5277,8 +5360,8 @@
         </p:nvSpPr>
         <p:spPr>
           <a:xfrm>
-            <a:off x="6413500" y="3429000"/>
-            <a:ext cx="2032000" cy="451406"/>
+            <a:off x="6413500" y="3416300"/>
+            <a:ext cx="2032000" cy="436017"/>
           </a:xfrm>
           <a:prstGeom prst="rect">
             <a:avLst/>
@@ -5293,7 +5376,7 @@
           <a:p>
             <a:pPr algn="ctr"/>
             <a:r>
-              <a:rPr lang="pt-BR" sz="2600" b="1">
+              <a:rPr lang="pt-BR" sz="2500" b="1">
                 <a:solidFill>
                   <a:srgbClr val="589C66"/>
                 </a:solidFill>
@@ -5309,7 +5392,7 @@
           <p:cNvPr id="14" name="CaixaDeTexto 13">
             <a:extLst>
               <a:ext uri="{FF2B5EF4-FFF2-40B4-BE49-F238E27FC236}">
-                <a16:creationId xmlns:a16="http://schemas.microsoft.com/office/drawing/2014/main" id="{AE30A0BF-759E-14F9-6AF2-3CC855A1AEF5}"/>
+                <a16:creationId xmlns:a16="http://schemas.microsoft.com/office/drawing/2014/main" id="{F5BFD44E-7B79-5DA8-975F-C1DADB15C733}"/>
               </a:ext>
             </a:extLst>
           </p:cNvPr>
@@ -5318,8 +5401,8 @@
         </p:nvSpPr>
         <p:spPr>
           <a:xfrm>
-            <a:off x="6413500" y="3937000"/>
-            <a:ext cx="2032000" cy="251351"/>
+            <a:off x="6413500" y="3924300"/>
+            <a:ext cx="2032000" cy="235962"/>
           </a:xfrm>
           <a:prstGeom prst="rect">
             <a:avLst/>
@@ -5334,7 +5417,7 @@
           <a:p>
             <a:pPr algn="ctr"/>
             <a:r>
-              <a:rPr lang="pt-BR" sz="1300">
+              <a:rPr lang="pt-BR" sz="1200">
                 <a:solidFill>
                   <a:srgbClr val="585F69"/>
                 </a:solidFill>
@@ -5350,7 +5433,7 @@
           <p:cNvPr id="15" name="Retângulo 14">
             <a:extLst>
               <a:ext uri="{FF2B5EF4-FFF2-40B4-BE49-F238E27FC236}">
-                <a16:creationId xmlns:a16="http://schemas.microsoft.com/office/drawing/2014/main" id="{946DE11B-1A3A-2450-327C-12293EA2894C}"/>
+                <a16:creationId xmlns:a16="http://schemas.microsoft.com/office/drawing/2014/main" id="{E224564D-AA83-DFC4-22D0-3DEED849263B}"/>
               </a:ext>
             </a:extLst>
           </p:cNvPr>
@@ -5359,8 +5442,8 @@
         </p:nvSpPr>
         <p:spPr>
           <a:xfrm>
-            <a:off x="8763000" y="3216275"/>
-            <a:ext cx="2286000" cy="1168400"/>
+            <a:off x="8763000" y="3302000"/>
+            <a:ext cx="2286000" cy="1117600"/>
           </a:xfrm>
           <a:prstGeom prst="rect">
             <a:avLst/>
@@ -5404,7 +5487,7 @@
           <p:cNvPr id="16" name="CaixaDeTexto 15">
             <a:extLst>
               <a:ext uri="{FF2B5EF4-FFF2-40B4-BE49-F238E27FC236}">
-                <a16:creationId xmlns:a16="http://schemas.microsoft.com/office/drawing/2014/main" id="{A9A9D07A-0DFC-00A5-A864-F6DE8D7805EF}"/>
+                <a16:creationId xmlns:a16="http://schemas.microsoft.com/office/drawing/2014/main" id="{C58C0EDB-5185-422C-2878-C368BC7EE33D}"/>
               </a:ext>
             </a:extLst>
           </p:cNvPr>
@@ -5413,8 +5496,8 @@
         </p:nvSpPr>
         <p:spPr>
           <a:xfrm>
-            <a:off x="8890000" y="3429000"/>
-            <a:ext cx="2032000" cy="451406"/>
+            <a:off x="8890000" y="3416300"/>
+            <a:ext cx="2032000" cy="436017"/>
           </a:xfrm>
           <a:prstGeom prst="rect">
             <a:avLst/>
@@ -5429,7 +5512,7 @@
           <a:p>
             <a:pPr algn="ctr"/>
             <a:r>
-              <a:rPr lang="pt-BR" sz="2600" b="1">
+              <a:rPr lang="pt-BR" sz="2500" b="1">
                 <a:solidFill>
                   <a:srgbClr val="268984"/>
                 </a:solidFill>
@@ -5445,7 +5528,7 @@
           <p:cNvPr id="17" name="CaixaDeTexto 16">
             <a:extLst>
               <a:ext uri="{FF2B5EF4-FFF2-40B4-BE49-F238E27FC236}">
-                <a16:creationId xmlns:a16="http://schemas.microsoft.com/office/drawing/2014/main" id="{72DF3FF4-ABC5-C5E8-8B5E-1FBAF6F5EE12}"/>
+                <a16:creationId xmlns:a16="http://schemas.microsoft.com/office/drawing/2014/main" id="{1C2B8998-5F64-7144-66EC-3C3A6748F866}"/>
               </a:ext>
             </a:extLst>
           </p:cNvPr>
@@ -5454,8 +5537,8 @@
         </p:nvSpPr>
         <p:spPr>
           <a:xfrm>
-            <a:off x="8890000" y="3937000"/>
-            <a:ext cx="2032000" cy="251351"/>
+            <a:off x="8890000" y="3924300"/>
+            <a:ext cx="2032000" cy="235962"/>
           </a:xfrm>
           <a:prstGeom prst="rect">
             <a:avLst/>
@@ -5470,7 +5553,7 @@
           <a:p>
             <a:pPr algn="ctr"/>
             <a:r>
-              <a:rPr lang="pt-BR" sz="1300">
+              <a:rPr lang="pt-BR" sz="1200">
                 <a:solidFill>
                   <a:srgbClr val="585F69"/>
                 </a:solidFill>
@@ -5486,7 +5569,7 @@
           <p:cNvPr id="18" name="CaixaDeTexto 17">
             <a:extLst>
               <a:ext uri="{FF2B5EF4-FFF2-40B4-BE49-F238E27FC236}">
-                <a16:creationId xmlns:a16="http://schemas.microsoft.com/office/drawing/2014/main" id="{90DC24FB-99FF-16E2-07ED-0B36CC44DCDE}"/>
+                <a16:creationId xmlns:a16="http://schemas.microsoft.com/office/drawing/2014/main" id="{1E5B4DF0-BEB5-26EE-4647-EA1760FD7B6A}"/>
               </a:ext>
             </a:extLst>
           </p:cNvPr>
@@ -5525,7 +5608,7 @@
     </p:spTree>
     <p:extLst>
       <p:ext uri="{BB962C8B-B14F-4D97-AF65-F5344CB8AC3E}">
-        <p14:creationId xmlns:p14="http://schemas.microsoft.com/office/powerpoint/2010/main" val="267347494"/>
+        <p14:creationId xmlns:p14="http://schemas.microsoft.com/office/powerpoint/2010/main" val="691252001"/>
       </p:ext>
     </p:extLst>
   </p:cSld>
@@ -5565,7 +5648,7 @@
           <p:cNvPr id="2" name="Retângulo 1">
             <a:extLst>
               <a:ext uri="{FF2B5EF4-FFF2-40B4-BE49-F238E27FC236}">
-                <a16:creationId xmlns:a16="http://schemas.microsoft.com/office/drawing/2014/main" id="{A5732E3D-5905-25F5-1198-639F63DA31C2}"/>
+                <a16:creationId xmlns:a16="http://schemas.microsoft.com/office/drawing/2014/main" id="{9689A4C5-9ABE-BFE9-132A-102C92C5ECF5}"/>
               </a:ext>
             </a:extLst>
           </p:cNvPr>
@@ -5633,7 +5716,7 @@
           <p:cNvPr id="3" name="CaixaDeTexto 2">
             <a:extLst>
               <a:ext uri="{FF2B5EF4-FFF2-40B4-BE49-F238E27FC236}">
-                <a16:creationId xmlns:a16="http://schemas.microsoft.com/office/drawing/2014/main" id="{C9EFA7C8-1DA6-9CC7-6EDE-E0E07C1EF11E}"/>
+                <a16:creationId xmlns:a16="http://schemas.microsoft.com/office/drawing/2014/main" id="{AFF1B0FE-AE5A-9E1B-3737-175EF100EB2F}"/>
               </a:ext>
             </a:extLst>
           </p:cNvPr>
@@ -5643,7 +5726,7 @@
         <p:spPr>
           <a:xfrm>
             <a:off x="355600" y="127000"/>
-            <a:ext cx="8890000" cy="420628"/>
+            <a:ext cx="8636000" cy="420628"/>
           </a:xfrm>
           <a:prstGeom prst="rect">
             <a:avLst/>
@@ -5663,7 +5746,7 @@
                 </a:solidFill>
                 <a:latin typeface="Aptos" panose="020B0004020202020204" pitchFamily="34" charset="0"/>
               </a:rPr>
-              <a:t>Visualização e Storytelling</a:t>
+              <a:t>Notebook 06: Resultados Consolidados</a:t>
             </a:r>
           </a:p>
         </p:txBody>
@@ -5673,7 +5756,7 @@
           <p:cNvPr id="4" name="CaixaDeTexto 3">
             <a:extLst>
               <a:ext uri="{FF2B5EF4-FFF2-40B4-BE49-F238E27FC236}">
-                <a16:creationId xmlns:a16="http://schemas.microsoft.com/office/drawing/2014/main" id="{B2DB34C3-7EDD-8068-7F0D-A316BAA38636}"/>
+                <a16:creationId xmlns:a16="http://schemas.microsoft.com/office/drawing/2014/main" id="{3EDC3378-647B-E7C4-A12A-6266A964B90F}"/>
               </a:ext>
             </a:extLst>
           </p:cNvPr>
@@ -5682,8 +5765,8 @@
         </p:nvSpPr>
         <p:spPr>
           <a:xfrm>
-            <a:off x="8890000" y="190500"/>
-            <a:ext cx="2946400" cy="235962"/>
+            <a:off x="8763000" y="190500"/>
+            <a:ext cx="3073400" cy="235962"/>
           </a:xfrm>
           <a:prstGeom prst="rect">
             <a:avLst/>
@@ -5714,7 +5797,7 @@
           <p:cNvPr id="5" name="CaixaDeTexto 4">
             <a:extLst>
               <a:ext uri="{FF2B5EF4-FFF2-40B4-BE49-F238E27FC236}">
-                <a16:creationId xmlns:a16="http://schemas.microsoft.com/office/drawing/2014/main" id="{143507D2-C49F-B865-5D8B-5B2EA28FDECA}"/>
+                <a16:creationId xmlns:a16="http://schemas.microsoft.com/office/drawing/2014/main" id="{C1DB72EC-6131-A713-E0DB-B29CE4691885}"/>
               </a:ext>
             </a:extLst>
           </p:cNvPr>
@@ -5723,8 +5806,8 @@
         </p:nvSpPr>
         <p:spPr>
           <a:xfrm>
-            <a:off x="578574" y="1273931"/>
-            <a:ext cx="4222026" cy="2698175"/>
+            <a:off x="685800" y="1168400"/>
+            <a:ext cx="4445000" cy="3180358"/>
           </a:xfrm>
           <a:prstGeom prst="rect">
             <a:avLst/>
@@ -5732,131 +5815,98 @@
           <a:noFill/>
         </p:spPr>
         <p:txBody>
-          <a:bodyPr vert="horz" wrap="square" lIns="50800" tIns="25400" rIns="50800" bIns="25400" rtlCol="0">
+          <a:bodyPr vert="horz" lIns="50800" tIns="25400" rIns="50800" bIns="25400" rtlCol="0">
             <a:spAutoFit/>
           </a:bodyPr>
           <a:lstStyle/>
           <a:p>
-            <a:pPr marL="457200" indent="-457200">
+            <a:pPr marL="342900" indent="-342900">
               <a:spcAft>
-                <a:spcPts val="800"/>
+                <a:spcPts val="700"/>
               </a:spcAft>
               <a:buFont typeface="+mj-lt"/>
               <a:buChar char="•"/>
             </a:pPr>
             <a:r>
-              <a:rPr lang="pt-BR" sz="1900" dirty="0">
+              <a:rPr lang="pt-BR">
                 <a:solidFill>
                   <a:srgbClr val="1E2227"/>
                 </a:solidFill>
                 <a:latin typeface="Aptos" panose="020B0004020202020204" pitchFamily="34" charset="0"/>
               </a:rPr>
-              <a:t>Distribuições mostram assimetria à direita em </a:t>
-            </a:r>
-            <a:r>
-              <a:rPr lang="pt-BR" sz="1900" dirty="0" err="1">
-                <a:solidFill>
-                  <a:srgbClr val="1E2227"/>
-                </a:solidFill>
-                <a:latin typeface="Aptos" panose="020B0004020202020204" pitchFamily="34" charset="0"/>
-              </a:rPr>
-              <a:t>SalePrice</a:t>
-            </a:r>
-            <a:endParaRPr lang="pt-BR" sz="1900" dirty="0">
-              <a:solidFill>
-                <a:srgbClr val="1E2227"/>
-              </a:solidFill>
-              <a:latin typeface="Aptos" panose="020B0004020202020204" pitchFamily="34" charset="0"/>
-            </a:endParaRPr>
-          </a:p>
-          <a:p>
-            <a:pPr marL="457200" indent="-457200">
+              <a:t>Nova seção reúne os resultados dos modelos em painéis visuais</a:t>
+            </a:r>
+          </a:p>
+          <a:p>
+            <a:pPr marL="342900" indent="-342900">
               <a:spcAft>
-                <a:spcPts val="800"/>
+                <a:spcPts val="700"/>
               </a:spcAft>
               <a:buFont typeface="+mj-lt"/>
               <a:buChar char="•"/>
             </a:pPr>
             <a:r>
-              <a:rPr lang="pt-BR" sz="1900" dirty="0" err="1">
+              <a:rPr lang="pt-BR">
                 <a:solidFill>
                   <a:srgbClr val="1E2227"/>
                 </a:solidFill>
                 <a:latin typeface="Aptos" panose="020B0004020202020204" pitchFamily="34" charset="0"/>
               </a:rPr>
-              <a:t>Heatmap</a:t>
-            </a:r>
-            <a:r>
-              <a:rPr lang="pt-BR" sz="1900" dirty="0">
-                <a:solidFill>
-                  <a:srgbClr val="1E2227"/>
-                </a:solidFill>
-                <a:latin typeface="Aptos" panose="020B0004020202020204" pitchFamily="34" charset="0"/>
-              </a:rPr>
-              <a:t> confirma variáveis mais ligadas ao preço</a:t>
-            </a:r>
-          </a:p>
-          <a:p>
-            <a:pPr marL="457200" indent="-457200">
+              <a:t>Supervisionados: regressão e classificação no mesmo fluxo</a:t>
+            </a:r>
+          </a:p>
+          <a:p>
+            <a:pPr marL="342900" indent="-342900">
               <a:spcAft>
-                <a:spcPts val="800"/>
+                <a:spcPts val="700"/>
               </a:spcAft>
               <a:buFont typeface="+mj-lt"/>
               <a:buChar char="•"/>
             </a:pPr>
             <a:r>
-              <a:rPr lang="pt-BR" sz="1900" dirty="0" err="1">
+              <a:rPr lang="pt-BR">
                 <a:solidFill>
                   <a:srgbClr val="1E2227"/>
                 </a:solidFill>
                 <a:latin typeface="Aptos" panose="020B0004020202020204" pitchFamily="34" charset="0"/>
               </a:rPr>
-              <a:t>Scatter</a:t>
-            </a:r>
-            <a:r>
-              <a:rPr lang="pt-BR" sz="1900" dirty="0">
-                <a:solidFill>
-                  <a:srgbClr val="1E2227"/>
-                </a:solidFill>
-                <a:latin typeface="Aptos" panose="020B0004020202020204" pitchFamily="34" charset="0"/>
-              </a:rPr>
-              <a:t> e </a:t>
-            </a:r>
-            <a:r>
-              <a:rPr lang="pt-BR" sz="1900" dirty="0" err="1">
-                <a:solidFill>
-                  <a:srgbClr val="1E2227"/>
-                </a:solidFill>
-                <a:latin typeface="Aptos" panose="020B0004020202020204" pitchFamily="34" charset="0"/>
-              </a:rPr>
-              <a:t>boxplot</a:t>
-            </a:r>
-            <a:r>
-              <a:rPr lang="pt-BR" sz="1900" dirty="0">
-                <a:solidFill>
-                  <a:srgbClr val="1E2227"/>
-                </a:solidFill>
-                <a:latin typeface="Aptos" panose="020B0004020202020204" pitchFamily="34" charset="0"/>
-              </a:rPr>
-              <a:t> reforçam impacto de área e qualidade</a:t>
-            </a:r>
-          </a:p>
-          <a:p>
-            <a:pPr marL="457200" indent="-457200">
+              <a:t>Não supervisionados: clusters, PCA/t-SNE e perfis médios</a:t>
+            </a:r>
+          </a:p>
+          <a:p>
+            <a:pPr marL="342900" indent="-342900">
               <a:spcAft>
-                <a:spcPts val="800"/>
+                <a:spcPts val="700"/>
               </a:spcAft>
               <a:buFont typeface="+mj-lt"/>
               <a:buChar char="•"/>
             </a:pPr>
             <a:r>
-              <a:rPr lang="pt-BR" sz="1900" dirty="0">
+              <a:rPr lang="pt-BR">
                 <a:solidFill>
                   <a:srgbClr val="1E2227"/>
                 </a:solidFill>
                 <a:latin typeface="Aptos" panose="020B0004020202020204" pitchFamily="34" charset="0"/>
               </a:rPr>
-              <a:t>Painel consolidado transforma métricas em narrativa analítica</a:t>
+              <a:t>Associação e outliers: Apriori e LOF em visão consolidada</a:t>
+            </a:r>
+          </a:p>
+          <a:p>
+            <a:pPr marL="342900" indent="-342900">
+              <a:spcAft>
+                <a:spcPts val="700"/>
+              </a:spcAft>
+              <a:buFont typeface="+mj-lt"/>
+              <a:buChar char="•"/>
+            </a:pPr>
+            <a:r>
+              <a:rPr lang="pt-BR">
+                <a:solidFill>
+                  <a:srgbClr val="1E2227"/>
+                </a:solidFill>
+                <a:latin typeface="Aptos" panose="020B0004020202020204" pitchFamily="34" charset="0"/>
+              </a:rPr>
+              <a:t>Placeholders removidos e conclusão executiva atualizada</a:t>
             </a:r>
           </a:p>
         </p:txBody>
@@ -5866,7 +5916,7 @@
           <p:cNvPr id="7" name="Imagem 6">
             <a:extLst>
               <a:ext uri="{FF2B5EF4-FFF2-40B4-BE49-F238E27FC236}">
-                <a16:creationId xmlns:a16="http://schemas.microsoft.com/office/drawing/2014/main" id="{DA9EF315-EACB-64C8-306F-A96D79F302E9}"/>
+                <a16:creationId xmlns:a16="http://schemas.microsoft.com/office/drawing/2014/main" id="{6869CB4F-30D5-58F4-0C2E-AFAEA1613D46}"/>
               </a:ext>
             </a:extLst>
           </p:cNvPr>
@@ -5889,59 +5939,54 @@
         </p:blipFill>
         <p:spPr>
           <a:xfrm>
-            <a:off x="4892122" y="1423763"/>
-            <a:ext cx="7008858" cy="4501873"/>
+            <a:off x="7079588" y="1795675"/>
+            <a:ext cx="2223824" cy="637751"/>
           </a:xfrm>
           <a:prstGeom prst="rect">
             <a:avLst/>
           </a:prstGeom>
         </p:spPr>
       </p:pic>
-      <p:sp>
-        <p:nvSpPr>
-          <p:cNvPr id="8" name="CaixaDeTexto 7">
-            <a:extLst>
-              <a:ext uri="{FF2B5EF4-FFF2-40B4-BE49-F238E27FC236}">
-                <a16:creationId xmlns:a16="http://schemas.microsoft.com/office/drawing/2014/main" id="{D792805E-A64C-2DB5-892E-10963FAC86B6}"/>
-              </a:ext>
-            </a:extLst>
-          </p:cNvPr>
-          <p:cNvSpPr txBox="1"/>
-          <p:nvPr/>
-        </p:nvSpPr>
-        <p:spPr>
-          <a:xfrm>
-            <a:off x="992432" y="4509437"/>
-            <a:ext cx="3394309" cy="1282402"/>
-          </a:xfrm>
-          <a:prstGeom prst="rect">
-            <a:avLst/>
-          </a:prstGeom>
-          <a:noFill/>
-        </p:spPr>
-        <p:txBody>
-          <a:bodyPr vert="horz" wrap="square" lIns="50800" tIns="25400" rIns="50800" bIns="25400" rtlCol="0">
-            <a:spAutoFit/>
-          </a:bodyPr>
-          <a:lstStyle/>
-          <a:p>
-            <a:pPr algn="ctr"/>
-            <a:r>
-              <a:rPr lang="pt-BR" sz="2000" b="1" dirty="0">
-                <a:solidFill>
-                  <a:srgbClr val="162B3A"/>
-                </a:solidFill>
-                <a:latin typeface="Aptos" panose="020B0004020202020204" pitchFamily="34" charset="0"/>
-              </a:rPr>
-              <a:t>Mensagem visual: preço é resultado da combinação entre tamanho, qualidade, estrutura e idade do imóvel.</a:t>
-            </a:r>
-          </a:p>
-        </p:txBody>
-      </p:sp>
+      <p:pic>
+        <p:nvPicPr>
+          <p:cNvPr id="9" name="Imagem 8">
+            <a:extLst>
+              <a:ext uri="{FF2B5EF4-FFF2-40B4-BE49-F238E27FC236}">
+                <a16:creationId xmlns:a16="http://schemas.microsoft.com/office/drawing/2014/main" id="{F8C2AB76-27B6-65E4-5B12-0445C9C3F811}"/>
+              </a:ext>
+            </a:extLst>
+          </p:cNvPr>
+          <p:cNvPicPr>
+            <a:picLocks noChangeAspect="1"/>
+          </p:cNvPicPr>
+          <p:nvPr/>
+        </p:nvPicPr>
+        <p:blipFill>
+          <a:blip r:embed="rId4">
+            <a:extLst>
+              <a:ext uri="{28A0092B-C50C-407E-A947-70E740481C1C}">
+                <a14:useLocalDpi xmlns:a14="http://schemas.microsoft.com/office/drawing/2010/main" val="0"/>
+              </a:ext>
+            </a:extLst>
+          </a:blip>
+          <a:stretch>
+            <a:fillRect/>
+          </a:stretch>
+        </p:blipFill>
+        <p:spPr>
+          <a:xfrm>
+            <a:off x="7670512" y="4423363"/>
+            <a:ext cx="1041976" cy="602074"/>
+          </a:xfrm>
+          <a:prstGeom prst="rect">
+            <a:avLst/>
+          </a:prstGeom>
+        </p:spPr>
+      </p:pic>
     </p:spTree>
     <p:extLst>
       <p:ext uri="{BB962C8B-B14F-4D97-AF65-F5344CB8AC3E}">
-        <p14:creationId xmlns:p14="http://schemas.microsoft.com/office/powerpoint/2010/main" val="2959359994"/>
+        <p14:creationId xmlns:p14="http://schemas.microsoft.com/office/powerpoint/2010/main" val="2049991879"/>
       </p:ext>
     </p:extLst>
   </p:cSld>
@@ -5981,7 +6026,7 @@
           <p:cNvPr id="2" name="Retângulo 1">
             <a:extLst>
               <a:ext uri="{FF2B5EF4-FFF2-40B4-BE49-F238E27FC236}">
-                <a16:creationId xmlns:a16="http://schemas.microsoft.com/office/drawing/2014/main" id="{E3EF6C5D-7C5F-B289-7152-B5882C2CD823}"/>
+                <a16:creationId xmlns:a16="http://schemas.microsoft.com/office/drawing/2014/main" id="{B6D25A27-2BDF-148A-8D85-5C41DECE5B79}"/>
               </a:ext>
             </a:extLst>
           </p:cNvPr>
@@ -6049,7 +6094,7 @@
           <p:cNvPr id="3" name="CaixaDeTexto 2">
             <a:extLst>
               <a:ext uri="{FF2B5EF4-FFF2-40B4-BE49-F238E27FC236}">
-                <a16:creationId xmlns:a16="http://schemas.microsoft.com/office/drawing/2014/main" id="{111D73A9-E51B-AF8F-7D64-6F4D909A21AF}"/>
+                <a16:creationId xmlns:a16="http://schemas.microsoft.com/office/drawing/2014/main" id="{0C96A9D2-C4C1-758C-105B-F92F8FB0A442}"/>
               </a:ext>
             </a:extLst>
           </p:cNvPr>
@@ -6059,7 +6104,7 @@
         <p:spPr>
           <a:xfrm>
             <a:off x="355600" y="127000"/>
-            <a:ext cx="8890000" cy="420628"/>
+            <a:ext cx="8636000" cy="420628"/>
           </a:xfrm>
           <a:prstGeom prst="rect">
             <a:avLst/>
@@ -6079,7 +6124,7 @@
                 </a:solidFill>
                 <a:latin typeface="Aptos" panose="020B0004020202020204" pitchFamily="34" charset="0"/>
               </a:rPr>
-              <a:t>Conclusões Principais</a:t>
+              <a:t>Visualização e Storytelling</a:t>
             </a:r>
           </a:p>
         </p:txBody>
@@ -6089,7 +6134,7 @@
           <p:cNvPr id="4" name="CaixaDeTexto 3">
             <a:extLst>
               <a:ext uri="{FF2B5EF4-FFF2-40B4-BE49-F238E27FC236}">
-                <a16:creationId xmlns:a16="http://schemas.microsoft.com/office/drawing/2014/main" id="{361D6FFE-92E2-FA8A-938D-8D163BC2CA0E}"/>
+                <a16:creationId xmlns:a16="http://schemas.microsoft.com/office/drawing/2014/main" id="{96ADCF12-1C7F-9EB1-38B7-500B90DE0DE0}"/>
               </a:ext>
             </a:extLst>
           </p:cNvPr>
@@ -6098,8 +6143,8 @@
         </p:nvSpPr>
         <p:spPr>
           <a:xfrm>
-            <a:off x="8890000" y="190500"/>
-            <a:ext cx="2946400" cy="235962"/>
+            <a:off x="8763000" y="190500"/>
+            <a:ext cx="3073400" cy="235962"/>
           </a:xfrm>
           <a:prstGeom prst="rect">
             <a:avLst/>
@@ -6114,77 +6159,23 @@
           <a:p>
             <a:pPr algn="r"/>
             <a:r>
-              <a:rPr lang="pt-BR" sz="1200" dirty="0">
+              <a:rPr lang="pt-BR" sz="1200">
                 <a:solidFill>
                   <a:srgbClr val="FFFFFF"/>
                 </a:solidFill>
                 <a:latin typeface="Aptos" panose="020B0004020202020204" pitchFamily="34" charset="0"/>
               </a:rPr>
-              <a:t>Fechamento</a:t>
-            </a:r>
-          </a:p>
-        </p:txBody>
-      </p:sp>
-      <p:sp>
-        <p:nvSpPr>
-          <p:cNvPr id="5" name="Retângulo 4">
-            <a:extLst>
-              <a:ext uri="{FF2B5EF4-FFF2-40B4-BE49-F238E27FC236}">
-                <a16:creationId xmlns:a16="http://schemas.microsoft.com/office/drawing/2014/main" id="{A295187D-078B-615F-C120-5D5283A19FD5}"/>
-              </a:ext>
-            </a:extLst>
-          </p:cNvPr>
-          <p:cNvSpPr/>
-          <p:nvPr/>
-        </p:nvSpPr>
-        <p:spPr>
-          <a:xfrm>
-            <a:off x="825500" y="1206500"/>
-            <a:ext cx="2413000" cy="1076432"/>
-          </a:xfrm>
-          <a:prstGeom prst="rect">
-            <a:avLst/>
-          </a:prstGeom>
-          <a:solidFill>
-            <a:srgbClr val="F6F8FA"/>
-          </a:solidFill>
-          <a:ln>
-            <a:solidFill>
-              <a:srgbClr val="DCE0E4"/>
-            </a:solidFill>
-          </a:ln>
-        </p:spPr>
-        <p:style>
-          <a:lnRef idx="2">
-            <a:schemeClr val="accent1">
-              <a:shade val="15000"/>
-            </a:schemeClr>
-          </a:lnRef>
-          <a:fillRef idx="1">
-            <a:schemeClr val="accent1"/>
-          </a:fillRef>
-          <a:effectRef idx="0">
-            <a:schemeClr val="accent1"/>
-          </a:effectRef>
-          <a:fontRef idx="minor">
-            <a:schemeClr val="lt1"/>
-          </a:fontRef>
-        </p:style>
-        <p:txBody>
-          <a:bodyPr rtlCol="0" anchor="ctr"/>
-          <a:lstStyle/>
-          <a:p>
-            <a:pPr algn="ctr"/>
-            <a:endParaRPr lang="pt-BR"/>
-          </a:p>
-        </p:txBody>
-      </p:sp>
-      <p:sp>
-        <p:nvSpPr>
-          <p:cNvPr id="6" name="CaixaDeTexto 5">
-            <a:extLst>
-              <a:ext uri="{FF2B5EF4-FFF2-40B4-BE49-F238E27FC236}">
-                <a16:creationId xmlns:a16="http://schemas.microsoft.com/office/drawing/2014/main" id="{2FBDD151-532D-89BB-2C8B-4A31CA36C02D}"/>
+              <a:t>Natalia</a:t>
+            </a:r>
+          </a:p>
+        </p:txBody>
+      </p:sp>
+      <p:sp>
+        <p:nvSpPr>
+          <p:cNvPr id="5" name="CaixaDeTexto 4">
+            <a:extLst>
+              <a:ext uri="{FF2B5EF4-FFF2-40B4-BE49-F238E27FC236}">
+                <a16:creationId xmlns:a16="http://schemas.microsoft.com/office/drawing/2014/main" id="{65A3445B-AF67-C2CC-1FAC-6FDBAED97B45}"/>
               </a:ext>
             </a:extLst>
           </p:cNvPr>
@@ -6193,8 +6184,8 @@
         </p:nvSpPr>
         <p:spPr>
           <a:xfrm>
-            <a:off x="952500" y="1333500"/>
-            <a:ext cx="2159000" cy="451406"/>
+            <a:off x="736600" y="1206500"/>
+            <a:ext cx="4699000" cy="3334246"/>
           </a:xfrm>
           <a:prstGeom prst="rect">
             <a:avLst/>
@@ -6207,583 +6198,170 @@
           </a:bodyPr>
           <a:lstStyle/>
           <a:p>
-            <a:pPr algn="ctr"/>
-            <a:r>
-              <a:rPr lang="pt-BR" sz="2600" b="1">
-                <a:solidFill>
-                  <a:srgbClr val="268984"/>
-                </a:solidFill>
-                <a:latin typeface="Aptos" panose="020B0004020202020204" pitchFamily="34" charset="0"/>
-              </a:rPr>
-              <a:t>1458 x 298</a:t>
-            </a:r>
-          </a:p>
-        </p:txBody>
-      </p:sp>
-      <p:sp>
-        <p:nvSpPr>
-          <p:cNvPr id="7" name="CaixaDeTexto 6">
-            <a:extLst>
-              <a:ext uri="{FF2B5EF4-FFF2-40B4-BE49-F238E27FC236}">
-                <a16:creationId xmlns:a16="http://schemas.microsoft.com/office/drawing/2014/main" id="{55AFDBC7-5D90-ECD4-8B20-5D08BAC868CE}"/>
-              </a:ext>
-            </a:extLst>
-          </p:cNvPr>
-          <p:cNvSpPr txBox="1"/>
-          <p:nvPr/>
-        </p:nvSpPr>
-        <p:spPr>
-          <a:xfrm>
-            <a:off x="952500" y="1841500"/>
-            <a:ext cx="2159000" cy="251351"/>
-          </a:xfrm>
-          <a:prstGeom prst="rect">
-            <a:avLst/>
-          </a:prstGeom>
-          <a:noFill/>
-        </p:spPr>
-        <p:txBody>
-          <a:bodyPr vert="horz" lIns="50800" tIns="25400" rIns="50800" bIns="25400" rtlCol="0">
-            <a:spAutoFit/>
-          </a:bodyPr>
-          <a:lstStyle/>
-          <a:p>
-            <a:pPr algn="ctr"/>
-            <a:r>
-              <a:rPr lang="pt-BR" sz="1300">
-                <a:solidFill>
-                  <a:srgbClr val="585F69"/>
-                </a:solidFill>
-                <a:latin typeface="Aptos" panose="020B0004020202020204" pitchFamily="34" charset="0"/>
-              </a:rPr>
-              <a:t>base final</a:t>
-            </a:r>
-          </a:p>
-        </p:txBody>
-      </p:sp>
-      <p:sp>
-        <p:nvSpPr>
-          <p:cNvPr id="8" name="Retângulo 7">
-            <a:extLst>
-              <a:ext uri="{FF2B5EF4-FFF2-40B4-BE49-F238E27FC236}">
-                <a16:creationId xmlns:a16="http://schemas.microsoft.com/office/drawing/2014/main" id="{89D045D4-6503-99E4-3750-63EEF5E771FD}"/>
-              </a:ext>
-            </a:extLst>
-          </p:cNvPr>
-          <p:cNvSpPr/>
-          <p:nvPr/>
-        </p:nvSpPr>
-        <p:spPr>
-          <a:xfrm>
-            <a:off x="3619500" y="1206500"/>
-            <a:ext cx="2159000" cy="1076432"/>
-          </a:xfrm>
-          <a:prstGeom prst="rect">
-            <a:avLst/>
-          </a:prstGeom>
-          <a:solidFill>
-            <a:srgbClr val="F6F8FA"/>
-          </a:solidFill>
-          <a:ln>
-            <a:solidFill>
-              <a:srgbClr val="DCE0E4"/>
-            </a:solidFill>
-          </a:ln>
-        </p:spPr>
-        <p:style>
-          <a:lnRef idx="2">
-            <a:schemeClr val="accent1">
-              <a:shade val="15000"/>
-            </a:schemeClr>
-          </a:lnRef>
-          <a:fillRef idx="1">
-            <a:schemeClr val="accent1"/>
-          </a:fillRef>
-          <a:effectRef idx="0">
-            <a:schemeClr val="accent1"/>
-          </a:effectRef>
-          <a:fontRef idx="minor">
-            <a:schemeClr val="lt1"/>
-          </a:fontRef>
-        </p:style>
-        <p:txBody>
-          <a:bodyPr rtlCol="0" anchor="ctr"/>
-          <a:lstStyle/>
-          <a:p>
-            <a:pPr algn="ctr"/>
-            <a:endParaRPr lang="pt-BR"/>
-          </a:p>
-        </p:txBody>
-      </p:sp>
-      <p:sp>
-        <p:nvSpPr>
-          <p:cNvPr id="9" name="CaixaDeTexto 8">
-            <a:extLst>
-              <a:ext uri="{FF2B5EF4-FFF2-40B4-BE49-F238E27FC236}">
-                <a16:creationId xmlns:a16="http://schemas.microsoft.com/office/drawing/2014/main" id="{9924ADBF-8A88-BCC6-2038-9249B6BABB40}"/>
-              </a:ext>
-            </a:extLst>
-          </p:cNvPr>
-          <p:cNvSpPr txBox="1"/>
-          <p:nvPr/>
-        </p:nvSpPr>
-        <p:spPr>
-          <a:xfrm>
-            <a:off x="3746500" y="1333500"/>
-            <a:ext cx="1905000" cy="451406"/>
-          </a:xfrm>
-          <a:prstGeom prst="rect">
-            <a:avLst/>
-          </a:prstGeom>
-          <a:noFill/>
-        </p:spPr>
-        <p:txBody>
-          <a:bodyPr vert="horz" lIns="50800" tIns="25400" rIns="50800" bIns="25400" rtlCol="0">
-            <a:spAutoFit/>
-          </a:bodyPr>
-          <a:lstStyle/>
-          <a:p>
-            <a:pPr algn="ctr"/>
-            <a:r>
-              <a:rPr lang="pt-BR" sz="2600" b="1">
-                <a:solidFill>
-                  <a:srgbClr val="589C66"/>
-                </a:solidFill>
-                <a:latin typeface="Aptos" panose="020B0004020202020204" pitchFamily="34" charset="0"/>
-              </a:rPr>
-              <a:t>0,817</a:t>
-            </a:r>
-          </a:p>
-        </p:txBody>
-      </p:sp>
-      <p:sp>
-        <p:nvSpPr>
-          <p:cNvPr id="10" name="CaixaDeTexto 9">
-            <a:extLst>
-              <a:ext uri="{FF2B5EF4-FFF2-40B4-BE49-F238E27FC236}">
-                <a16:creationId xmlns:a16="http://schemas.microsoft.com/office/drawing/2014/main" id="{7E97458F-1C31-6596-8894-23B1AB9EBE46}"/>
-              </a:ext>
-            </a:extLst>
-          </p:cNvPr>
-          <p:cNvSpPr txBox="1"/>
-          <p:nvPr/>
-        </p:nvSpPr>
-        <p:spPr>
-          <a:xfrm>
-            <a:off x="3746500" y="1841500"/>
-            <a:ext cx="1905000" cy="251351"/>
-          </a:xfrm>
-          <a:prstGeom prst="rect">
-            <a:avLst/>
-          </a:prstGeom>
-          <a:noFill/>
-        </p:spPr>
-        <p:txBody>
-          <a:bodyPr vert="horz" lIns="50800" tIns="25400" rIns="50800" bIns="25400" rtlCol="0">
-            <a:spAutoFit/>
-          </a:bodyPr>
-          <a:lstStyle/>
-          <a:p>
-            <a:pPr algn="ctr"/>
-            <a:r>
-              <a:rPr lang="pt-BR" sz="1300">
-                <a:solidFill>
-                  <a:srgbClr val="585F69"/>
-                </a:solidFill>
-                <a:latin typeface="Aptos" panose="020B0004020202020204" pitchFamily="34" charset="0"/>
-              </a:rPr>
-              <a:t>R² regressão</a:t>
-            </a:r>
-          </a:p>
-        </p:txBody>
-      </p:sp>
-      <p:sp>
-        <p:nvSpPr>
-          <p:cNvPr id="11" name="Retângulo 10">
-            <a:extLst>
-              <a:ext uri="{FF2B5EF4-FFF2-40B4-BE49-F238E27FC236}">
-                <a16:creationId xmlns:a16="http://schemas.microsoft.com/office/drawing/2014/main" id="{9C21A6AF-4650-1548-B61F-58E3875671EF}"/>
-              </a:ext>
-            </a:extLst>
-          </p:cNvPr>
-          <p:cNvSpPr/>
-          <p:nvPr/>
-        </p:nvSpPr>
-        <p:spPr>
-          <a:xfrm>
-            <a:off x="6159500" y="1206500"/>
-            <a:ext cx="2413000" cy="1076432"/>
-          </a:xfrm>
-          <a:prstGeom prst="rect">
-            <a:avLst/>
-          </a:prstGeom>
-          <a:solidFill>
-            <a:srgbClr val="F6F8FA"/>
-          </a:solidFill>
-          <a:ln>
-            <a:solidFill>
-              <a:srgbClr val="DCE0E4"/>
-            </a:solidFill>
-          </a:ln>
-        </p:spPr>
-        <p:style>
-          <a:lnRef idx="2">
-            <a:schemeClr val="accent1">
-              <a:shade val="15000"/>
-            </a:schemeClr>
-          </a:lnRef>
-          <a:fillRef idx="1">
-            <a:schemeClr val="accent1"/>
-          </a:fillRef>
-          <a:effectRef idx="0">
-            <a:schemeClr val="accent1"/>
-          </a:effectRef>
-          <a:fontRef idx="minor">
-            <a:schemeClr val="lt1"/>
-          </a:fontRef>
-        </p:style>
-        <p:txBody>
-          <a:bodyPr rtlCol="0" anchor="ctr"/>
-          <a:lstStyle/>
-          <a:p>
-            <a:pPr algn="ctr"/>
-            <a:endParaRPr lang="pt-BR"/>
-          </a:p>
-        </p:txBody>
-      </p:sp>
-      <p:sp>
-        <p:nvSpPr>
-          <p:cNvPr id="12" name="CaixaDeTexto 11">
-            <a:extLst>
-              <a:ext uri="{FF2B5EF4-FFF2-40B4-BE49-F238E27FC236}">
-                <a16:creationId xmlns:a16="http://schemas.microsoft.com/office/drawing/2014/main" id="{35F41B87-9F9B-943C-DD19-F665AEA04922}"/>
-              </a:ext>
-            </a:extLst>
-          </p:cNvPr>
-          <p:cNvSpPr txBox="1"/>
-          <p:nvPr/>
-        </p:nvSpPr>
-        <p:spPr>
-          <a:xfrm>
-            <a:off x="6286500" y="1333500"/>
-            <a:ext cx="2159000" cy="451406"/>
-          </a:xfrm>
-          <a:prstGeom prst="rect">
-            <a:avLst/>
-          </a:prstGeom>
-          <a:noFill/>
-        </p:spPr>
-        <p:txBody>
-          <a:bodyPr vert="horz" lIns="50800" tIns="25400" rIns="50800" bIns="25400" rtlCol="0">
-            <a:spAutoFit/>
-          </a:bodyPr>
-          <a:lstStyle/>
-          <a:p>
-            <a:pPr algn="ctr"/>
-            <a:r>
-              <a:rPr lang="pt-BR" sz="2600" b="1">
-                <a:solidFill>
-                  <a:srgbClr val="E87E42"/>
-                </a:solidFill>
-                <a:latin typeface="Aptos" panose="020B0004020202020204" pitchFamily="34" charset="0"/>
-              </a:rPr>
-              <a:t>92,1%</a:t>
-            </a:r>
-          </a:p>
-        </p:txBody>
-      </p:sp>
-      <p:sp>
-        <p:nvSpPr>
-          <p:cNvPr id="13" name="CaixaDeTexto 12">
-            <a:extLst>
-              <a:ext uri="{FF2B5EF4-FFF2-40B4-BE49-F238E27FC236}">
-                <a16:creationId xmlns:a16="http://schemas.microsoft.com/office/drawing/2014/main" id="{A2B2E8CA-139E-B2B4-0DAF-1381B904DA7D}"/>
-              </a:ext>
-            </a:extLst>
-          </p:cNvPr>
-          <p:cNvSpPr txBox="1"/>
-          <p:nvPr/>
-        </p:nvSpPr>
-        <p:spPr>
-          <a:xfrm>
-            <a:off x="6286500" y="1841500"/>
-            <a:ext cx="2159000" cy="251351"/>
-          </a:xfrm>
-          <a:prstGeom prst="rect">
-            <a:avLst/>
-          </a:prstGeom>
-          <a:noFill/>
-        </p:spPr>
-        <p:txBody>
-          <a:bodyPr vert="horz" lIns="50800" tIns="25400" rIns="50800" bIns="25400" rtlCol="0">
-            <a:spAutoFit/>
-          </a:bodyPr>
-          <a:lstStyle/>
-          <a:p>
-            <a:pPr algn="ctr"/>
-            <a:r>
-              <a:rPr lang="pt-BR" sz="1300">
-                <a:solidFill>
-                  <a:srgbClr val="585F69"/>
-                </a:solidFill>
-                <a:latin typeface="Aptos" panose="020B0004020202020204" pitchFamily="34" charset="0"/>
-              </a:rPr>
-              <a:t>accuracy classificação</a:t>
-            </a:r>
-          </a:p>
-        </p:txBody>
-      </p:sp>
-      <p:sp>
-        <p:nvSpPr>
-          <p:cNvPr id="14" name="Retângulo 13">
-            <a:extLst>
-              <a:ext uri="{FF2B5EF4-FFF2-40B4-BE49-F238E27FC236}">
-                <a16:creationId xmlns:a16="http://schemas.microsoft.com/office/drawing/2014/main" id="{860EBBE1-EF27-FFBE-F453-D894739EA2B3}"/>
-              </a:ext>
-            </a:extLst>
-          </p:cNvPr>
-          <p:cNvSpPr/>
-          <p:nvPr/>
-        </p:nvSpPr>
-        <p:spPr>
-          <a:xfrm>
-            <a:off x="8953500" y="1206500"/>
-            <a:ext cx="1905000" cy="1076432"/>
-          </a:xfrm>
-          <a:prstGeom prst="rect">
-            <a:avLst/>
-          </a:prstGeom>
-          <a:solidFill>
-            <a:srgbClr val="F6F8FA"/>
-          </a:solidFill>
-          <a:ln>
-            <a:solidFill>
-              <a:srgbClr val="DCE0E4"/>
-            </a:solidFill>
-          </a:ln>
-        </p:spPr>
-        <p:style>
-          <a:lnRef idx="2">
-            <a:schemeClr val="accent1">
-              <a:shade val="15000"/>
-            </a:schemeClr>
-          </a:lnRef>
-          <a:fillRef idx="1">
-            <a:schemeClr val="accent1"/>
-          </a:fillRef>
-          <a:effectRef idx="0">
-            <a:schemeClr val="accent1"/>
-          </a:effectRef>
-          <a:fontRef idx="minor">
-            <a:schemeClr val="lt1"/>
-          </a:fontRef>
-        </p:style>
-        <p:txBody>
-          <a:bodyPr rtlCol="0" anchor="ctr"/>
-          <a:lstStyle/>
-          <a:p>
-            <a:pPr algn="ctr"/>
-            <a:endParaRPr lang="pt-BR"/>
-          </a:p>
-        </p:txBody>
-      </p:sp>
-      <p:sp>
-        <p:nvSpPr>
-          <p:cNvPr id="15" name="CaixaDeTexto 14">
-            <a:extLst>
-              <a:ext uri="{FF2B5EF4-FFF2-40B4-BE49-F238E27FC236}">
-                <a16:creationId xmlns:a16="http://schemas.microsoft.com/office/drawing/2014/main" id="{208B09E6-7817-6446-4BEB-4B8315A4121F}"/>
-              </a:ext>
-            </a:extLst>
-          </p:cNvPr>
-          <p:cNvSpPr txBox="1"/>
-          <p:nvPr/>
-        </p:nvSpPr>
-        <p:spPr>
-          <a:xfrm>
-            <a:off x="9080500" y="1333500"/>
-            <a:ext cx="1651000" cy="451406"/>
-          </a:xfrm>
-          <a:prstGeom prst="rect">
-            <a:avLst/>
-          </a:prstGeom>
-          <a:noFill/>
-        </p:spPr>
-        <p:txBody>
-          <a:bodyPr vert="horz" lIns="50800" tIns="25400" rIns="50800" bIns="25400" rtlCol="0">
-            <a:spAutoFit/>
-          </a:bodyPr>
-          <a:lstStyle/>
-          <a:p>
-            <a:pPr algn="ctr"/>
-            <a:r>
-              <a:rPr lang="pt-BR" sz="2600" b="1">
-                <a:solidFill>
-                  <a:srgbClr val="268984"/>
-                </a:solidFill>
-                <a:latin typeface="Aptos" panose="020B0004020202020204" pitchFamily="34" charset="0"/>
-              </a:rPr>
-              <a:t>73</a:t>
-            </a:r>
-          </a:p>
-        </p:txBody>
-      </p:sp>
-      <p:sp>
-        <p:nvSpPr>
-          <p:cNvPr id="16" name="CaixaDeTexto 15">
-            <a:extLst>
-              <a:ext uri="{FF2B5EF4-FFF2-40B4-BE49-F238E27FC236}">
-                <a16:creationId xmlns:a16="http://schemas.microsoft.com/office/drawing/2014/main" id="{8B7B1463-ADE3-FADD-9C01-0857E79E0846}"/>
-              </a:ext>
-            </a:extLst>
-          </p:cNvPr>
-          <p:cNvSpPr txBox="1"/>
-          <p:nvPr/>
-        </p:nvSpPr>
-        <p:spPr>
-          <a:xfrm>
-            <a:off x="9080500" y="1841500"/>
-            <a:ext cx="1651000" cy="251351"/>
-          </a:xfrm>
-          <a:prstGeom prst="rect">
-            <a:avLst/>
-          </a:prstGeom>
-          <a:noFill/>
-        </p:spPr>
-        <p:txBody>
-          <a:bodyPr vert="horz" lIns="50800" tIns="25400" rIns="50800" bIns="25400" rtlCol="0">
-            <a:spAutoFit/>
-          </a:bodyPr>
-          <a:lstStyle/>
-          <a:p>
-            <a:pPr algn="ctr"/>
-            <a:r>
-              <a:rPr lang="pt-BR" sz="1300">
-                <a:solidFill>
-                  <a:srgbClr val="585F69"/>
-                </a:solidFill>
-                <a:latin typeface="Aptos" panose="020B0004020202020204" pitchFamily="34" charset="0"/>
-              </a:rPr>
-              <a:t>outliers LOF</a:t>
-            </a:r>
-          </a:p>
-        </p:txBody>
-      </p:sp>
-      <p:sp>
-        <p:nvSpPr>
-          <p:cNvPr id="17" name="CaixaDeTexto 16">
-            <a:extLst>
-              <a:ext uri="{FF2B5EF4-FFF2-40B4-BE49-F238E27FC236}">
-                <a16:creationId xmlns:a16="http://schemas.microsoft.com/office/drawing/2014/main" id="{FC7C72F4-8134-203E-51F7-DA1754D42944}"/>
-              </a:ext>
-            </a:extLst>
-          </p:cNvPr>
-          <p:cNvSpPr txBox="1"/>
-          <p:nvPr/>
-        </p:nvSpPr>
-        <p:spPr>
-          <a:xfrm>
-            <a:off x="1333500" y="3175000"/>
-            <a:ext cx="9525000" cy="2308324"/>
-          </a:xfrm>
-          <a:prstGeom prst="rect">
-            <a:avLst/>
-          </a:prstGeom>
-          <a:noFill/>
-        </p:spPr>
-        <p:txBody>
-          <a:bodyPr vert="horz" lIns="50800" tIns="25400" rIns="50800" bIns="25400" rtlCol="0">
-            <a:spAutoFit/>
-          </a:bodyPr>
-          <a:lstStyle/>
-          <a:p>
             <a:pPr marL="457200" indent="-457200">
               <a:spcAft>
-                <a:spcPts val="800"/>
+                <a:spcPts val="700"/>
               </a:spcAft>
               <a:buFont typeface="+mj-lt"/>
               <a:buChar char="•"/>
             </a:pPr>
             <a:r>
-              <a:rPr lang="pt-BR" sz="2000">
+              <a:rPr lang="pt-BR" sz="1900">
                 <a:solidFill>
                   <a:srgbClr val="1E2227"/>
                 </a:solidFill>
                 <a:latin typeface="Aptos" panose="020B0004020202020204" pitchFamily="34" charset="0"/>
               </a:rPr>
-              <a:t>O preço não depende de uma única variável</a:t>
+              <a:t>Distribuições mostram assimetria à direita em SalePrice</a:t>
             </a:r>
           </a:p>
           <a:p>
             <a:pPr marL="457200" indent="-457200">
               <a:spcAft>
-                <a:spcPts val="800"/>
+                <a:spcPts val="700"/>
               </a:spcAft>
               <a:buFont typeface="+mj-lt"/>
               <a:buChar char="•"/>
             </a:pPr>
             <a:r>
-              <a:rPr lang="pt-BR" sz="2000">
+              <a:rPr lang="pt-BR" sz="1900">
                 <a:solidFill>
                   <a:srgbClr val="1E2227"/>
                 </a:solidFill>
                 <a:latin typeface="Aptos" panose="020B0004020202020204" pitchFamily="34" charset="0"/>
               </a:rPr>
-              <a:t>Qualidade geral, área total, área habitável, banheiros, garagem e idade são sinais centrais</a:t>
+              <a:t>Heatmap confirma variáveis ligadas ao preço</a:t>
             </a:r>
           </a:p>
           <a:p>
             <a:pPr marL="457200" indent="-457200">
               <a:spcAft>
-                <a:spcPts val="800"/>
+                <a:spcPts val="700"/>
               </a:spcAft>
               <a:buFont typeface="+mj-lt"/>
               <a:buChar char="•"/>
             </a:pPr>
             <a:r>
-              <a:rPr lang="pt-BR" sz="2000">
+              <a:rPr lang="pt-BR" sz="1900">
                 <a:solidFill>
                   <a:srgbClr val="1E2227"/>
                 </a:solidFill>
                 <a:latin typeface="Aptos" panose="020B0004020202020204" pitchFamily="34" charset="0"/>
               </a:rPr>
-              <a:t>Feature engineering melhorou a interpretação e alimentou melhor os modelos</a:t>
+              <a:t>Scatter e boxplot reforçam impacto de área e qualidade</a:t>
             </a:r>
           </a:p>
           <a:p>
             <a:pPr marL="457200" indent="-457200">
               <a:spcAft>
-                <a:spcPts val="800"/>
+                <a:spcPts val="700"/>
               </a:spcAft>
               <a:buFont typeface="+mj-lt"/>
               <a:buChar char="•"/>
             </a:pPr>
             <a:r>
-              <a:rPr lang="pt-BR" sz="2000">
+              <a:rPr lang="pt-BR" sz="1900">
                 <a:solidFill>
                   <a:srgbClr val="1E2227"/>
                 </a:solidFill>
                 <a:latin typeface="Aptos" panose="020B0004020202020204" pitchFamily="34" charset="0"/>
               </a:rPr>
-              <a:t>Modelos supervisionados tiveram forte poder preditivo</a:t>
+              <a:t>Parte 5 conecta modelos supervisionados, clusters, Apriori e LOF</a:t>
             </a:r>
           </a:p>
           <a:p>
             <a:pPr marL="457200" indent="-457200">
               <a:spcAft>
-                <a:spcPts val="800"/>
+                <a:spcPts val="700"/>
               </a:spcAft>
               <a:buFont typeface="+mj-lt"/>
               <a:buChar char="•"/>
             </a:pPr>
             <a:r>
-              <a:rPr lang="pt-BR" sz="2000">
+              <a:rPr lang="pt-BR" sz="1900">
                 <a:solidFill>
                   <a:srgbClr val="1E2227"/>
                 </a:solidFill>
                 <a:latin typeface="Aptos" panose="020B0004020202020204" pitchFamily="34" charset="0"/>
               </a:rPr>
-              <a:t>Modelos não supervisionados revelaram perfis e anomalias úteis</a:t>
+              <a:t>Conclusão final sintetiza o raciocínio analítico do projeto</a:t>
+            </a:r>
+          </a:p>
+        </p:txBody>
+      </p:sp>
+      <p:pic>
+        <p:nvPicPr>
+          <p:cNvPr id="7" name="Imagem 6">
+            <a:extLst>
+              <a:ext uri="{FF2B5EF4-FFF2-40B4-BE49-F238E27FC236}">
+                <a16:creationId xmlns:a16="http://schemas.microsoft.com/office/drawing/2014/main" id="{247BC0D9-9BA1-A992-5F83-82E2CAB5F232}"/>
+              </a:ext>
+            </a:extLst>
+          </p:cNvPr>
+          <p:cNvPicPr>
+            <a:picLocks noChangeAspect="1"/>
+          </p:cNvPicPr>
+          <p:nvPr/>
+        </p:nvPicPr>
+        <p:blipFill>
+          <a:blip r:embed="rId3">
+            <a:extLst>
+              <a:ext uri="{28A0092B-C50C-407E-A947-70E740481C1C}">
+                <a14:useLocalDpi xmlns:a14="http://schemas.microsoft.com/office/drawing/2010/main" val="0"/>
+              </a:ext>
+            </a:extLst>
+          </a:blip>
+          <a:stretch>
+            <a:fillRect/>
+          </a:stretch>
+        </p:blipFill>
+        <p:spPr>
+          <a:xfrm>
+            <a:off x="7815987" y="1797990"/>
+            <a:ext cx="1132026" cy="849019"/>
+          </a:xfrm>
+          <a:prstGeom prst="rect">
+            <a:avLst/>
+          </a:prstGeom>
+        </p:spPr>
+      </p:pic>
+      <p:sp>
+        <p:nvSpPr>
+          <p:cNvPr id="8" name="CaixaDeTexto 7">
+            <a:extLst>
+              <a:ext uri="{FF2B5EF4-FFF2-40B4-BE49-F238E27FC236}">
+                <a16:creationId xmlns:a16="http://schemas.microsoft.com/office/drawing/2014/main" id="{39C760CB-6477-A97E-844E-FC4EA9A83AFF}"/>
+              </a:ext>
+            </a:extLst>
+          </p:cNvPr>
+          <p:cNvSpPr txBox="1"/>
+          <p:nvPr/>
+        </p:nvSpPr>
+        <p:spPr>
+          <a:xfrm>
+            <a:off x="1079500" y="4953000"/>
+            <a:ext cx="9779000" cy="789960"/>
+          </a:xfrm>
+          <a:prstGeom prst="rect">
+            <a:avLst/>
+          </a:prstGeom>
+          <a:noFill/>
+        </p:spPr>
+        <p:txBody>
+          <a:bodyPr vert="horz" lIns="50800" tIns="25400" rIns="50800" bIns="25400" rtlCol="0">
+            <a:spAutoFit/>
+          </a:bodyPr>
+          <a:lstStyle/>
+          <a:p>
+            <a:pPr algn="ctr"/>
+            <a:r>
+              <a:rPr lang="pt-BR" sz="2400" b="1">
+                <a:solidFill>
+                  <a:srgbClr val="162B3A"/>
+                </a:solidFill>
+                <a:latin typeface="Aptos" panose="020B0004020202020204" pitchFamily="34" charset="0"/>
+              </a:rPr>
+              <a:t>Mensagem central: preço é resultado da combinação entre tamanho, qualidade, estrutura e idade do imóvel.</a:t>
             </a:r>
           </a:p>
         </p:txBody>
@@ -6791,7 +6369,7 @@
     </p:spTree>
     <p:extLst>
       <p:ext uri="{BB962C8B-B14F-4D97-AF65-F5344CB8AC3E}">
-        <p14:creationId xmlns:p14="http://schemas.microsoft.com/office/powerpoint/2010/main" val="621016107"/>
+        <p14:creationId xmlns:p14="http://schemas.microsoft.com/office/powerpoint/2010/main" val="1732430115"/>
       </p:ext>
     </p:extLst>
   </p:cSld>
@@ -6831,7 +6409,7 @@
           <p:cNvPr id="2" name="Retângulo 1">
             <a:extLst>
               <a:ext uri="{FF2B5EF4-FFF2-40B4-BE49-F238E27FC236}">
-                <a16:creationId xmlns:a16="http://schemas.microsoft.com/office/drawing/2014/main" id="{CDCA2407-2E4F-BBEF-CFAD-F9B37817F0A8}"/>
+                <a16:creationId xmlns:a16="http://schemas.microsoft.com/office/drawing/2014/main" id="{B1E21C59-2B8D-5FDD-E4D0-D12A32AAA2DB}"/>
               </a:ext>
             </a:extLst>
           </p:cNvPr>
@@ -6899,7 +6477,7 @@
           <p:cNvPr id="3" name="CaixaDeTexto 2">
             <a:extLst>
               <a:ext uri="{FF2B5EF4-FFF2-40B4-BE49-F238E27FC236}">
-                <a16:creationId xmlns:a16="http://schemas.microsoft.com/office/drawing/2014/main" id="{BED5D3DC-9B8B-B7D0-4A77-2D65B68E46FD}"/>
+                <a16:creationId xmlns:a16="http://schemas.microsoft.com/office/drawing/2014/main" id="{61062F94-EB54-AC2F-0FA6-2AAC64060E78}"/>
               </a:ext>
             </a:extLst>
           </p:cNvPr>
@@ -6909,7 +6487,7 @@
         <p:spPr>
           <a:xfrm>
             <a:off x="355600" y="127000"/>
-            <a:ext cx="8890000" cy="420628"/>
+            <a:ext cx="8636000" cy="420628"/>
           </a:xfrm>
           <a:prstGeom prst="rect">
             <a:avLst/>
@@ -6929,7 +6507,7 @@
                 </a:solidFill>
                 <a:latin typeface="Aptos" panose="020B0004020202020204" pitchFamily="34" charset="0"/>
               </a:rPr>
-              <a:t>Perguntas</a:t>
+              <a:t>Conclusões Principais</a:t>
             </a:r>
           </a:p>
         </p:txBody>
@@ -6939,7 +6517,7 @@
           <p:cNvPr id="4" name="CaixaDeTexto 3">
             <a:extLst>
               <a:ext uri="{FF2B5EF4-FFF2-40B4-BE49-F238E27FC236}">
-                <a16:creationId xmlns:a16="http://schemas.microsoft.com/office/drawing/2014/main" id="{7052D207-FD63-BF43-CBF6-A5A8F1319081}"/>
+                <a16:creationId xmlns:a16="http://schemas.microsoft.com/office/drawing/2014/main" id="{DA3EED4D-B26B-AAA2-4759-9D52CEAB912F}"/>
               </a:ext>
             </a:extLst>
           </p:cNvPr>
@@ -6948,8 +6526,8 @@
         </p:nvSpPr>
         <p:spPr>
           <a:xfrm>
-            <a:off x="8890000" y="190500"/>
-            <a:ext cx="2946400" cy="235962"/>
+            <a:off x="8763000" y="190500"/>
+            <a:ext cx="3073400" cy="235962"/>
           </a:xfrm>
           <a:prstGeom prst="rect">
             <a:avLst/>
@@ -6964,23 +6542,77 @@
           <a:p>
             <a:pPr algn="r"/>
             <a:r>
-              <a:rPr lang="pt-BR" sz="1200" dirty="0">
+              <a:rPr lang="pt-BR" sz="1200">
                 <a:solidFill>
                   <a:srgbClr val="FFFFFF"/>
                 </a:solidFill>
                 <a:latin typeface="Aptos" panose="020B0004020202020204" pitchFamily="34" charset="0"/>
               </a:rPr>
-              <a:t>Fim</a:t>
-            </a:r>
-          </a:p>
-        </p:txBody>
-      </p:sp>
-      <p:sp>
-        <p:nvSpPr>
-          <p:cNvPr id="5" name="CaixaDeTexto 4">
-            <a:extLst>
-              <a:ext uri="{FF2B5EF4-FFF2-40B4-BE49-F238E27FC236}">
-                <a16:creationId xmlns:a16="http://schemas.microsoft.com/office/drawing/2014/main" id="{EF54E42B-905A-4590-C6E4-37832EC9EE8F}"/>
+              <a:t>fechamento</a:t>
+            </a:r>
+          </a:p>
+        </p:txBody>
+      </p:sp>
+      <p:sp>
+        <p:nvSpPr>
+          <p:cNvPr id="5" name="Retângulo 4">
+            <a:extLst>
+              <a:ext uri="{FF2B5EF4-FFF2-40B4-BE49-F238E27FC236}">
+                <a16:creationId xmlns:a16="http://schemas.microsoft.com/office/drawing/2014/main" id="{6AEF8214-2F7C-FAF9-A62F-ADC588DB25CA}"/>
+              </a:ext>
+            </a:extLst>
+          </p:cNvPr>
+          <p:cNvSpPr/>
+          <p:nvPr/>
+        </p:nvSpPr>
+        <p:spPr>
+          <a:xfrm>
+            <a:off x="825500" y="1206500"/>
+            <a:ext cx="2413000" cy="1117600"/>
+          </a:xfrm>
+          <a:prstGeom prst="rect">
+            <a:avLst/>
+          </a:prstGeom>
+          <a:solidFill>
+            <a:srgbClr val="F6F8FA"/>
+          </a:solidFill>
+          <a:ln>
+            <a:solidFill>
+              <a:srgbClr val="DCE0E4"/>
+            </a:solidFill>
+          </a:ln>
+        </p:spPr>
+        <p:style>
+          <a:lnRef idx="2">
+            <a:schemeClr val="accent1">
+              <a:shade val="15000"/>
+            </a:schemeClr>
+          </a:lnRef>
+          <a:fillRef idx="1">
+            <a:schemeClr val="accent1"/>
+          </a:fillRef>
+          <a:effectRef idx="0">
+            <a:schemeClr val="accent1"/>
+          </a:effectRef>
+          <a:fontRef idx="minor">
+            <a:schemeClr val="lt1"/>
+          </a:fontRef>
+        </p:style>
+        <p:txBody>
+          <a:bodyPr rtlCol="0" anchor="ctr"/>
+          <a:lstStyle/>
+          <a:p>
+            <a:pPr algn="ctr"/>
+            <a:endParaRPr lang="pt-BR"/>
+          </a:p>
+        </p:txBody>
+      </p:sp>
+      <p:sp>
+        <p:nvSpPr>
+          <p:cNvPr id="6" name="CaixaDeTexto 5">
+            <a:extLst>
+              <a:ext uri="{FF2B5EF4-FFF2-40B4-BE49-F238E27FC236}">
+                <a16:creationId xmlns:a16="http://schemas.microsoft.com/office/drawing/2014/main" id="{F846CB7F-AFE9-EA55-57D2-D3C6BF48E9A1}"/>
               </a:ext>
             </a:extLst>
           </p:cNvPr>
@@ -6989,8 +6621,8 @@
         </p:nvSpPr>
         <p:spPr>
           <a:xfrm>
-            <a:off x="703017" y="3064797"/>
-            <a:ext cx="10160000" cy="728405"/>
+            <a:off x="952500" y="1320800"/>
+            <a:ext cx="2159000" cy="436017"/>
           </a:xfrm>
           <a:prstGeom prst="rect">
             <a:avLst/>
@@ -7005,7 +6637,803 @@
           <a:p>
             <a:pPr algn="ctr"/>
             <a:r>
-              <a:rPr lang="pt-BR" sz="4400" b="1" dirty="0">
+              <a:rPr lang="pt-BR" sz="2500" b="1">
+                <a:solidFill>
+                  <a:srgbClr val="268984"/>
+                </a:solidFill>
+                <a:latin typeface="Aptos" panose="020B0004020202020204" pitchFamily="34" charset="0"/>
+              </a:rPr>
+              <a:t>1458 x 298</a:t>
+            </a:r>
+          </a:p>
+        </p:txBody>
+      </p:sp>
+      <p:sp>
+        <p:nvSpPr>
+          <p:cNvPr id="7" name="CaixaDeTexto 6">
+            <a:extLst>
+              <a:ext uri="{FF2B5EF4-FFF2-40B4-BE49-F238E27FC236}">
+                <a16:creationId xmlns:a16="http://schemas.microsoft.com/office/drawing/2014/main" id="{677BB13B-285B-7AE7-3B13-A2EDD3394139}"/>
+              </a:ext>
+            </a:extLst>
+          </p:cNvPr>
+          <p:cNvSpPr txBox="1"/>
+          <p:nvPr/>
+        </p:nvSpPr>
+        <p:spPr>
+          <a:xfrm>
+            <a:off x="952500" y="1828800"/>
+            <a:ext cx="2159000" cy="235962"/>
+          </a:xfrm>
+          <a:prstGeom prst="rect">
+            <a:avLst/>
+          </a:prstGeom>
+          <a:noFill/>
+        </p:spPr>
+        <p:txBody>
+          <a:bodyPr vert="horz" lIns="50800" tIns="25400" rIns="50800" bIns="25400" rtlCol="0">
+            <a:spAutoFit/>
+          </a:bodyPr>
+          <a:lstStyle/>
+          <a:p>
+            <a:pPr algn="ctr"/>
+            <a:r>
+              <a:rPr lang="pt-BR" sz="1200">
+                <a:solidFill>
+                  <a:srgbClr val="585F69"/>
+                </a:solidFill>
+                <a:latin typeface="Aptos" panose="020B0004020202020204" pitchFamily="34" charset="0"/>
+              </a:rPr>
+              <a:t>base final</a:t>
+            </a:r>
+          </a:p>
+        </p:txBody>
+      </p:sp>
+      <p:sp>
+        <p:nvSpPr>
+          <p:cNvPr id="8" name="Retângulo 7">
+            <a:extLst>
+              <a:ext uri="{FF2B5EF4-FFF2-40B4-BE49-F238E27FC236}">
+                <a16:creationId xmlns:a16="http://schemas.microsoft.com/office/drawing/2014/main" id="{6D78A3E9-0FD7-107A-1B7E-7CC35DB9F705}"/>
+              </a:ext>
+            </a:extLst>
+          </p:cNvPr>
+          <p:cNvSpPr/>
+          <p:nvPr/>
+        </p:nvSpPr>
+        <p:spPr>
+          <a:xfrm>
+            <a:off x="3619500" y="1206500"/>
+            <a:ext cx="2159000" cy="1117600"/>
+          </a:xfrm>
+          <a:prstGeom prst="rect">
+            <a:avLst/>
+          </a:prstGeom>
+          <a:solidFill>
+            <a:srgbClr val="F6F8FA"/>
+          </a:solidFill>
+          <a:ln>
+            <a:solidFill>
+              <a:srgbClr val="DCE0E4"/>
+            </a:solidFill>
+          </a:ln>
+        </p:spPr>
+        <p:style>
+          <a:lnRef idx="2">
+            <a:schemeClr val="accent1">
+              <a:shade val="15000"/>
+            </a:schemeClr>
+          </a:lnRef>
+          <a:fillRef idx="1">
+            <a:schemeClr val="accent1"/>
+          </a:fillRef>
+          <a:effectRef idx="0">
+            <a:schemeClr val="accent1"/>
+          </a:effectRef>
+          <a:fontRef idx="minor">
+            <a:schemeClr val="lt1"/>
+          </a:fontRef>
+        </p:style>
+        <p:txBody>
+          <a:bodyPr rtlCol="0" anchor="ctr"/>
+          <a:lstStyle/>
+          <a:p>
+            <a:pPr algn="ctr"/>
+            <a:endParaRPr lang="pt-BR"/>
+          </a:p>
+        </p:txBody>
+      </p:sp>
+      <p:sp>
+        <p:nvSpPr>
+          <p:cNvPr id="9" name="CaixaDeTexto 8">
+            <a:extLst>
+              <a:ext uri="{FF2B5EF4-FFF2-40B4-BE49-F238E27FC236}">
+                <a16:creationId xmlns:a16="http://schemas.microsoft.com/office/drawing/2014/main" id="{C2E20507-2D97-8625-B948-F30DB694D7FB}"/>
+              </a:ext>
+            </a:extLst>
+          </p:cNvPr>
+          <p:cNvSpPr txBox="1"/>
+          <p:nvPr/>
+        </p:nvSpPr>
+        <p:spPr>
+          <a:xfrm>
+            <a:off x="3746500" y="1320800"/>
+            <a:ext cx="1905000" cy="436017"/>
+          </a:xfrm>
+          <a:prstGeom prst="rect">
+            <a:avLst/>
+          </a:prstGeom>
+          <a:noFill/>
+        </p:spPr>
+        <p:txBody>
+          <a:bodyPr vert="horz" lIns="50800" tIns="25400" rIns="50800" bIns="25400" rtlCol="0">
+            <a:spAutoFit/>
+          </a:bodyPr>
+          <a:lstStyle/>
+          <a:p>
+            <a:pPr algn="ctr"/>
+            <a:r>
+              <a:rPr lang="pt-BR" sz="2500" b="1">
+                <a:solidFill>
+                  <a:srgbClr val="589C66"/>
+                </a:solidFill>
+                <a:latin typeface="Aptos" panose="020B0004020202020204" pitchFamily="34" charset="0"/>
+              </a:rPr>
+              <a:t>0,817</a:t>
+            </a:r>
+          </a:p>
+        </p:txBody>
+      </p:sp>
+      <p:sp>
+        <p:nvSpPr>
+          <p:cNvPr id="10" name="CaixaDeTexto 9">
+            <a:extLst>
+              <a:ext uri="{FF2B5EF4-FFF2-40B4-BE49-F238E27FC236}">
+                <a16:creationId xmlns:a16="http://schemas.microsoft.com/office/drawing/2014/main" id="{5AFB2F76-967A-C391-BBED-59B433029B76}"/>
+              </a:ext>
+            </a:extLst>
+          </p:cNvPr>
+          <p:cNvSpPr txBox="1"/>
+          <p:nvPr/>
+        </p:nvSpPr>
+        <p:spPr>
+          <a:xfrm>
+            <a:off x="3746500" y="1828800"/>
+            <a:ext cx="1905000" cy="235962"/>
+          </a:xfrm>
+          <a:prstGeom prst="rect">
+            <a:avLst/>
+          </a:prstGeom>
+          <a:noFill/>
+        </p:spPr>
+        <p:txBody>
+          <a:bodyPr vert="horz" lIns="50800" tIns="25400" rIns="50800" bIns="25400" rtlCol="0">
+            <a:spAutoFit/>
+          </a:bodyPr>
+          <a:lstStyle/>
+          <a:p>
+            <a:pPr algn="ctr"/>
+            <a:r>
+              <a:rPr lang="pt-BR" sz="1200">
+                <a:solidFill>
+                  <a:srgbClr val="585F69"/>
+                </a:solidFill>
+                <a:latin typeface="Aptos" panose="020B0004020202020204" pitchFamily="34" charset="0"/>
+              </a:rPr>
+              <a:t>R² regressão</a:t>
+            </a:r>
+          </a:p>
+        </p:txBody>
+      </p:sp>
+      <p:sp>
+        <p:nvSpPr>
+          <p:cNvPr id="11" name="Retângulo 10">
+            <a:extLst>
+              <a:ext uri="{FF2B5EF4-FFF2-40B4-BE49-F238E27FC236}">
+                <a16:creationId xmlns:a16="http://schemas.microsoft.com/office/drawing/2014/main" id="{8035FE86-4205-F7AF-84B4-339E93D8655E}"/>
+              </a:ext>
+            </a:extLst>
+          </p:cNvPr>
+          <p:cNvSpPr/>
+          <p:nvPr/>
+        </p:nvSpPr>
+        <p:spPr>
+          <a:xfrm>
+            <a:off x="6159500" y="1206500"/>
+            <a:ext cx="2413000" cy="1117600"/>
+          </a:xfrm>
+          <a:prstGeom prst="rect">
+            <a:avLst/>
+          </a:prstGeom>
+          <a:solidFill>
+            <a:srgbClr val="F6F8FA"/>
+          </a:solidFill>
+          <a:ln>
+            <a:solidFill>
+              <a:srgbClr val="DCE0E4"/>
+            </a:solidFill>
+          </a:ln>
+        </p:spPr>
+        <p:style>
+          <a:lnRef idx="2">
+            <a:schemeClr val="accent1">
+              <a:shade val="15000"/>
+            </a:schemeClr>
+          </a:lnRef>
+          <a:fillRef idx="1">
+            <a:schemeClr val="accent1"/>
+          </a:fillRef>
+          <a:effectRef idx="0">
+            <a:schemeClr val="accent1"/>
+          </a:effectRef>
+          <a:fontRef idx="minor">
+            <a:schemeClr val="lt1"/>
+          </a:fontRef>
+        </p:style>
+        <p:txBody>
+          <a:bodyPr rtlCol="0" anchor="ctr"/>
+          <a:lstStyle/>
+          <a:p>
+            <a:pPr algn="ctr"/>
+            <a:endParaRPr lang="pt-BR"/>
+          </a:p>
+        </p:txBody>
+      </p:sp>
+      <p:sp>
+        <p:nvSpPr>
+          <p:cNvPr id="12" name="CaixaDeTexto 11">
+            <a:extLst>
+              <a:ext uri="{FF2B5EF4-FFF2-40B4-BE49-F238E27FC236}">
+                <a16:creationId xmlns:a16="http://schemas.microsoft.com/office/drawing/2014/main" id="{09B8A78F-037B-5E34-A945-73A5B84C29C8}"/>
+              </a:ext>
+            </a:extLst>
+          </p:cNvPr>
+          <p:cNvSpPr txBox="1"/>
+          <p:nvPr/>
+        </p:nvSpPr>
+        <p:spPr>
+          <a:xfrm>
+            <a:off x="6286500" y="1320800"/>
+            <a:ext cx="2159000" cy="436017"/>
+          </a:xfrm>
+          <a:prstGeom prst="rect">
+            <a:avLst/>
+          </a:prstGeom>
+          <a:noFill/>
+        </p:spPr>
+        <p:txBody>
+          <a:bodyPr vert="horz" lIns="50800" tIns="25400" rIns="50800" bIns="25400" rtlCol="0">
+            <a:spAutoFit/>
+          </a:bodyPr>
+          <a:lstStyle/>
+          <a:p>
+            <a:pPr algn="ctr"/>
+            <a:r>
+              <a:rPr lang="pt-BR" sz="2500" b="1">
+                <a:solidFill>
+                  <a:srgbClr val="E87E42"/>
+                </a:solidFill>
+                <a:latin typeface="Aptos" panose="020B0004020202020204" pitchFamily="34" charset="0"/>
+              </a:rPr>
+              <a:t>92,1%</a:t>
+            </a:r>
+          </a:p>
+        </p:txBody>
+      </p:sp>
+      <p:sp>
+        <p:nvSpPr>
+          <p:cNvPr id="13" name="CaixaDeTexto 12">
+            <a:extLst>
+              <a:ext uri="{FF2B5EF4-FFF2-40B4-BE49-F238E27FC236}">
+                <a16:creationId xmlns:a16="http://schemas.microsoft.com/office/drawing/2014/main" id="{0D131BDF-090A-064E-997F-09D635C45F85}"/>
+              </a:ext>
+            </a:extLst>
+          </p:cNvPr>
+          <p:cNvSpPr txBox="1"/>
+          <p:nvPr/>
+        </p:nvSpPr>
+        <p:spPr>
+          <a:xfrm>
+            <a:off x="6286500" y="1828800"/>
+            <a:ext cx="2159000" cy="235962"/>
+          </a:xfrm>
+          <a:prstGeom prst="rect">
+            <a:avLst/>
+          </a:prstGeom>
+          <a:noFill/>
+        </p:spPr>
+        <p:txBody>
+          <a:bodyPr vert="horz" lIns="50800" tIns="25400" rIns="50800" bIns="25400" rtlCol="0">
+            <a:spAutoFit/>
+          </a:bodyPr>
+          <a:lstStyle/>
+          <a:p>
+            <a:pPr algn="ctr"/>
+            <a:r>
+              <a:rPr lang="pt-BR" sz="1200">
+                <a:solidFill>
+                  <a:srgbClr val="585F69"/>
+                </a:solidFill>
+                <a:latin typeface="Aptos" panose="020B0004020202020204" pitchFamily="34" charset="0"/>
+              </a:rPr>
+              <a:t>accuracy classificação</a:t>
+            </a:r>
+          </a:p>
+        </p:txBody>
+      </p:sp>
+      <p:sp>
+        <p:nvSpPr>
+          <p:cNvPr id="14" name="Retângulo 13">
+            <a:extLst>
+              <a:ext uri="{FF2B5EF4-FFF2-40B4-BE49-F238E27FC236}">
+                <a16:creationId xmlns:a16="http://schemas.microsoft.com/office/drawing/2014/main" id="{6AA23136-DA42-8DE8-0496-1240AA72C649}"/>
+              </a:ext>
+            </a:extLst>
+          </p:cNvPr>
+          <p:cNvSpPr/>
+          <p:nvPr/>
+        </p:nvSpPr>
+        <p:spPr>
+          <a:xfrm>
+            <a:off x="8953500" y="1206500"/>
+            <a:ext cx="1905000" cy="1117600"/>
+          </a:xfrm>
+          <a:prstGeom prst="rect">
+            <a:avLst/>
+          </a:prstGeom>
+          <a:solidFill>
+            <a:srgbClr val="F6F8FA"/>
+          </a:solidFill>
+          <a:ln>
+            <a:solidFill>
+              <a:srgbClr val="DCE0E4"/>
+            </a:solidFill>
+          </a:ln>
+        </p:spPr>
+        <p:style>
+          <a:lnRef idx="2">
+            <a:schemeClr val="accent1">
+              <a:shade val="15000"/>
+            </a:schemeClr>
+          </a:lnRef>
+          <a:fillRef idx="1">
+            <a:schemeClr val="accent1"/>
+          </a:fillRef>
+          <a:effectRef idx="0">
+            <a:schemeClr val="accent1"/>
+          </a:effectRef>
+          <a:fontRef idx="minor">
+            <a:schemeClr val="lt1"/>
+          </a:fontRef>
+        </p:style>
+        <p:txBody>
+          <a:bodyPr rtlCol="0" anchor="ctr"/>
+          <a:lstStyle/>
+          <a:p>
+            <a:pPr algn="ctr"/>
+            <a:endParaRPr lang="pt-BR"/>
+          </a:p>
+        </p:txBody>
+      </p:sp>
+      <p:sp>
+        <p:nvSpPr>
+          <p:cNvPr id="15" name="CaixaDeTexto 14">
+            <a:extLst>
+              <a:ext uri="{FF2B5EF4-FFF2-40B4-BE49-F238E27FC236}">
+                <a16:creationId xmlns:a16="http://schemas.microsoft.com/office/drawing/2014/main" id="{47C57086-39CA-8B66-BFC4-72FC1E57C6D7}"/>
+              </a:ext>
+            </a:extLst>
+          </p:cNvPr>
+          <p:cNvSpPr txBox="1"/>
+          <p:nvPr/>
+        </p:nvSpPr>
+        <p:spPr>
+          <a:xfrm>
+            <a:off x="9080500" y="1320800"/>
+            <a:ext cx="1651000" cy="436017"/>
+          </a:xfrm>
+          <a:prstGeom prst="rect">
+            <a:avLst/>
+          </a:prstGeom>
+          <a:noFill/>
+        </p:spPr>
+        <p:txBody>
+          <a:bodyPr vert="horz" lIns="50800" tIns="25400" rIns="50800" bIns="25400" rtlCol="0">
+            <a:spAutoFit/>
+          </a:bodyPr>
+          <a:lstStyle/>
+          <a:p>
+            <a:pPr algn="ctr"/>
+            <a:r>
+              <a:rPr lang="pt-BR" sz="2500" b="1">
+                <a:solidFill>
+                  <a:srgbClr val="268984"/>
+                </a:solidFill>
+                <a:latin typeface="Aptos" panose="020B0004020202020204" pitchFamily="34" charset="0"/>
+              </a:rPr>
+              <a:t>73</a:t>
+            </a:r>
+          </a:p>
+        </p:txBody>
+      </p:sp>
+      <p:sp>
+        <p:nvSpPr>
+          <p:cNvPr id="16" name="CaixaDeTexto 15">
+            <a:extLst>
+              <a:ext uri="{FF2B5EF4-FFF2-40B4-BE49-F238E27FC236}">
+                <a16:creationId xmlns:a16="http://schemas.microsoft.com/office/drawing/2014/main" id="{383B4C74-12F3-E837-4946-E3BE783BD4CB}"/>
+              </a:ext>
+            </a:extLst>
+          </p:cNvPr>
+          <p:cNvSpPr txBox="1"/>
+          <p:nvPr/>
+        </p:nvSpPr>
+        <p:spPr>
+          <a:xfrm>
+            <a:off x="9080500" y="1828800"/>
+            <a:ext cx="1651000" cy="235962"/>
+          </a:xfrm>
+          <a:prstGeom prst="rect">
+            <a:avLst/>
+          </a:prstGeom>
+          <a:noFill/>
+        </p:spPr>
+        <p:txBody>
+          <a:bodyPr vert="horz" lIns="50800" tIns="25400" rIns="50800" bIns="25400" rtlCol="0">
+            <a:spAutoFit/>
+          </a:bodyPr>
+          <a:lstStyle/>
+          <a:p>
+            <a:pPr algn="ctr"/>
+            <a:r>
+              <a:rPr lang="pt-BR" sz="1200">
+                <a:solidFill>
+                  <a:srgbClr val="585F69"/>
+                </a:solidFill>
+                <a:latin typeface="Aptos" panose="020B0004020202020204" pitchFamily="34" charset="0"/>
+              </a:rPr>
+              <a:t>outliers LOF</a:t>
+            </a:r>
+          </a:p>
+        </p:txBody>
+      </p:sp>
+      <p:sp>
+        <p:nvSpPr>
+          <p:cNvPr id="17" name="CaixaDeTexto 16">
+            <a:extLst>
+              <a:ext uri="{FF2B5EF4-FFF2-40B4-BE49-F238E27FC236}">
+                <a16:creationId xmlns:a16="http://schemas.microsoft.com/office/drawing/2014/main" id="{0E3FFDBB-A342-5F20-2AAB-415AF76589F5}"/>
+              </a:ext>
+            </a:extLst>
+          </p:cNvPr>
+          <p:cNvSpPr txBox="1"/>
+          <p:nvPr/>
+        </p:nvSpPr>
+        <p:spPr>
+          <a:xfrm>
+            <a:off x="1333500" y="3175000"/>
+            <a:ext cx="9525000" cy="1949252"/>
+          </a:xfrm>
+          <a:prstGeom prst="rect">
+            <a:avLst/>
+          </a:prstGeom>
+          <a:noFill/>
+        </p:spPr>
+        <p:txBody>
+          <a:bodyPr vert="horz" lIns="50800" tIns="25400" rIns="50800" bIns="25400" rtlCol="0">
+            <a:spAutoFit/>
+          </a:bodyPr>
+          <a:lstStyle/>
+          <a:p>
+            <a:pPr marL="457200" indent="-457200">
+              <a:spcAft>
+                <a:spcPts val="700"/>
+              </a:spcAft>
+              <a:buFont typeface="+mj-lt"/>
+              <a:buChar char="•"/>
+            </a:pPr>
+            <a:r>
+              <a:rPr lang="pt-BR" sz="2000">
+                <a:solidFill>
+                  <a:srgbClr val="1E2227"/>
+                </a:solidFill>
+                <a:latin typeface="Aptos" panose="020B0004020202020204" pitchFamily="34" charset="0"/>
+              </a:rPr>
+              <a:t>Todos os critérios técnicos foram contemplados</a:t>
+            </a:r>
+          </a:p>
+          <a:p>
+            <a:pPr marL="457200" indent="-457200">
+              <a:spcAft>
+                <a:spcPts val="700"/>
+              </a:spcAft>
+              <a:buFont typeface="+mj-lt"/>
+              <a:buChar char="•"/>
+            </a:pPr>
+            <a:r>
+              <a:rPr lang="pt-BR" sz="2000">
+                <a:solidFill>
+                  <a:srgbClr val="1E2227"/>
+                </a:solidFill>
+                <a:latin typeface="Aptos" panose="020B0004020202020204" pitchFamily="34" charset="0"/>
+              </a:rPr>
+              <a:t>Notebook 06 agora inclui gráficos consolidados dos modelos</a:t>
+            </a:r>
+          </a:p>
+          <a:p>
+            <a:pPr marL="457200" indent="-457200">
+              <a:spcAft>
+                <a:spcPts val="700"/>
+              </a:spcAft>
+              <a:buFont typeface="+mj-lt"/>
+              <a:buChar char="•"/>
+            </a:pPr>
+            <a:r>
+              <a:rPr lang="pt-BR" sz="2000">
+                <a:solidFill>
+                  <a:srgbClr val="1E2227"/>
+                </a:solidFill>
+                <a:latin typeface="Aptos" panose="020B0004020202020204" pitchFamily="34" charset="0"/>
+              </a:rPr>
+              <a:t>Storytelling foi atualizado sem placeholders</a:t>
+            </a:r>
+          </a:p>
+          <a:p>
+            <a:pPr marL="457200" indent="-457200">
+              <a:spcAft>
+                <a:spcPts val="700"/>
+              </a:spcAft>
+              <a:buFont typeface="+mj-lt"/>
+              <a:buChar char="•"/>
+            </a:pPr>
+            <a:r>
+              <a:rPr lang="pt-BR" sz="2000">
+                <a:solidFill>
+                  <a:srgbClr val="1E2227"/>
+                </a:solidFill>
+                <a:latin typeface="Aptos" panose="020B0004020202020204" pitchFamily="34" charset="0"/>
+              </a:rPr>
+              <a:t>Feature engineering aparece nos modelos e na interpretação</a:t>
+            </a:r>
+          </a:p>
+          <a:p>
+            <a:pPr marL="457200" indent="-457200">
+              <a:spcAft>
+                <a:spcPts val="700"/>
+              </a:spcAft>
+              <a:buFont typeface="+mj-lt"/>
+              <a:buChar char="•"/>
+            </a:pPr>
+            <a:r>
+              <a:rPr lang="pt-BR" sz="2000">
+                <a:solidFill>
+                  <a:srgbClr val="1E2227"/>
+                </a:solidFill>
+                <a:latin typeface="Aptos" panose="020B0004020202020204" pitchFamily="34" charset="0"/>
+              </a:rPr>
+              <a:t>O preço é explicado por tamanho, qualidade, estrutura, idade e conservação</a:t>
+            </a:r>
+          </a:p>
+        </p:txBody>
+      </p:sp>
+    </p:spTree>
+    <p:extLst>
+      <p:ext uri="{BB962C8B-B14F-4D97-AF65-F5344CB8AC3E}">
+        <p14:creationId xmlns:p14="http://schemas.microsoft.com/office/powerpoint/2010/main" val="1271464753"/>
+      </p:ext>
+    </p:extLst>
+  </p:cSld>
+  <p:clrMapOvr>
+    <a:masterClrMapping/>
+  </p:clrMapOvr>
+</p:sld>
+</file>
+
+<file path=ppt/slides/slide13.xml><?xml version="1.0" encoding="utf-8"?>
+<p:sld xmlns:a="http://schemas.openxmlformats.org/drawingml/2006/main" xmlns:r="http://schemas.openxmlformats.org/officeDocument/2006/relationships" xmlns:p="http://schemas.openxmlformats.org/presentationml/2006/main">
+  <p:cSld>
+    <p:bg>
+      <p:bgPr>
+        <a:solidFill>
+          <a:srgbClr val="FFFFFF"/>
+        </a:solidFill>
+        <a:effectLst/>
+      </p:bgPr>
+    </p:bg>
+    <p:spTree>
+      <p:nvGrpSpPr>
+        <p:cNvPr id="1" name=""/>
+        <p:cNvGrpSpPr/>
+        <p:nvPr/>
+      </p:nvGrpSpPr>
+      <p:grpSpPr>
+        <a:xfrm>
+          <a:off x="0" y="0"/>
+          <a:ext cx="0" cy="0"/>
+          <a:chOff x="0" y="0"/>
+          <a:chExt cx="0" cy="0"/>
+        </a:xfrm>
+      </p:grpSpPr>
+      <p:sp>
+        <p:nvSpPr>
+          <p:cNvPr id="2" name="Retângulo 1">
+            <a:extLst>
+              <a:ext uri="{FF2B5EF4-FFF2-40B4-BE49-F238E27FC236}">
+                <a16:creationId xmlns:a16="http://schemas.microsoft.com/office/drawing/2014/main" id="{1369DB67-E63D-5047-FDBA-561FDA1F5F25}"/>
+              </a:ext>
+            </a:extLst>
+          </p:cNvPr>
+          <p:cNvSpPr/>
+          <p:nvPr/>
+        </p:nvSpPr>
+        <p:spPr>
+          <a:xfrm>
+            <a:off x="0" y="0"/>
+            <a:ext cx="12192000" cy="736600"/>
+          </a:xfrm>
+          <a:prstGeom prst="rect">
+            <a:avLst/>
+          </a:prstGeom>
+          <a:solidFill>
+            <a:srgbClr val="162B3A"/>
+          </a:solidFill>
+          <a:ln w="19050" cap="flat" cmpd="sng" algn="ctr">
+            <a:noFill/>
+            <a:prstDash val="solid"/>
+            <a:miter lim="800000"/>
+          </a:ln>
+          <a:effectLst/>
+          <a:extLst>
+            <a:ext uri="{91240B29-F687-4F45-9708-019B960494DF}">
+              <a14:hiddenLine xmlns:a14="http://schemas.microsoft.com/office/drawing/2010/main" w="19050" cap="flat" cmpd="sng" algn="ctr">
+                <a:solidFill>
+                  <a:schemeClr val="accent1">
+                    <a:shade val="15000"/>
+                  </a:schemeClr>
+                </a:solidFill>
+                <a:prstDash val="solid"/>
+                <a:miter lim="800000"/>
+              </a14:hiddenLine>
+            </a:ext>
+          </a:extLst>
+        </p:spPr>
+        <p:style>
+          <a:lnRef idx="2">
+            <a:schemeClr val="accent1">
+              <a:shade val="15000"/>
+            </a:schemeClr>
+          </a:lnRef>
+          <a:fillRef idx="1">
+            <a:schemeClr val="accent1"/>
+          </a:fillRef>
+          <a:effectRef idx="0">
+            <a:schemeClr val="accent1"/>
+          </a:effectRef>
+          <a:fontRef idx="minor">
+            <a:schemeClr val="lt1"/>
+          </a:fontRef>
+        </p:style>
+        <p:txBody>
+          <a:bodyPr rtlCol="0" anchor="ctr"/>
+          <a:lstStyle/>
+          <a:p>
+            <a:pPr algn="ctr"/>
+            <a:endParaRPr lang="pt-BR"/>
+          </a:p>
+        </p:txBody>
+      </p:sp>
+      <p:sp>
+        <p:nvSpPr>
+          <p:cNvPr id="3" name="CaixaDeTexto 2">
+            <a:extLst>
+              <a:ext uri="{FF2B5EF4-FFF2-40B4-BE49-F238E27FC236}">
+                <a16:creationId xmlns:a16="http://schemas.microsoft.com/office/drawing/2014/main" id="{BA15CA40-A736-94AB-A3CF-9D7F822135AA}"/>
+              </a:ext>
+            </a:extLst>
+          </p:cNvPr>
+          <p:cNvSpPr txBox="1"/>
+          <p:nvPr/>
+        </p:nvSpPr>
+        <p:spPr>
+          <a:xfrm>
+            <a:off x="355600" y="127000"/>
+            <a:ext cx="8636000" cy="420628"/>
+          </a:xfrm>
+          <a:prstGeom prst="rect">
+            <a:avLst/>
+          </a:prstGeom>
+          <a:noFill/>
+        </p:spPr>
+        <p:txBody>
+          <a:bodyPr vert="horz" lIns="50800" tIns="25400" rIns="50800" bIns="25400" rtlCol="0">
+            <a:spAutoFit/>
+          </a:bodyPr>
+          <a:lstStyle/>
+          <a:p>
+            <a:r>
+              <a:rPr lang="pt-BR" sz="2400" b="1">
+                <a:solidFill>
+                  <a:srgbClr val="FFFFFF"/>
+                </a:solidFill>
+                <a:latin typeface="Aptos" panose="020B0004020202020204" pitchFamily="34" charset="0"/>
+              </a:rPr>
+              <a:t>Perguntas</a:t>
+            </a:r>
+          </a:p>
+        </p:txBody>
+      </p:sp>
+      <p:sp>
+        <p:nvSpPr>
+          <p:cNvPr id="4" name="CaixaDeTexto 3">
+            <a:extLst>
+              <a:ext uri="{FF2B5EF4-FFF2-40B4-BE49-F238E27FC236}">
+                <a16:creationId xmlns:a16="http://schemas.microsoft.com/office/drawing/2014/main" id="{1594C998-712B-0F17-A442-6AB2C6E43282}"/>
+              </a:ext>
+            </a:extLst>
+          </p:cNvPr>
+          <p:cNvSpPr txBox="1"/>
+          <p:nvPr/>
+        </p:nvSpPr>
+        <p:spPr>
+          <a:xfrm>
+            <a:off x="8763000" y="190500"/>
+            <a:ext cx="3073400" cy="235962"/>
+          </a:xfrm>
+          <a:prstGeom prst="rect">
+            <a:avLst/>
+          </a:prstGeom>
+          <a:noFill/>
+        </p:spPr>
+        <p:txBody>
+          <a:bodyPr vert="horz" lIns="50800" tIns="25400" rIns="50800" bIns="25400" rtlCol="0">
+            <a:spAutoFit/>
+          </a:bodyPr>
+          <a:lstStyle/>
+          <a:p>
+            <a:pPr algn="r"/>
+            <a:r>
+              <a:rPr lang="pt-BR" sz="1200">
+                <a:solidFill>
+                  <a:srgbClr val="FFFFFF"/>
+                </a:solidFill>
+                <a:latin typeface="Aptos" panose="020B0004020202020204" pitchFamily="34" charset="0"/>
+              </a:rPr>
+              <a:t>obrigado</a:t>
+            </a:r>
+          </a:p>
+        </p:txBody>
+      </p:sp>
+      <p:sp>
+        <p:nvSpPr>
+          <p:cNvPr id="5" name="CaixaDeTexto 4">
+            <a:extLst>
+              <a:ext uri="{FF2B5EF4-FFF2-40B4-BE49-F238E27FC236}">
+                <a16:creationId xmlns:a16="http://schemas.microsoft.com/office/drawing/2014/main" id="{5C696AA7-4994-0A0F-D027-E4A185426927}"/>
+              </a:ext>
+            </a:extLst>
+          </p:cNvPr>
+          <p:cNvSpPr txBox="1"/>
+          <p:nvPr/>
+        </p:nvSpPr>
+        <p:spPr>
+          <a:xfrm>
+            <a:off x="1016000" y="1841500"/>
+            <a:ext cx="10160000" cy="728405"/>
+          </a:xfrm>
+          <a:prstGeom prst="rect">
+            <a:avLst/>
+          </a:prstGeom>
+          <a:noFill/>
+        </p:spPr>
+        <p:txBody>
+          <a:bodyPr vert="horz" lIns="50800" tIns="25400" rIns="50800" bIns="25400" rtlCol="0">
+            <a:spAutoFit/>
+          </a:bodyPr>
+          <a:lstStyle/>
+          <a:p>
+            <a:pPr algn="ctr"/>
+            <a:r>
+              <a:rPr lang="pt-BR" sz="4400" b="1">
                 <a:solidFill>
                   <a:srgbClr val="162B3A"/>
                 </a:solidFill>
@@ -7016,10 +7444,146 @@
           </a:p>
         </p:txBody>
       </p:sp>
+      <p:sp>
+        <p:nvSpPr>
+          <p:cNvPr id="6" name="CaixaDeTexto 5">
+            <a:extLst>
+              <a:ext uri="{FF2B5EF4-FFF2-40B4-BE49-F238E27FC236}">
+                <a16:creationId xmlns:a16="http://schemas.microsoft.com/office/drawing/2014/main" id="{1B249FE1-7FED-FEBC-6038-574EC5ED85D2}"/>
+              </a:ext>
+            </a:extLst>
+          </p:cNvPr>
+          <p:cNvSpPr txBox="1"/>
+          <p:nvPr/>
+        </p:nvSpPr>
+        <p:spPr>
+          <a:xfrm>
+            <a:off x="1651000" y="3048000"/>
+            <a:ext cx="8890000" cy="482183"/>
+          </a:xfrm>
+          <a:prstGeom prst="rect">
+            <a:avLst/>
+          </a:prstGeom>
+          <a:noFill/>
+        </p:spPr>
+        <p:txBody>
+          <a:bodyPr vert="horz" lIns="50800" tIns="25400" rIns="50800" bIns="25400" rtlCol="0">
+            <a:spAutoFit/>
+          </a:bodyPr>
+          <a:lstStyle/>
+          <a:p>
+            <a:pPr algn="ctr"/>
+            <a:r>
+              <a:rPr lang="pt-BR" sz="2800">
+                <a:solidFill>
+                  <a:srgbClr val="585F69"/>
+                </a:solidFill>
+                <a:latin typeface="Aptos" panose="020B0004020202020204" pitchFamily="34" charset="0"/>
+              </a:rPr>
+              <a:t>Estamos à disposição para perguntas.</a:t>
+            </a:r>
+          </a:p>
+        </p:txBody>
+      </p:sp>
+      <p:sp>
+        <p:nvSpPr>
+          <p:cNvPr id="7" name="Retângulo 6">
+            <a:extLst>
+              <a:ext uri="{FF2B5EF4-FFF2-40B4-BE49-F238E27FC236}">
+                <a16:creationId xmlns:a16="http://schemas.microsoft.com/office/drawing/2014/main" id="{663A1A4B-89A2-14BC-731F-5E38F6442C40}"/>
+              </a:ext>
+            </a:extLst>
+          </p:cNvPr>
+          <p:cNvSpPr/>
+          <p:nvPr/>
+        </p:nvSpPr>
+        <p:spPr>
+          <a:xfrm>
+            <a:off x="2794000" y="4381500"/>
+            <a:ext cx="6604000" cy="736600"/>
+          </a:xfrm>
+          <a:prstGeom prst="rect">
+            <a:avLst/>
+          </a:prstGeom>
+          <a:solidFill>
+            <a:srgbClr val="F6F8FA"/>
+          </a:solidFill>
+          <a:ln>
+            <a:solidFill>
+              <a:srgbClr val="DCE0E4"/>
+            </a:solidFill>
+          </a:ln>
+        </p:spPr>
+        <p:style>
+          <a:lnRef idx="2">
+            <a:schemeClr val="accent1">
+              <a:shade val="15000"/>
+            </a:schemeClr>
+          </a:lnRef>
+          <a:fillRef idx="1">
+            <a:schemeClr val="accent1"/>
+          </a:fillRef>
+          <a:effectRef idx="0">
+            <a:schemeClr val="accent1"/>
+          </a:effectRef>
+          <a:fontRef idx="minor">
+            <a:schemeClr val="lt1"/>
+          </a:fontRef>
+        </p:style>
+        <p:txBody>
+          <a:bodyPr rtlCol="0" anchor="ctr"/>
+          <a:lstStyle/>
+          <a:p>
+            <a:pPr algn="ctr"/>
+            <a:endParaRPr lang="pt-BR"/>
+          </a:p>
+        </p:txBody>
+      </p:sp>
+      <p:sp>
+        <p:nvSpPr>
+          <p:cNvPr id="8" name="CaixaDeTexto 7">
+            <a:extLst>
+              <a:ext uri="{FF2B5EF4-FFF2-40B4-BE49-F238E27FC236}">
+                <a16:creationId xmlns:a16="http://schemas.microsoft.com/office/drawing/2014/main" id="{CDF51E2E-7B61-D88D-10E3-EDDA3A16A633}"/>
+              </a:ext>
+            </a:extLst>
+          </p:cNvPr>
+          <p:cNvSpPr txBox="1"/>
+          <p:nvPr/>
+        </p:nvSpPr>
+        <p:spPr>
+          <a:xfrm>
+            <a:off x="3111500" y="4521200"/>
+            <a:ext cx="5969000" cy="482183"/>
+          </a:xfrm>
+          <a:prstGeom prst="rect">
+            <a:avLst/>
+          </a:prstGeom>
+          <a:noFill/>
+        </p:spPr>
+        <p:txBody>
+          <a:bodyPr vert="horz" lIns="50800" tIns="25400" rIns="50800" bIns="25400" rtlCol="0">
+            <a:spAutoFit/>
+          </a:bodyPr>
+          <a:lstStyle/>
+          <a:p>
+            <a:pPr algn="ctr"/>
+            <a:r>
+              <a:rPr lang="pt-BR" sz="1400">
+                <a:solidFill>
+                  <a:srgbClr val="1E2227"/>
+                </a:solidFill>
+                <a:latin typeface="Aptos" panose="020B0004020202020204" pitchFamily="34" charset="0"/>
+              </a:rPr>
+              <a:t>Resposta rápida: Silhouette baixo é esperado em dados imobiliários com sobreposição, mas os clusters ainda têm perfis médios interpretáveis.</a:t>
+            </a:r>
+          </a:p>
+        </p:txBody>
+      </p:sp>
     </p:spTree>
     <p:extLst>
       <p:ext uri="{BB962C8B-B14F-4D97-AF65-F5344CB8AC3E}">
-        <p14:creationId xmlns:p14="http://schemas.microsoft.com/office/powerpoint/2010/main" val="1175710044"/>
+        <p14:creationId xmlns:p14="http://schemas.microsoft.com/office/powerpoint/2010/main" val="4165885476"/>
       </p:ext>
     </p:extLst>
   </p:cSld>
@@ -7059,7 +7623,7 @@
           <p:cNvPr id="2" name="Retângulo 1">
             <a:extLst>
               <a:ext uri="{FF2B5EF4-FFF2-40B4-BE49-F238E27FC236}">
-                <a16:creationId xmlns:a16="http://schemas.microsoft.com/office/drawing/2014/main" id="{092D966A-7CE9-9A05-6E19-891B76A949A9}"/>
+                <a16:creationId xmlns:a16="http://schemas.microsoft.com/office/drawing/2014/main" id="{74FF5FFE-BA67-1227-5324-9A592F35E262}"/>
               </a:ext>
             </a:extLst>
           </p:cNvPr>
@@ -7127,7 +7691,7 @@
           <p:cNvPr id="3" name="CaixaDeTexto 2">
             <a:extLst>
               <a:ext uri="{FF2B5EF4-FFF2-40B4-BE49-F238E27FC236}">
-                <a16:creationId xmlns:a16="http://schemas.microsoft.com/office/drawing/2014/main" id="{426AE2B6-B0A8-4FD6-74F5-D0BE52C304D4}"/>
+                <a16:creationId xmlns:a16="http://schemas.microsoft.com/office/drawing/2014/main" id="{0CDD47F0-7332-CC8C-F200-9705569AACC5}"/>
               </a:ext>
             </a:extLst>
           </p:cNvPr>
@@ -7137,7 +7701,7 @@
         <p:spPr>
           <a:xfrm>
             <a:off x="355600" y="127000"/>
-            <a:ext cx="8890000" cy="420628"/>
+            <a:ext cx="8636000" cy="420628"/>
           </a:xfrm>
           <a:prstGeom prst="rect">
             <a:avLst/>
@@ -7167,7 +7731,7 @@
           <p:cNvPr id="4" name="CaixaDeTexto 3">
             <a:extLst>
               <a:ext uri="{FF2B5EF4-FFF2-40B4-BE49-F238E27FC236}">
-                <a16:creationId xmlns:a16="http://schemas.microsoft.com/office/drawing/2014/main" id="{0469E3E3-35C8-252A-013E-BB2A0B943C90}"/>
+                <a16:creationId xmlns:a16="http://schemas.microsoft.com/office/drawing/2014/main" id="{B27C53FF-AEC2-C046-2165-959DF90B50E0}"/>
               </a:ext>
             </a:extLst>
           </p:cNvPr>
@@ -7176,8 +7740,8 @@
         </p:nvSpPr>
         <p:spPr>
           <a:xfrm>
-            <a:off x="8890000" y="190500"/>
-            <a:ext cx="2946400" cy="235962"/>
+            <a:off x="8763000" y="190500"/>
+            <a:ext cx="3073400" cy="235962"/>
           </a:xfrm>
           <a:prstGeom prst="rect">
             <a:avLst/>
@@ -7192,13 +7756,13 @@
           <a:p>
             <a:pPr algn="r"/>
             <a:r>
-              <a:rPr lang="pt-BR" sz="1200" dirty="0">
+              <a:rPr lang="pt-BR" sz="1200">
                 <a:solidFill>
                   <a:srgbClr val="FFFFFF"/>
                 </a:solidFill>
                 <a:latin typeface="Aptos" panose="020B0004020202020204" pitchFamily="34" charset="0"/>
               </a:rPr>
-              <a:t>Quem fez o quê</a:t>
+              <a:t>responsabilidades</a:t>
             </a:r>
           </a:p>
         </p:txBody>
@@ -7208,7 +7772,7 @@
           <p:cNvPr id="5" name="Retângulo 4">
             <a:extLst>
               <a:ext uri="{FF2B5EF4-FFF2-40B4-BE49-F238E27FC236}">
-                <a16:creationId xmlns:a16="http://schemas.microsoft.com/office/drawing/2014/main" id="{4EE9AABD-DED8-E06D-905D-60BB9207AE65}"/>
+                <a16:creationId xmlns:a16="http://schemas.microsoft.com/office/drawing/2014/main" id="{D892BC7C-AB37-68D2-8BCA-35D81E940759}"/>
               </a:ext>
             </a:extLst>
           </p:cNvPr>
@@ -7228,7 +7792,7 @@
           </a:solidFill>
           <a:ln>
             <a:solidFill>
-              <a:srgbClr val="DEE2E6"/>
+              <a:srgbClr val="DCE0E4"/>
             </a:solidFill>
           </a:ln>
         </p:spPr>
@@ -7262,7 +7826,7 @@
           <p:cNvPr id="6" name="CaixaDeTexto 5">
             <a:extLst>
               <a:ext uri="{FF2B5EF4-FFF2-40B4-BE49-F238E27FC236}">
-                <a16:creationId xmlns:a16="http://schemas.microsoft.com/office/drawing/2014/main" id="{95504576-13A7-2E6D-A184-9F5B784099B7}"/>
+                <a16:creationId xmlns:a16="http://schemas.microsoft.com/office/drawing/2014/main" id="{F53B93FB-901F-A2C5-C6AF-BB44750C1A20}"/>
               </a:ext>
             </a:extLst>
           </p:cNvPr>
@@ -7303,7 +7867,7 @@
           <p:cNvPr id="7" name="CaixaDeTexto 6">
             <a:extLst>
               <a:ext uri="{FF2B5EF4-FFF2-40B4-BE49-F238E27FC236}">
-                <a16:creationId xmlns:a16="http://schemas.microsoft.com/office/drawing/2014/main" id="{031E3DF4-3F1D-ACB6-9AB1-76DEA8C7CEB6}"/>
+                <a16:creationId xmlns:a16="http://schemas.microsoft.com/office/drawing/2014/main" id="{411AFED7-51B2-2B41-5B2E-ED1605A9D4B1}"/>
               </a:ext>
             </a:extLst>
           </p:cNvPr>
@@ -7343,7 +7907,7 @@
           <p:cNvPr id="8" name="Retângulo 7">
             <a:extLst>
               <a:ext uri="{FF2B5EF4-FFF2-40B4-BE49-F238E27FC236}">
-                <a16:creationId xmlns:a16="http://schemas.microsoft.com/office/drawing/2014/main" id="{ADED9A92-5CB7-1DDF-F37E-7E7C3F803CF2}"/>
+                <a16:creationId xmlns:a16="http://schemas.microsoft.com/office/drawing/2014/main" id="{57E03430-43AB-7595-4CC5-523B12A45E15}"/>
               </a:ext>
             </a:extLst>
           </p:cNvPr>
@@ -7363,7 +7927,7 @@
           </a:solidFill>
           <a:ln>
             <a:solidFill>
-              <a:srgbClr val="DEE2E6"/>
+              <a:srgbClr val="DCE0E4"/>
             </a:solidFill>
           </a:ln>
         </p:spPr>
@@ -7397,7 +7961,7 @@
           <p:cNvPr id="9" name="CaixaDeTexto 8">
             <a:extLst>
               <a:ext uri="{FF2B5EF4-FFF2-40B4-BE49-F238E27FC236}">
-                <a16:creationId xmlns:a16="http://schemas.microsoft.com/office/drawing/2014/main" id="{5E8C0C9E-D1B5-77E2-DF23-0BDCED07EED7}"/>
+                <a16:creationId xmlns:a16="http://schemas.microsoft.com/office/drawing/2014/main" id="{33661205-383D-9162-B447-1631FBEE876A}"/>
               </a:ext>
             </a:extLst>
           </p:cNvPr>
@@ -7438,7 +8002,7 @@
           <p:cNvPr id="10" name="CaixaDeTexto 9">
             <a:extLst>
               <a:ext uri="{FF2B5EF4-FFF2-40B4-BE49-F238E27FC236}">
-                <a16:creationId xmlns:a16="http://schemas.microsoft.com/office/drawing/2014/main" id="{8044887E-E2D5-03ED-28A0-A4397A16353B}"/>
+                <a16:creationId xmlns:a16="http://schemas.microsoft.com/office/drawing/2014/main" id="{08ABEAA0-F79C-C69C-0672-10B388786688}"/>
               </a:ext>
             </a:extLst>
           </p:cNvPr>
@@ -7478,7 +8042,7 @@
           <p:cNvPr id="11" name="Retângulo 10">
             <a:extLst>
               <a:ext uri="{FF2B5EF4-FFF2-40B4-BE49-F238E27FC236}">
-                <a16:creationId xmlns:a16="http://schemas.microsoft.com/office/drawing/2014/main" id="{E028DBEA-7A1B-8F13-7813-907426DF46DD}"/>
+                <a16:creationId xmlns:a16="http://schemas.microsoft.com/office/drawing/2014/main" id="{254678ED-0346-D7BA-2614-8FB510D20D4A}"/>
               </a:ext>
             </a:extLst>
           </p:cNvPr>
@@ -7498,7 +8062,7 @@
           </a:solidFill>
           <a:ln>
             <a:solidFill>
-              <a:srgbClr val="DEE2E6"/>
+              <a:srgbClr val="DCE0E4"/>
             </a:solidFill>
           </a:ln>
         </p:spPr>
@@ -7532,7 +8096,7 @@
           <p:cNvPr id="12" name="CaixaDeTexto 11">
             <a:extLst>
               <a:ext uri="{FF2B5EF4-FFF2-40B4-BE49-F238E27FC236}">
-                <a16:creationId xmlns:a16="http://schemas.microsoft.com/office/drawing/2014/main" id="{8F401391-5741-BFA6-C914-FF520786A16E}"/>
+                <a16:creationId xmlns:a16="http://schemas.microsoft.com/office/drawing/2014/main" id="{BC51AC7A-BA51-AF09-38FB-CB0E0896FCA4}"/>
               </a:ext>
             </a:extLst>
           </p:cNvPr>
@@ -7573,7 +8137,7 @@
           <p:cNvPr id="13" name="CaixaDeTexto 12">
             <a:extLst>
               <a:ext uri="{FF2B5EF4-FFF2-40B4-BE49-F238E27FC236}">
-                <a16:creationId xmlns:a16="http://schemas.microsoft.com/office/drawing/2014/main" id="{09FC3994-B828-4172-E833-7561A12BEA39}"/>
+                <a16:creationId xmlns:a16="http://schemas.microsoft.com/office/drawing/2014/main" id="{86C133E5-C59F-2826-EC65-57FCB702B159}"/>
               </a:ext>
             </a:extLst>
           </p:cNvPr>
@@ -7613,7 +8177,7 @@
           <p:cNvPr id="14" name="Retângulo 13">
             <a:extLst>
               <a:ext uri="{FF2B5EF4-FFF2-40B4-BE49-F238E27FC236}">
-                <a16:creationId xmlns:a16="http://schemas.microsoft.com/office/drawing/2014/main" id="{1550B072-B48E-DEF6-2C7A-F1096E3D2E57}"/>
+                <a16:creationId xmlns:a16="http://schemas.microsoft.com/office/drawing/2014/main" id="{DF91D7A6-4516-4A42-EF7C-E2709D1935EF}"/>
               </a:ext>
             </a:extLst>
           </p:cNvPr>
@@ -7633,7 +8197,7 @@
           </a:solidFill>
           <a:ln>
             <a:solidFill>
-              <a:srgbClr val="DEE2E6"/>
+              <a:srgbClr val="DCE0E4"/>
             </a:solidFill>
           </a:ln>
         </p:spPr>
@@ -7667,7 +8231,7 @@
           <p:cNvPr id="15" name="CaixaDeTexto 14">
             <a:extLst>
               <a:ext uri="{FF2B5EF4-FFF2-40B4-BE49-F238E27FC236}">
-                <a16:creationId xmlns:a16="http://schemas.microsoft.com/office/drawing/2014/main" id="{273B222D-CBE7-BFB5-47EA-9350970AFD80}"/>
+                <a16:creationId xmlns:a16="http://schemas.microsoft.com/office/drawing/2014/main" id="{667A75DB-F50B-B61D-12CF-B84272F05469}"/>
               </a:ext>
             </a:extLst>
           </p:cNvPr>
@@ -7708,7 +8272,7 @@
           <p:cNvPr id="16" name="CaixaDeTexto 15">
             <a:extLst>
               <a:ext uri="{FF2B5EF4-FFF2-40B4-BE49-F238E27FC236}">
-                <a16:creationId xmlns:a16="http://schemas.microsoft.com/office/drawing/2014/main" id="{0D77B56B-34A6-E661-6E2B-4591604B3D32}"/>
+                <a16:creationId xmlns:a16="http://schemas.microsoft.com/office/drawing/2014/main" id="{F3BE06CC-EB85-A553-3455-124DA2CC2605}"/>
               </a:ext>
             </a:extLst>
           </p:cNvPr>
@@ -7748,7 +8312,7 @@
           <p:cNvPr id="17" name="Retângulo 16">
             <a:extLst>
               <a:ext uri="{FF2B5EF4-FFF2-40B4-BE49-F238E27FC236}">
-                <a16:creationId xmlns:a16="http://schemas.microsoft.com/office/drawing/2014/main" id="{F0042B77-9AD4-B9F4-FB20-FAA711F5A066}"/>
+                <a16:creationId xmlns:a16="http://schemas.microsoft.com/office/drawing/2014/main" id="{CD5CE30F-E7B7-EF55-C610-ADFADE16269B}"/>
               </a:ext>
             </a:extLst>
           </p:cNvPr>
@@ -7768,7 +8332,7 @@
           </a:solidFill>
           <a:ln>
             <a:solidFill>
-              <a:srgbClr val="DEE2E6"/>
+              <a:srgbClr val="DCE0E4"/>
             </a:solidFill>
           </a:ln>
         </p:spPr>
@@ -7802,7 +8366,7 @@
           <p:cNvPr id="18" name="CaixaDeTexto 17">
             <a:extLst>
               <a:ext uri="{FF2B5EF4-FFF2-40B4-BE49-F238E27FC236}">
-                <a16:creationId xmlns:a16="http://schemas.microsoft.com/office/drawing/2014/main" id="{8C9483E8-233F-8457-98CA-0C9AC7BCE8D3}"/>
+                <a16:creationId xmlns:a16="http://schemas.microsoft.com/office/drawing/2014/main" id="{C5B7361E-B93F-1E9C-4E69-2BCA279E8C53}"/>
               </a:ext>
             </a:extLst>
           </p:cNvPr>
@@ -7843,7 +8407,7 @@
           <p:cNvPr id="19" name="CaixaDeTexto 18">
             <a:extLst>
               <a:ext uri="{FF2B5EF4-FFF2-40B4-BE49-F238E27FC236}">
-                <a16:creationId xmlns:a16="http://schemas.microsoft.com/office/drawing/2014/main" id="{3A87DE5A-6DE8-2CB5-1ADD-BE95A28FB019}"/>
+                <a16:creationId xmlns:a16="http://schemas.microsoft.com/office/drawing/2014/main" id="{F930AE66-7A07-BED9-4857-BDE40D679F06}"/>
               </a:ext>
             </a:extLst>
           </p:cNvPr>
@@ -7883,7 +8447,7 @@
           <p:cNvPr id="20" name="Retângulo 19">
             <a:extLst>
               <a:ext uri="{FF2B5EF4-FFF2-40B4-BE49-F238E27FC236}">
-                <a16:creationId xmlns:a16="http://schemas.microsoft.com/office/drawing/2014/main" id="{7A9C417A-E384-BDB1-3301-52628B09DB80}"/>
+                <a16:creationId xmlns:a16="http://schemas.microsoft.com/office/drawing/2014/main" id="{792CBA3A-8426-E6A8-5683-573922139C8B}"/>
               </a:ext>
             </a:extLst>
           </p:cNvPr>
@@ -7903,7 +8467,7 @@
           </a:solidFill>
           <a:ln>
             <a:solidFill>
-              <a:srgbClr val="DEE2E6"/>
+              <a:srgbClr val="DCE0E4"/>
             </a:solidFill>
           </a:ln>
         </p:spPr>
@@ -7937,7 +8501,7 @@
           <p:cNvPr id="21" name="CaixaDeTexto 20">
             <a:extLst>
               <a:ext uri="{FF2B5EF4-FFF2-40B4-BE49-F238E27FC236}">
-                <a16:creationId xmlns:a16="http://schemas.microsoft.com/office/drawing/2014/main" id="{42C58983-DE9F-8FF5-FFD0-252E7877A924}"/>
+                <a16:creationId xmlns:a16="http://schemas.microsoft.com/office/drawing/2014/main" id="{7F7DB433-4DFD-3317-EDA9-FD61F7B9353D}"/>
               </a:ext>
             </a:extLst>
           </p:cNvPr>
@@ -7978,7 +8542,7 @@
           <p:cNvPr id="22" name="CaixaDeTexto 21">
             <a:extLst>
               <a:ext uri="{FF2B5EF4-FFF2-40B4-BE49-F238E27FC236}">
-                <a16:creationId xmlns:a16="http://schemas.microsoft.com/office/drawing/2014/main" id="{97B60633-3264-D662-274F-5EB3136A9038}"/>
+                <a16:creationId xmlns:a16="http://schemas.microsoft.com/office/drawing/2014/main" id="{E645A50F-5D43-C11F-AB61-C64092194F93}"/>
               </a:ext>
             </a:extLst>
           </p:cNvPr>
@@ -8016,7 +8580,7 @@
     </p:spTree>
     <p:extLst>
       <p:ext uri="{BB962C8B-B14F-4D97-AF65-F5344CB8AC3E}">
-        <p14:creationId xmlns:p14="http://schemas.microsoft.com/office/powerpoint/2010/main" val="2875239029"/>
+        <p14:creationId xmlns:p14="http://schemas.microsoft.com/office/powerpoint/2010/main" val="3709684624"/>
       </p:ext>
     </p:extLst>
   </p:cSld>
@@ -8056,7 +8620,7 @@
           <p:cNvPr id="2" name="Retângulo 1">
             <a:extLst>
               <a:ext uri="{FF2B5EF4-FFF2-40B4-BE49-F238E27FC236}">
-                <a16:creationId xmlns:a16="http://schemas.microsoft.com/office/drawing/2014/main" id="{DBB70C6C-6C08-5A03-EDBF-A602A78F518A}"/>
+                <a16:creationId xmlns:a16="http://schemas.microsoft.com/office/drawing/2014/main" id="{6E43B046-2F93-E047-7278-519AB167B128}"/>
               </a:ext>
             </a:extLst>
           </p:cNvPr>
@@ -8124,7 +8688,7 @@
           <p:cNvPr id="3" name="CaixaDeTexto 2">
             <a:extLst>
               <a:ext uri="{FF2B5EF4-FFF2-40B4-BE49-F238E27FC236}">
-                <a16:creationId xmlns:a16="http://schemas.microsoft.com/office/drawing/2014/main" id="{0590E955-F066-D880-8D78-5B5727C817C4}"/>
+                <a16:creationId xmlns:a16="http://schemas.microsoft.com/office/drawing/2014/main" id="{2E52B864-F1EB-CF29-5F18-CFC75F7EB57A}"/>
               </a:ext>
             </a:extLst>
           </p:cNvPr>
@@ -8134,7 +8698,7 @@
         <p:spPr>
           <a:xfrm>
             <a:off x="355600" y="127000"/>
-            <a:ext cx="8890000" cy="420628"/>
+            <a:ext cx="8636000" cy="420628"/>
           </a:xfrm>
           <a:prstGeom prst="rect">
             <a:avLst/>
@@ -8164,7 +8728,7 @@
           <p:cNvPr id="4" name="CaixaDeTexto 3">
             <a:extLst>
               <a:ext uri="{FF2B5EF4-FFF2-40B4-BE49-F238E27FC236}">
-                <a16:creationId xmlns:a16="http://schemas.microsoft.com/office/drawing/2014/main" id="{C064712E-FFE4-7ECB-5D40-B7793B2BF5AA}"/>
+                <a16:creationId xmlns:a16="http://schemas.microsoft.com/office/drawing/2014/main" id="{E9DCA1C4-2C2C-7E3C-09D0-9C665A3A5954}"/>
               </a:ext>
             </a:extLst>
           </p:cNvPr>
@@ -8173,8 +8737,8 @@
         </p:nvSpPr>
         <p:spPr>
           <a:xfrm>
-            <a:off x="8890000" y="190500"/>
-            <a:ext cx="2946400" cy="235962"/>
+            <a:off x="8763000" y="190500"/>
+            <a:ext cx="3073400" cy="235962"/>
           </a:xfrm>
           <a:prstGeom prst="rect">
             <a:avLst/>
@@ -8189,13 +8753,13 @@
           <a:p>
             <a:pPr algn="r"/>
             <a:r>
-              <a:rPr lang="pt-BR" sz="1200" dirty="0">
+              <a:rPr lang="pt-BR" sz="1200">
                 <a:solidFill>
                   <a:srgbClr val="FFFFFF"/>
                 </a:solidFill>
                 <a:latin typeface="Aptos" panose="020B0004020202020204" pitchFamily="34" charset="0"/>
               </a:rPr>
-              <a:t>Da base bruta aos insights</a:t>
+              <a:t>do dado bruto à conclusão</a:t>
             </a:r>
           </a:p>
         </p:txBody>
@@ -8205,7 +8769,7 @@
           <p:cNvPr id="5" name="Retângulo 4">
             <a:extLst>
               <a:ext uri="{FF2B5EF4-FFF2-40B4-BE49-F238E27FC236}">
-                <a16:creationId xmlns:a16="http://schemas.microsoft.com/office/drawing/2014/main" id="{C1224AF9-0C3E-859F-4921-51DCBFD350AF}"/>
+                <a16:creationId xmlns:a16="http://schemas.microsoft.com/office/drawing/2014/main" id="{DFDC7BCE-360A-58E4-D139-D5F9FF95D2E6}"/>
               </a:ext>
             </a:extLst>
           </p:cNvPr>
@@ -8259,7 +8823,7 @@
           <p:cNvPr id="6" name="CaixaDeTexto 5">
             <a:extLst>
               <a:ext uri="{FF2B5EF4-FFF2-40B4-BE49-F238E27FC236}">
-                <a16:creationId xmlns:a16="http://schemas.microsoft.com/office/drawing/2014/main" id="{9DB23D57-4A73-4EA0-1890-9D0E5F38AB06}"/>
+                <a16:creationId xmlns:a16="http://schemas.microsoft.com/office/drawing/2014/main" id="{C4CBEAD7-FC41-1F9B-3D65-3C24166C5489}"/>
               </a:ext>
             </a:extLst>
           </p:cNvPr>
@@ -8300,7 +8864,7 @@
           <p:cNvPr id="7" name="CaixaDeTexto 6">
             <a:extLst>
               <a:ext uri="{FF2B5EF4-FFF2-40B4-BE49-F238E27FC236}">
-                <a16:creationId xmlns:a16="http://schemas.microsoft.com/office/drawing/2014/main" id="{EC80B8F9-BB9D-0A98-93A9-D14A589229D0}"/>
+                <a16:creationId xmlns:a16="http://schemas.microsoft.com/office/drawing/2014/main" id="{95E7B29D-61C3-80B1-BACC-2DFD81F60C23}"/>
               </a:ext>
             </a:extLst>
           </p:cNvPr>
@@ -8310,7 +8874,7 @@
         <p:spPr>
           <a:xfrm>
             <a:off x="850900" y="2794000"/>
-            <a:ext cx="1346200" cy="266740"/>
+            <a:ext cx="1346200" cy="543739"/>
           </a:xfrm>
           <a:prstGeom prst="rect">
             <a:avLst/>
@@ -8325,7 +8889,7 @@
           <a:p>
             <a:pPr algn="ctr"/>
             <a:r>
-              <a:rPr lang="pt-BR" sz="1400" b="1" dirty="0">
+              <a:rPr lang="pt-BR" sz="1600" b="1">
                 <a:solidFill>
                   <a:srgbClr val="162B3A"/>
                 </a:solidFill>
@@ -8341,7 +8905,7 @@
           <p:cNvPr id="8" name="Retângulo 7">
             <a:extLst>
               <a:ext uri="{FF2B5EF4-FFF2-40B4-BE49-F238E27FC236}">
-                <a16:creationId xmlns:a16="http://schemas.microsoft.com/office/drawing/2014/main" id="{BAC32966-0B0C-C0E7-678C-663D99E870EE}"/>
+                <a16:creationId xmlns:a16="http://schemas.microsoft.com/office/drawing/2014/main" id="{B724B5F3-C4B4-A92F-E56D-55FCD284CAD5}"/>
               </a:ext>
             </a:extLst>
           </p:cNvPr>
@@ -8395,7 +8959,7 @@
           <p:cNvPr id="9" name="CaixaDeTexto 8">
             <a:extLst>
               <a:ext uri="{FF2B5EF4-FFF2-40B4-BE49-F238E27FC236}">
-                <a16:creationId xmlns:a16="http://schemas.microsoft.com/office/drawing/2014/main" id="{DF89893F-4803-4D40-3319-98DD03082920}"/>
+                <a16:creationId xmlns:a16="http://schemas.microsoft.com/office/drawing/2014/main" id="{5150942A-C0E1-F722-0CD9-151363F73FFD}"/>
               </a:ext>
             </a:extLst>
           </p:cNvPr>
@@ -8436,7 +9000,7 @@
           <p:cNvPr id="10" name="CaixaDeTexto 9">
             <a:extLst>
               <a:ext uri="{FF2B5EF4-FFF2-40B4-BE49-F238E27FC236}">
-                <a16:creationId xmlns:a16="http://schemas.microsoft.com/office/drawing/2014/main" id="{2E4DC032-864C-B2CA-C7D7-F7F7AB9A5B57}"/>
+                <a16:creationId xmlns:a16="http://schemas.microsoft.com/office/drawing/2014/main" id="{40FD4902-7D1E-CD9E-68F2-FC8C6175EEF6}"/>
               </a:ext>
             </a:extLst>
           </p:cNvPr>
@@ -8446,7 +9010,7 @@
         <p:spPr>
           <a:xfrm>
             <a:off x="2730500" y="2794000"/>
-            <a:ext cx="1346200" cy="482183"/>
+            <a:ext cx="1346200" cy="543739"/>
           </a:xfrm>
           <a:prstGeom prst="rect">
             <a:avLst/>
@@ -8461,29 +9025,14 @@
           <a:p>
             <a:pPr algn="ctr"/>
             <a:r>
-              <a:rPr lang="pt-BR" sz="1400" b="1" dirty="0">
+              <a:rPr lang="pt-BR" sz="1600" b="1">
                 <a:solidFill>
                   <a:srgbClr val="162B3A"/>
                 </a:solidFill>
                 <a:latin typeface="Aptos" panose="020B0004020202020204" pitchFamily="34" charset="0"/>
               </a:rPr>
-              <a:t>Feature </a:t>
-            </a:r>
-            <a:r>
-              <a:rPr lang="pt-BR" sz="1400" b="1" dirty="0" err="1">
-                <a:solidFill>
-                  <a:srgbClr val="162B3A"/>
-                </a:solidFill>
-                <a:latin typeface="Aptos" panose="020B0004020202020204" pitchFamily="34" charset="0"/>
-              </a:rPr>
-              <a:t>engineering</a:t>
-            </a:r>
-            <a:endParaRPr lang="pt-BR" sz="1400" b="1" dirty="0">
-              <a:solidFill>
-                <a:srgbClr val="162B3A"/>
-              </a:solidFill>
-              <a:latin typeface="Aptos" panose="020B0004020202020204" pitchFamily="34" charset="0"/>
-            </a:endParaRPr>
+              <a:t>Feature engineering</a:t>
+            </a:r>
           </a:p>
         </p:txBody>
       </p:sp>
@@ -8492,7 +9041,7 @@
           <p:cNvPr id="11" name="Retângulo 10">
             <a:extLst>
               <a:ext uri="{FF2B5EF4-FFF2-40B4-BE49-F238E27FC236}">
-                <a16:creationId xmlns:a16="http://schemas.microsoft.com/office/drawing/2014/main" id="{88A893D1-C583-BD29-0973-02641397FB78}"/>
+                <a16:creationId xmlns:a16="http://schemas.microsoft.com/office/drawing/2014/main" id="{9179C70F-490E-4AC8-8CE4-35588BE6A89E}"/>
               </a:ext>
             </a:extLst>
           </p:cNvPr>
@@ -8546,7 +9095,7 @@
           <p:cNvPr id="12" name="CaixaDeTexto 11">
             <a:extLst>
               <a:ext uri="{FF2B5EF4-FFF2-40B4-BE49-F238E27FC236}">
-                <a16:creationId xmlns:a16="http://schemas.microsoft.com/office/drawing/2014/main" id="{2301339E-AB12-2973-1B08-2DBA92192FC0}"/>
+                <a16:creationId xmlns:a16="http://schemas.microsoft.com/office/drawing/2014/main" id="{6528167A-E296-B93B-CD92-0CD6397E3C88}"/>
               </a:ext>
             </a:extLst>
           </p:cNvPr>
@@ -8587,7 +9136,7 @@
           <p:cNvPr id="13" name="CaixaDeTexto 12">
             <a:extLst>
               <a:ext uri="{FF2B5EF4-FFF2-40B4-BE49-F238E27FC236}">
-                <a16:creationId xmlns:a16="http://schemas.microsoft.com/office/drawing/2014/main" id="{A0EB8260-7533-891B-A71C-8BB3345EAF95}"/>
+                <a16:creationId xmlns:a16="http://schemas.microsoft.com/office/drawing/2014/main" id="{8AE5BCC0-00D4-6E27-411A-9B44F771ED19}"/>
               </a:ext>
             </a:extLst>
           </p:cNvPr>
@@ -8597,7 +9146,7 @@
         <p:spPr>
           <a:xfrm>
             <a:off x="4610100" y="2794000"/>
-            <a:ext cx="1346200" cy="266740"/>
+            <a:ext cx="1346200" cy="297517"/>
           </a:xfrm>
           <a:prstGeom prst="rect">
             <a:avLst/>
@@ -8612,7 +9161,7 @@
           <a:p>
             <a:pPr algn="ctr"/>
             <a:r>
-              <a:rPr lang="pt-BR" sz="1400" b="1" dirty="0">
+              <a:rPr lang="pt-BR" sz="1600" b="1">
                 <a:solidFill>
                   <a:srgbClr val="162B3A"/>
                 </a:solidFill>
@@ -8620,12 +9169,6 @@
               </a:rPr>
               <a:t>Regressão</a:t>
             </a:r>
-            <a:endParaRPr lang="pt-BR" sz="1600" b="1" dirty="0">
-              <a:solidFill>
-                <a:srgbClr val="162B3A"/>
-              </a:solidFill>
-              <a:latin typeface="Aptos" panose="020B0004020202020204" pitchFamily="34" charset="0"/>
-            </a:endParaRPr>
           </a:p>
         </p:txBody>
       </p:sp>
@@ -8634,7 +9177,7 @@
           <p:cNvPr id="14" name="Retângulo 13">
             <a:extLst>
               <a:ext uri="{FF2B5EF4-FFF2-40B4-BE49-F238E27FC236}">
-                <a16:creationId xmlns:a16="http://schemas.microsoft.com/office/drawing/2014/main" id="{2475EF28-C9D5-E432-10A6-8370FF85D07B}"/>
+                <a16:creationId xmlns:a16="http://schemas.microsoft.com/office/drawing/2014/main" id="{5E022083-7F7B-6C95-36C0-A708671ABEB0}"/>
               </a:ext>
             </a:extLst>
           </p:cNvPr>
@@ -8688,7 +9231,7 @@
           <p:cNvPr id="15" name="CaixaDeTexto 14">
             <a:extLst>
               <a:ext uri="{FF2B5EF4-FFF2-40B4-BE49-F238E27FC236}">
-                <a16:creationId xmlns:a16="http://schemas.microsoft.com/office/drawing/2014/main" id="{FB902E7E-3650-878C-BF66-F5214337A27A}"/>
+                <a16:creationId xmlns:a16="http://schemas.microsoft.com/office/drawing/2014/main" id="{8041DD05-9028-85A3-CF90-FCC76B3661C8}"/>
               </a:ext>
             </a:extLst>
           </p:cNvPr>
@@ -8729,7 +9272,7 @@
           <p:cNvPr id="16" name="CaixaDeTexto 15">
             <a:extLst>
               <a:ext uri="{FF2B5EF4-FFF2-40B4-BE49-F238E27FC236}">
-                <a16:creationId xmlns:a16="http://schemas.microsoft.com/office/drawing/2014/main" id="{060F4F77-D172-3799-3859-F157257FB849}"/>
+                <a16:creationId xmlns:a16="http://schemas.microsoft.com/office/drawing/2014/main" id="{D3CC91E6-9848-A979-96CE-E7790CF58B68}"/>
               </a:ext>
             </a:extLst>
           </p:cNvPr>
@@ -8739,7 +9282,7 @@
         <p:spPr>
           <a:xfrm>
             <a:off x="6489700" y="2794000"/>
-            <a:ext cx="1346200" cy="266740"/>
+            <a:ext cx="1346200" cy="543739"/>
           </a:xfrm>
           <a:prstGeom prst="rect">
             <a:avLst/>
@@ -8754,7 +9297,7 @@
           <a:p>
             <a:pPr algn="ctr"/>
             <a:r>
-              <a:rPr lang="pt-BR" sz="1400" b="1" dirty="0">
+              <a:rPr lang="pt-BR" sz="1600" b="1">
                 <a:solidFill>
                   <a:srgbClr val="162B3A"/>
                 </a:solidFill>
@@ -8762,12 +9305,6 @@
               </a:rPr>
               <a:t>Classificação</a:t>
             </a:r>
-            <a:endParaRPr lang="pt-BR" sz="1600" b="1" dirty="0">
-              <a:solidFill>
-                <a:srgbClr val="162B3A"/>
-              </a:solidFill>
-              <a:latin typeface="Aptos" panose="020B0004020202020204" pitchFamily="34" charset="0"/>
-            </a:endParaRPr>
           </a:p>
         </p:txBody>
       </p:sp>
@@ -8776,7 +9313,7 @@
           <p:cNvPr id="17" name="Retângulo 16">
             <a:extLst>
               <a:ext uri="{FF2B5EF4-FFF2-40B4-BE49-F238E27FC236}">
-                <a16:creationId xmlns:a16="http://schemas.microsoft.com/office/drawing/2014/main" id="{A6873B9B-2017-2CC3-C4DA-F82BA65AA15D}"/>
+                <a16:creationId xmlns:a16="http://schemas.microsoft.com/office/drawing/2014/main" id="{5972D5BE-CBF2-408B-ACF5-12A6B9119AA9}"/>
               </a:ext>
             </a:extLst>
           </p:cNvPr>
@@ -8830,7 +9367,7 @@
           <p:cNvPr id="18" name="CaixaDeTexto 17">
             <a:extLst>
               <a:ext uri="{FF2B5EF4-FFF2-40B4-BE49-F238E27FC236}">
-                <a16:creationId xmlns:a16="http://schemas.microsoft.com/office/drawing/2014/main" id="{ED14FC90-3AD6-55C4-3C4D-04933C84FE7A}"/>
+                <a16:creationId xmlns:a16="http://schemas.microsoft.com/office/drawing/2014/main" id="{7EFE1B43-A88D-C7BC-86E9-1E3BB0D48D0E}"/>
               </a:ext>
             </a:extLst>
           </p:cNvPr>
@@ -8871,7 +9408,7 @@
           <p:cNvPr id="19" name="CaixaDeTexto 18">
             <a:extLst>
               <a:ext uri="{FF2B5EF4-FFF2-40B4-BE49-F238E27FC236}">
-                <a16:creationId xmlns:a16="http://schemas.microsoft.com/office/drawing/2014/main" id="{A609ECCD-B8F1-23F2-6921-9F478B7F3B24}"/>
+                <a16:creationId xmlns:a16="http://schemas.microsoft.com/office/drawing/2014/main" id="{A2C4AC61-0C08-36FA-554F-9D936BEA46BE}"/>
               </a:ext>
             </a:extLst>
           </p:cNvPr>
@@ -8881,7 +9418,7 @@
         <p:spPr>
           <a:xfrm>
             <a:off x="8369300" y="2794000"/>
-            <a:ext cx="1346200" cy="266740"/>
+            <a:ext cx="1346200" cy="543739"/>
           </a:xfrm>
           <a:prstGeom prst="rect">
             <a:avLst/>
@@ -8896,7 +9433,7 @@
           <a:p>
             <a:pPr algn="ctr"/>
             <a:r>
-              <a:rPr lang="pt-BR" sz="1400" b="1" dirty="0">
+              <a:rPr lang="pt-BR" sz="1600" b="1">
                 <a:solidFill>
                   <a:srgbClr val="162B3A"/>
                 </a:solidFill>
@@ -8912,7 +9449,7 @@
           <p:cNvPr id="20" name="Retângulo 19">
             <a:extLst>
               <a:ext uri="{FF2B5EF4-FFF2-40B4-BE49-F238E27FC236}">
-                <a16:creationId xmlns:a16="http://schemas.microsoft.com/office/drawing/2014/main" id="{0B1E41C3-DDB7-0B0F-D36D-DF8C35BB8BD6}"/>
+                <a16:creationId xmlns:a16="http://schemas.microsoft.com/office/drawing/2014/main" id="{215A56A8-D75B-8D14-61A9-04279E1DA141}"/>
               </a:ext>
             </a:extLst>
           </p:cNvPr>
@@ -8966,7 +9503,7 @@
           <p:cNvPr id="21" name="CaixaDeTexto 20">
             <a:extLst>
               <a:ext uri="{FF2B5EF4-FFF2-40B4-BE49-F238E27FC236}">
-                <a16:creationId xmlns:a16="http://schemas.microsoft.com/office/drawing/2014/main" id="{A42DCAA6-1D86-ECC5-5581-70B755D72211}"/>
+                <a16:creationId xmlns:a16="http://schemas.microsoft.com/office/drawing/2014/main" id="{39739C04-5753-E89C-D088-81CCE5863AD7}"/>
               </a:ext>
             </a:extLst>
           </p:cNvPr>
@@ -9007,7 +9544,7 @@
           <p:cNvPr id="22" name="CaixaDeTexto 21">
             <a:extLst>
               <a:ext uri="{FF2B5EF4-FFF2-40B4-BE49-F238E27FC236}">
-                <a16:creationId xmlns:a16="http://schemas.microsoft.com/office/drawing/2014/main" id="{85CC944E-BE36-F884-AE72-964913AF98B8}"/>
+                <a16:creationId xmlns:a16="http://schemas.microsoft.com/office/drawing/2014/main" id="{CB13426A-F2FD-BA4C-AC57-94BFA40E081B}"/>
               </a:ext>
             </a:extLst>
           </p:cNvPr>
@@ -9017,7 +9554,7 @@
         <p:spPr>
           <a:xfrm>
             <a:off x="10248900" y="2794000"/>
-            <a:ext cx="1346200" cy="697627"/>
+            <a:ext cx="1346200" cy="789960"/>
           </a:xfrm>
           <a:prstGeom prst="rect">
             <a:avLst/>
@@ -9032,29 +9569,14 @@
           <a:p>
             <a:pPr algn="ctr"/>
             <a:r>
-              <a:rPr lang="pt-BR" sz="1400" b="1" dirty="0">
+              <a:rPr lang="pt-BR" sz="1600" b="1">
                 <a:solidFill>
                   <a:srgbClr val="162B3A"/>
                 </a:solidFill>
                 <a:latin typeface="Aptos" panose="020B0004020202020204" pitchFamily="34" charset="0"/>
               </a:rPr>
-              <a:t>Associação, outliers e </a:t>
-            </a:r>
-            <a:r>
-              <a:rPr lang="pt-BR" sz="1400" b="1" dirty="0" err="1">
-                <a:solidFill>
-                  <a:srgbClr val="162B3A"/>
-                </a:solidFill>
-                <a:latin typeface="Aptos" panose="020B0004020202020204" pitchFamily="34" charset="0"/>
-              </a:rPr>
-              <a:t>storytelling</a:t>
-            </a:r>
-            <a:endParaRPr lang="pt-BR" sz="1400" b="1" dirty="0">
-              <a:solidFill>
-                <a:srgbClr val="162B3A"/>
-              </a:solidFill>
-              <a:latin typeface="Aptos" panose="020B0004020202020204" pitchFamily="34" charset="0"/>
-            </a:endParaRPr>
+              <a:t>Associação, outliers e storytelling</a:t>
+            </a:r>
           </a:p>
         </p:txBody>
       </p:sp>
@@ -9063,7 +9585,7 @@
           <p:cNvPr id="23" name="CaixaDeTexto 22">
             <a:extLst>
               <a:ext uri="{FF2B5EF4-FFF2-40B4-BE49-F238E27FC236}">
-                <a16:creationId xmlns:a16="http://schemas.microsoft.com/office/drawing/2014/main" id="{08E190CA-B5ED-412D-8552-B24EF66CE564}"/>
+                <a16:creationId xmlns:a16="http://schemas.microsoft.com/office/drawing/2014/main" id="{15862E5A-F66F-9DF9-94DA-31212F62C4CF}"/>
               </a:ext>
             </a:extLst>
           </p:cNvPr>
@@ -9094,7 +9616,7 @@
                 </a:solidFill>
                 <a:latin typeface="Aptos" panose="020B0004020202020204" pitchFamily="34" charset="0"/>
               </a:rPr>
-              <a:t>Pergunta-guia: quais fatores estruturais e qualitativos mais ajudam a explicar ou prever o preço de venda?</a:t>
+              <a:t>Pergunta-guia: quais fatores estruturais e qualitativos explicam ou predizem o preço de venda?</a:t>
             </a:r>
           </a:p>
         </p:txBody>
@@ -9102,7 +9624,7 @@
     </p:spTree>
     <p:extLst>
       <p:ext uri="{BB962C8B-B14F-4D97-AF65-F5344CB8AC3E}">
-        <p14:creationId xmlns:p14="http://schemas.microsoft.com/office/powerpoint/2010/main" val="4085953028"/>
+        <p14:creationId xmlns:p14="http://schemas.microsoft.com/office/powerpoint/2010/main" val="2313098736"/>
       </p:ext>
     </p:extLst>
   </p:cSld>
@@ -9142,7 +9664,7 @@
           <p:cNvPr id="2" name="Retângulo 1">
             <a:extLst>
               <a:ext uri="{FF2B5EF4-FFF2-40B4-BE49-F238E27FC236}">
-                <a16:creationId xmlns:a16="http://schemas.microsoft.com/office/drawing/2014/main" id="{3579D4F4-4310-1606-8B84-302333049C33}"/>
+                <a16:creationId xmlns:a16="http://schemas.microsoft.com/office/drawing/2014/main" id="{B8B1E5C4-B91A-7AA2-CA78-F6A0C2C571F9}"/>
               </a:ext>
             </a:extLst>
           </p:cNvPr>
@@ -9210,7 +9732,7 @@
           <p:cNvPr id="3" name="CaixaDeTexto 2">
             <a:extLst>
               <a:ext uri="{FF2B5EF4-FFF2-40B4-BE49-F238E27FC236}">
-                <a16:creationId xmlns:a16="http://schemas.microsoft.com/office/drawing/2014/main" id="{C893ADF4-4909-8115-5A9E-C56B937B74D7}"/>
+                <a16:creationId xmlns:a16="http://schemas.microsoft.com/office/drawing/2014/main" id="{9309AF8B-5A0C-0621-B7C1-2F3BBE1CD888}"/>
               </a:ext>
             </a:extLst>
           </p:cNvPr>
@@ -9220,7 +9742,7 @@
         <p:spPr>
           <a:xfrm>
             <a:off x="355600" y="127000"/>
-            <a:ext cx="8890000" cy="420628"/>
+            <a:ext cx="8636000" cy="420628"/>
           </a:xfrm>
           <a:prstGeom prst="rect">
             <a:avLst/>
@@ -9250,7 +9772,7 @@
           <p:cNvPr id="4" name="CaixaDeTexto 3">
             <a:extLst>
               <a:ext uri="{FF2B5EF4-FFF2-40B4-BE49-F238E27FC236}">
-                <a16:creationId xmlns:a16="http://schemas.microsoft.com/office/drawing/2014/main" id="{04E70CD1-AC39-4D42-9AEF-D3973040F935}"/>
+                <a16:creationId xmlns:a16="http://schemas.microsoft.com/office/drawing/2014/main" id="{93421E7C-C491-584F-F0C4-BB348CE68ED4}"/>
               </a:ext>
             </a:extLst>
           </p:cNvPr>
@@ -9259,8 +9781,8 @@
         </p:nvSpPr>
         <p:spPr>
           <a:xfrm>
-            <a:off x="8890000" y="190500"/>
-            <a:ext cx="2946400" cy="235962"/>
+            <a:off x="8763000" y="190500"/>
+            <a:ext cx="3073400" cy="235962"/>
           </a:xfrm>
           <a:prstGeom prst="rect">
             <a:avLst/>
@@ -9291,7 +9813,7 @@
           <p:cNvPr id="5" name="CaixaDeTexto 4">
             <a:extLst>
               <a:ext uri="{FF2B5EF4-FFF2-40B4-BE49-F238E27FC236}">
-                <a16:creationId xmlns:a16="http://schemas.microsoft.com/office/drawing/2014/main" id="{AFD41166-8E38-D935-746C-12B22FA62114}"/>
+                <a16:creationId xmlns:a16="http://schemas.microsoft.com/office/drawing/2014/main" id="{04240BF5-156D-74F8-6E3B-713E4E32D3BE}"/>
               </a:ext>
             </a:extLst>
           </p:cNvPr>
@@ -9301,7 +9823,7 @@
         <p:spPr>
           <a:xfrm>
             <a:off x="736600" y="1206500"/>
-            <a:ext cx="4953000" cy="2800767"/>
+            <a:ext cx="4953000" cy="2457083"/>
           </a:xfrm>
           <a:prstGeom prst="rect">
             <a:avLst/>
@@ -9316,7 +9838,7 @@
           <a:p>
             <a:pPr marL="457200" indent="-457200">
               <a:spcAft>
-                <a:spcPts val="800"/>
+                <a:spcPts val="700"/>
               </a:spcAft>
               <a:buFont typeface="+mj-lt"/>
               <a:buChar char="•"/>
@@ -9334,7 +9856,7 @@
           <a:p>
             <a:pPr marL="457200" indent="-457200">
               <a:spcAft>
-                <a:spcPts val="800"/>
+                <a:spcPts val="700"/>
               </a:spcAft>
               <a:buFont typeface="+mj-lt"/>
               <a:buChar char="•"/>
@@ -9352,7 +9874,7 @@
           <a:p>
             <a:pPr marL="457200" indent="-457200">
               <a:spcAft>
-                <a:spcPts val="800"/>
+                <a:spcPts val="700"/>
               </a:spcAft>
               <a:buFont typeface="+mj-lt"/>
               <a:buChar char="•"/>
@@ -9364,13 +9886,13 @@
                 </a:solidFill>
                 <a:latin typeface="Aptos" panose="020B0004020202020204" pitchFamily="34" charset="0"/>
               </a:rPr>
-              <a:t>Tratamento de nulos com imputação por mediana/moda</a:t>
+              <a:t>Tratamento de nulos por mediana/moda</a:t>
             </a:r>
           </a:p>
           <a:p>
             <a:pPr marL="457200" indent="-457200">
               <a:spcAft>
-                <a:spcPts val="800"/>
+                <a:spcPts val="700"/>
               </a:spcAft>
               <a:buFont typeface="+mj-lt"/>
               <a:buChar char="•"/>
@@ -9382,13 +9904,13 @@
                 </a:solidFill>
                 <a:latin typeface="Aptos" panose="020B0004020202020204" pitchFamily="34" charset="0"/>
               </a:rPr>
-              <a:t>Remoção de outliers clássicos em GrLivArea x SalePrice</a:t>
+              <a:t>Remoção de outliers em GrLivArea x SalePrice</a:t>
             </a:r>
           </a:p>
           <a:p>
             <a:pPr marL="457200" indent="-457200">
               <a:spcAft>
-                <a:spcPts val="800"/>
+                <a:spcPts val="700"/>
               </a:spcAft>
               <a:buFont typeface="+mj-lt"/>
               <a:buChar char="•"/>
@@ -9410,7 +9932,7 @@
           <p:cNvPr id="7" name="Imagem 6">
             <a:extLst>
               <a:ext uri="{FF2B5EF4-FFF2-40B4-BE49-F238E27FC236}">
-                <a16:creationId xmlns:a16="http://schemas.microsoft.com/office/drawing/2014/main" id="{6AB21E46-A801-0F2F-1A48-2C7960987488}"/>
+                <a16:creationId xmlns:a16="http://schemas.microsoft.com/office/drawing/2014/main" id="{3CF02E91-60B2-7EAA-CB16-93D4612FF202}"/>
               </a:ext>
             </a:extLst>
           </p:cNvPr>
@@ -9433,8 +9955,8 @@
         </p:blipFill>
         <p:spPr>
           <a:xfrm>
-            <a:off x="6096000" y="1206500"/>
-            <a:ext cx="5632254" cy="2346773"/>
+            <a:off x="7525642" y="1783664"/>
+            <a:ext cx="2411215" cy="1004673"/>
           </a:xfrm>
           <a:prstGeom prst="rect">
             <a:avLst/>
@@ -9446,7 +9968,7 @@
           <p:cNvPr id="9" name="Imagem 8">
             <a:extLst>
               <a:ext uri="{FF2B5EF4-FFF2-40B4-BE49-F238E27FC236}">
-                <a16:creationId xmlns:a16="http://schemas.microsoft.com/office/drawing/2014/main" id="{0F5DA2E9-4C41-CD5B-691B-08892FBCF055}"/>
+                <a16:creationId xmlns:a16="http://schemas.microsoft.com/office/drawing/2014/main" id="{2A5EA920-1D3B-FFF9-A65B-4397CE6FC039}"/>
               </a:ext>
             </a:extLst>
           </p:cNvPr>
@@ -9469,8 +9991,8 @@
         </p:blipFill>
         <p:spPr>
           <a:xfrm>
-            <a:off x="6317144" y="3799573"/>
-            <a:ext cx="5411110" cy="2705556"/>
+            <a:off x="7881573" y="4464662"/>
+            <a:ext cx="1699354" cy="849677"/>
           </a:xfrm>
           <a:prstGeom prst="rect">
             <a:avLst/>
@@ -9480,7 +10002,7 @@
     </p:spTree>
     <p:extLst>
       <p:ext uri="{BB962C8B-B14F-4D97-AF65-F5344CB8AC3E}">
-        <p14:creationId xmlns:p14="http://schemas.microsoft.com/office/powerpoint/2010/main" val="4010381626"/>
+        <p14:creationId xmlns:p14="http://schemas.microsoft.com/office/powerpoint/2010/main" val="3305240001"/>
       </p:ext>
     </p:extLst>
   </p:cSld>
@@ -9520,7 +10042,7 @@
           <p:cNvPr id="2" name="Retângulo 1">
             <a:extLst>
               <a:ext uri="{FF2B5EF4-FFF2-40B4-BE49-F238E27FC236}">
-                <a16:creationId xmlns:a16="http://schemas.microsoft.com/office/drawing/2014/main" id="{45247220-B857-3EB1-373D-F4FD3AC8AB7E}"/>
+                <a16:creationId xmlns:a16="http://schemas.microsoft.com/office/drawing/2014/main" id="{AD59AD9A-6412-DF7D-6CB2-96FE1A1E1A92}"/>
               </a:ext>
             </a:extLst>
           </p:cNvPr>
@@ -9588,7 +10110,7 @@
           <p:cNvPr id="3" name="CaixaDeTexto 2">
             <a:extLst>
               <a:ext uri="{FF2B5EF4-FFF2-40B4-BE49-F238E27FC236}">
-                <a16:creationId xmlns:a16="http://schemas.microsoft.com/office/drawing/2014/main" id="{290AFE09-370D-BE95-83AE-B0FF6B67809A}"/>
+                <a16:creationId xmlns:a16="http://schemas.microsoft.com/office/drawing/2014/main" id="{33B74336-447E-A6B1-50B0-FA002DA722F1}"/>
               </a:ext>
             </a:extLst>
           </p:cNvPr>
@@ -9598,7 +10120,7 @@
         <p:spPr>
           <a:xfrm>
             <a:off x="355600" y="127000"/>
-            <a:ext cx="8890000" cy="420628"/>
+            <a:ext cx="8636000" cy="420628"/>
           </a:xfrm>
           <a:prstGeom prst="rect">
             <a:avLst/>
@@ -9628,7 +10150,7 @@
           <p:cNvPr id="4" name="CaixaDeTexto 3">
             <a:extLst>
               <a:ext uri="{FF2B5EF4-FFF2-40B4-BE49-F238E27FC236}">
-                <a16:creationId xmlns:a16="http://schemas.microsoft.com/office/drawing/2014/main" id="{777FB8CC-77DC-BC9D-82AA-461BA32C3BC8}"/>
+                <a16:creationId xmlns:a16="http://schemas.microsoft.com/office/drawing/2014/main" id="{430C8B61-5049-5F3C-F789-D85E114F6CC4}"/>
               </a:ext>
             </a:extLst>
           </p:cNvPr>
@@ -9637,8 +10159,8 @@
         </p:nvSpPr>
         <p:spPr>
           <a:xfrm>
-            <a:off x="8890000" y="190500"/>
-            <a:ext cx="2946400" cy="235962"/>
+            <a:off x="8763000" y="190500"/>
+            <a:ext cx="3073400" cy="235962"/>
           </a:xfrm>
           <a:prstGeom prst="rect">
             <a:avLst/>
@@ -9669,7 +10191,7 @@
           <p:cNvPr id="5" name="CaixaDeTexto 4">
             <a:extLst>
               <a:ext uri="{FF2B5EF4-FFF2-40B4-BE49-F238E27FC236}">
-                <a16:creationId xmlns:a16="http://schemas.microsoft.com/office/drawing/2014/main" id="{FC7464FD-77B7-A51C-49EB-D4535253BFAF}"/>
+                <a16:creationId xmlns:a16="http://schemas.microsoft.com/office/drawing/2014/main" id="{59F84C69-1BA9-2FBB-3194-0F529E6A69D1}"/>
               </a:ext>
             </a:extLst>
           </p:cNvPr>
@@ -9679,7 +10201,7 @@
         <p:spPr>
           <a:xfrm>
             <a:off x="787400" y="1270000"/>
-            <a:ext cx="5461000" cy="3385542"/>
+            <a:ext cx="5461000" cy="3334246"/>
           </a:xfrm>
           <a:prstGeom prst="rect">
             <a:avLst/>
@@ -9694,7 +10216,7 @@
           <a:p>
             <a:pPr marL="457200" indent="-457200">
               <a:spcAft>
-                <a:spcPts val="800"/>
+                <a:spcPts val="700"/>
               </a:spcAft>
               <a:buFont typeface="+mj-lt"/>
               <a:buChar char="•"/>
@@ -9712,7 +10234,7 @@
           <a:p>
             <a:pPr marL="457200" indent="-457200">
               <a:spcAft>
-                <a:spcPts val="800"/>
+                <a:spcPts val="700"/>
               </a:spcAft>
               <a:buFont typeface="+mj-lt"/>
               <a:buChar char="•"/>
@@ -9730,7 +10252,7 @@
           <a:p>
             <a:pPr marL="457200" indent="-457200">
               <a:spcAft>
-                <a:spcPts val="800"/>
+                <a:spcPts val="700"/>
               </a:spcAft>
               <a:buFont typeface="+mj-lt"/>
               <a:buChar char="•"/>
@@ -9742,13 +10264,13 @@
                 </a:solidFill>
                 <a:latin typeface="Aptos" panose="020B0004020202020204" pitchFamily="34" charset="0"/>
               </a:rPr>
-              <a:t>HouseAge e YearsSinceRemodel: idade e atualização do imóvel</a:t>
+              <a:t>HouseAge e YearsSinceRemodel: idade e atualização</a:t>
             </a:r>
           </a:p>
           <a:p>
             <a:pPr marL="457200" indent="-457200">
               <a:spcAft>
-                <a:spcPts val="800"/>
+                <a:spcPts val="700"/>
               </a:spcAft>
               <a:buFont typeface="+mj-lt"/>
               <a:buChar char="•"/>
@@ -9766,7 +10288,7 @@
           <a:p>
             <a:pPr marL="457200" indent="-457200">
               <a:spcAft>
-                <a:spcPts val="800"/>
+                <a:spcPts val="700"/>
               </a:spcAft>
               <a:buFont typeface="+mj-lt"/>
               <a:buChar char="•"/>
@@ -9778,7 +10300,7 @@
                 </a:solidFill>
                 <a:latin typeface="Aptos" panose="020B0004020202020204" pitchFamily="34" charset="0"/>
               </a:rPr>
-              <a:t>Base final processada: 1458 linhas x 298 colunas</a:t>
+              <a:t>Base processada final: 1458 linhas x 298 colunas</a:t>
             </a:r>
           </a:p>
         </p:txBody>
@@ -9788,7 +10310,7 @@
           <p:cNvPr id="6" name="Retângulo 5">
             <a:extLst>
               <a:ext uri="{FF2B5EF4-FFF2-40B4-BE49-F238E27FC236}">
-                <a16:creationId xmlns:a16="http://schemas.microsoft.com/office/drawing/2014/main" id="{F7821BB0-BBEE-EE71-B3A5-539CE409A76A}"/>
+                <a16:creationId xmlns:a16="http://schemas.microsoft.com/office/drawing/2014/main" id="{253C3930-4055-0DA6-04AE-0AF12567DD3E}"/>
               </a:ext>
             </a:extLst>
           </p:cNvPr>
@@ -9797,8 +10319,8 @@
         </p:nvSpPr>
         <p:spPr>
           <a:xfrm>
-            <a:off x="6858000" y="1460499"/>
-            <a:ext cx="3937000" cy="3385541"/>
+            <a:off x="6858000" y="1460500"/>
+            <a:ext cx="3937000" cy="2857500"/>
           </a:xfrm>
           <a:prstGeom prst="rect">
             <a:avLst/>
@@ -9842,7 +10364,7 @@
           <p:cNvPr id="7" name="CaixaDeTexto 6">
             <a:extLst>
               <a:ext uri="{FF2B5EF4-FFF2-40B4-BE49-F238E27FC236}">
-                <a16:creationId xmlns:a16="http://schemas.microsoft.com/office/drawing/2014/main" id="{13FDFB70-E1B0-5B51-6529-1C552BA14D65}"/>
+                <a16:creationId xmlns:a16="http://schemas.microsoft.com/office/drawing/2014/main" id="{1E01099E-4456-2D6F-4E14-4507BA66B4EC}"/>
               </a:ext>
             </a:extLst>
           </p:cNvPr>
@@ -9867,13 +10389,13 @@
           <a:p>
             <a:pPr algn="ctr"/>
             <a:r>
-              <a:rPr lang="pt-BR" sz="2400" b="1" dirty="0">
+              <a:rPr lang="pt-BR" sz="2400" b="1">
                 <a:solidFill>
                   <a:srgbClr val="162B3A"/>
                 </a:solidFill>
                 <a:latin typeface="Aptos" panose="020B0004020202020204" pitchFamily="34" charset="0"/>
               </a:rPr>
-              <a:t>Features criadas</a:t>
+              <a:t>Por que isso importa?</a:t>
             </a:r>
           </a:p>
         </p:txBody>
@@ -9883,7 +10405,7 @@
           <p:cNvPr id="8" name="CaixaDeTexto 7">
             <a:extLst>
               <a:ext uri="{FF2B5EF4-FFF2-40B4-BE49-F238E27FC236}">
-                <a16:creationId xmlns:a16="http://schemas.microsoft.com/office/drawing/2014/main" id="{8BD7A925-759F-B96E-B4DE-BD53EFA12670}"/>
+                <a16:creationId xmlns:a16="http://schemas.microsoft.com/office/drawing/2014/main" id="{C031DF16-8B8C-98D8-2C17-84404222E5D2}"/>
               </a:ext>
             </a:extLst>
           </p:cNvPr>
@@ -9908,13 +10430,13 @@
           <a:p>
             <a:pPr algn="ctr"/>
             <a:r>
-              <a:rPr lang="pt-BR" sz="2000" dirty="0">
+              <a:rPr lang="pt-BR" sz="2000">
                 <a:solidFill>
                   <a:srgbClr val="1E2227"/>
                 </a:solidFill>
                 <a:latin typeface="Aptos" panose="020B0004020202020204" pitchFamily="34" charset="0"/>
               </a:rPr>
-              <a:t>As novas variáveis condensam sinais imobiliários relevantes: tamanho, conforto, idade, conservação e presença de estruturas valorizadas.</a:t>
+              <a:t>As novas variáveis condensam sinais imobiliários: tamanho, conforto, idade, conservação e estruturas valorizadas.</a:t>
             </a:r>
           </a:p>
         </p:txBody>
@@ -9922,7 +10444,7 @@
     </p:spTree>
     <p:extLst>
       <p:ext uri="{BB962C8B-B14F-4D97-AF65-F5344CB8AC3E}">
-        <p14:creationId xmlns:p14="http://schemas.microsoft.com/office/powerpoint/2010/main" val="867044870"/>
+        <p14:creationId xmlns:p14="http://schemas.microsoft.com/office/powerpoint/2010/main" val="2928571687"/>
       </p:ext>
     </p:extLst>
   </p:cSld>
@@ -9962,7 +10484,7 @@
           <p:cNvPr id="2" name="Retângulo 1">
             <a:extLst>
               <a:ext uri="{FF2B5EF4-FFF2-40B4-BE49-F238E27FC236}">
-                <a16:creationId xmlns:a16="http://schemas.microsoft.com/office/drawing/2014/main" id="{85E30FB0-50F6-A47C-F489-F98F61C317DD}"/>
+                <a16:creationId xmlns:a16="http://schemas.microsoft.com/office/drawing/2014/main" id="{F8D6E77A-4332-7C9C-E565-5BE9CABDF445}"/>
               </a:ext>
             </a:extLst>
           </p:cNvPr>
@@ -10030,7 +10552,7 @@
           <p:cNvPr id="3" name="CaixaDeTexto 2">
             <a:extLst>
               <a:ext uri="{FF2B5EF4-FFF2-40B4-BE49-F238E27FC236}">
-                <a16:creationId xmlns:a16="http://schemas.microsoft.com/office/drawing/2014/main" id="{E27B669D-CFB9-1A11-E2C2-D355406C9BDF}"/>
+                <a16:creationId xmlns:a16="http://schemas.microsoft.com/office/drawing/2014/main" id="{AD47FA75-E55F-D494-FCEB-0B2897D64D60}"/>
               </a:ext>
             </a:extLst>
           </p:cNvPr>
@@ -10040,7 +10562,7 @@
         <p:spPr>
           <a:xfrm>
             <a:off x="355600" y="127000"/>
-            <a:ext cx="8890000" cy="420628"/>
+            <a:ext cx="8636000" cy="420628"/>
           </a:xfrm>
           <a:prstGeom prst="rect">
             <a:avLst/>
@@ -10070,7 +10592,7 @@
           <p:cNvPr id="4" name="CaixaDeTexto 3">
             <a:extLst>
               <a:ext uri="{FF2B5EF4-FFF2-40B4-BE49-F238E27FC236}">
-                <a16:creationId xmlns:a16="http://schemas.microsoft.com/office/drawing/2014/main" id="{DC61B340-22F9-09FB-4659-0457D6FC8CBE}"/>
+                <a16:creationId xmlns:a16="http://schemas.microsoft.com/office/drawing/2014/main" id="{F6AFA3D9-0E3A-2979-9BD4-58743D42E8A7}"/>
               </a:ext>
             </a:extLst>
           </p:cNvPr>
@@ -10079,8 +10601,8 @@
         </p:nvSpPr>
         <p:spPr>
           <a:xfrm>
-            <a:off x="8890000" y="190500"/>
-            <a:ext cx="2946400" cy="235962"/>
+            <a:off x="8763000" y="190500"/>
+            <a:ext cx="3073400" cy="235962"/>
           </a:xfrm>
           <a:prstGeom prst="rect">
             <a:avLst/>
@@ -10111,7 +10633,7 @@
           <p:cNvPr id="5" name="Retângulo 4">
             <a:extLst>
               <a:ext uri="{FF2B5EF4-FFF2-40B4-BE49-F238E27FC236}">
-                <a16:creationId xmlns:a16="http://schemas.microsoft.com/office/drawing/2014/main" id="{07404A8B-90C9-5F08-C3F7-40C8D8C6E5E3}"/>
+                <a16:creationId xmlns:a16="http://schemas.microsoft.com/office/drawing/2014/main" id="{4B9E5A1B-120C-F276-A26C-CAB588B17B9E}"/>
               </a:ext>
             </a:extLst>
           </p:cNvPr>
@@ -10121,7 +10643,7 @@
         <p:spPr>
           <a:xfrm>
             <a:off x="762000" y="1270000"/>
-            <a:ext cx="2159000" cy="1168400"/>
+            <a:ext cx="2159000" cy="1117600"/>
           </a:xfrm>
           <a:prstGeom prst="rect">
             <a:avLst/>
@@ -10165,7 +10687,7 @@
           <p:cNvPr id="6" name="CaixaDeTexto 5">
             <a:extLst>
               <a:ext uri="{FF2B5EF4-FFF2-40B4-BE49-F238E27FC236}">
-                <a16:creationId xmlns:a16="http://schemas.microsoft.com/office/drawing/2014/main" id="{1014EA85-A717-883F-C555-18641E683996}"/>
+                <a16:creationId xmlns:a16="http://schemas.microsoft.com/office/drawing/2014/main" id="{E1C35190-9D6F-99D8-A37A-85CBA2E87D38}"/>
               </a:ext>
             </a:extLst>
           </p:cNvPr>
@@ -10174,8 +10696,8 @@
         </p:nvSpPr>
         <p:spPr>
           <a:xfrm>
-            <a:off x="889000" y="1397000"/>
-            <a:ext cx="1905000" cy="451406"/>
+            <a:off x="889000" y="1384300"/>
+            <a:ext cx="1905000" cy="436017"/>
           </a:xfrm>
           <a:prstGeom prst="rect">
             <a:avLst/>
@@ -10190,7 +10712,7 @@
           <a:p>
             <a:pPr algn="ctr"/>
             <a:r>
-              <a:rPr lang="pt-BR" sz="2600" b="1">
+              <a:rPr lang="pt-BR" sz="2500" b="1">
                 <a:solidFill>
                   <a:srgbClr val="E87E42"/>
                 </a:solidFill>
@@ -10206,7 +10728,7 @@
           <p:cNvPr id="7" name="CaixaDeTexto 6">
             <a:extLst>
               <a:ext uri="{FF2B5EF4-FFF2-40B4-BE49-F238E27FC236}">
-                <a16:creationId xmlns:a16="http://schemas.microsoft.com/office/drawing/2014/main" id="{7EAB5D92-2433-5B3A-F4A2-071C0E5B0BEC}"/>
+                <a16:creationId xmlns:a16="http://schemas.microsoft.com/office/drawing/2014/main" id="{C3561F24-EFB1-CA2F-C882-6CF1BBC8A6D1}"/>
               </a:ext>
             </a:extLst>
           </p:cNvPr>
@@ -10215,8 +10737,8 @@
         </p:nvSpPr>
         <p:spPr>
           <a:xfrm>
-            <a:off x="889000" y="1905000"/>
-            <a:ext cx="1905000" cy="251351"/>
+            <a:off x="889000" y="1892300"/>
+            <a:ext cx="1905000" cy="235962"/>
           </a:xfrm>
           <a:prstGeom prst="rect">
             <a:avLst/>
@@ -10231,7 +10753,7 @@
           <a:p>
             <a:pPr algn="ctr"/>
             <a:r>
-              <a:rPr lang="pt-BR" sz="1300">
+              <a:rPr lang="pt-BR" sz="1200">
                 <a:solidFill>
                   <a:srgbClr val="585F69"/>
                 </a:solidFill>
@@ -10247,7 +10769,7 @@
           <p:cNvPr id="8" name="Retângulo 7">
             <a:extLst>
               <a:ext uri="{FF2B5EF4-FFF2-40B4-BE49-F238E27FC236}">
-                <a16:creationId xmlns:a16="http://schemas.microsoft.com/office/drawing/2014/main" id="{B96CE10F-F2C2-E3CD-A016-9A0E3311BCEE}"/>
+                <a16:creationId xmlns:a16="http://schemas.microsoft.com/office/drawing/2014/main" id="{A41F216F-121A-9FD8-CEB1-8CA7C06BB9DD}"/>
               </a:ext>
             </a:extLst>
           </p:cNvPr>
@@ -10257,7 +10779,7 @@
         <p:spPr>
           <a:xfrm>
             <a:off x="3175000" y="1270000"/>
-            <a:ext cx="2159000" cy="1168400"/>
+            <a:ext cx="2159000" cy="1117600"/>
           </a:xfrm>
           <a:prstGeom prst="rect">
             <a:avLst/>
@@ -10301,7 +10823,7 @@
           <p:cNvPr id="9" name="CaixaDeTexto 8">
             <a:extLst>
               <a:ext uri="{FF2B5EF4-FFF2-40B4-BE49-F238E27FC236}">
-                <a16:creationId xmlns:a16="http://schemas.microsoft.com/office/drawing/2014/main" id="{9703082C-F611-130D-4F14-745D93D0A515}"/>
+                <a16:creationId xmlns:a16="http://schemas.microsoft.com/office/drawing/2014/main" id="{442E93ED-8E10-A708-3A1D-8CF6C13FF8CA}"/>
               </a:ext>
             </a:extLst>
           </p:cNvPr>
@@ -10310,8 +10832,8 @@
         </p:nvSpPr>
         <p:spPr>
           <a:xfrm>
-            <a:off x="3302000" y="1397000"/>
-            <a:ext cx="1905000" cy="451406"/>
+            <a:off x="3302000" y="1384300"/>
+            <a:ext cx="1905000" cy="436017"/>
           </a:xfrm>
           <a:prstGeom prst="rect">
             <a:avLst/>
@@ -10326,7 +10848,7 @@
           <a:p>
             <a:pPr algn="ctr"/>
             <a:r>
-              <a:rPr lang="pt-BR" sz="2600" b="1">
+              <a:rPr lang="pt-BR" sz="2500" b="1">
                 <a:solidFill>
                   <a:srgbClr val="589C66"/>
                 </a:solidFill>
@@ -10342,7 +10864,7 @@
           <p:cNvPr id="10" name="CaixaDeTexto 9">
             <a:extLst>
               <a:ext uri="{FF2B5EF4-FFF2-40B4-BE49-F238E27FC236}">
-                <a16:creationId xmlns:a16="http://schemas.microsoft.com/office/drawing/2014/main" id="{C19E0124-E3B6-B457-528D-FC34A4D948CA}"/>
+                <a16:creationId xmlns:a16="http://schemas.microsoft.com/office/drawing/2014/main" id="{4B135920-C4FB-9B47-2AFB-1093B1354332}"/>
               </a:ext>
             </a:extLst>
           </p:cNvPr>
@@ -10351,8 +10873,8 @@
         </p:nvSpPr>
         <p:spPr>
           <a:xfrm>
-            <a:off x="3302000" y="1905000"/>
-            <a:ext cx="1905000" cy="251351"/>
+            <a:off x="3302000" y="1892300"/>
+            <a:ext cx="1905000" cy="235962"/>
           </a:xfrm>
           <a:prstGeom prst="rect">
             <a:avLst/>
@@ -10367,7 +10889,7 @@
           <a:p>
             <a:pPr algn="ctr"/>
             <a:r>
-              <a:rPr lang="pt-BR" sz="1300">
+              <a:rPr lang="pt-BR" sz="1200">
                 <a:solidFill>
                   <a:srgbClr val="585F69"/>
                 </a:solidFill>
@@ -10383,7 +10905,7 @@
           <p:cNvPr id="11" name="CaixaDeTexto 10">
             <a:extLst>
               <a:ext uri="{FF2B5EF4-FFF2-40B4-BE49-F238E27FC236}">
-                <a16:creationId xmlns:a16="http://schemas.microsoft.com/office/drawing/2014/main" id="{F727942D-5FE2-E8B0-7491-C7774AF19DAD}"/>
+                <a16:creationId xmlns:a16="http://schemas.microsoft.com/office/drawing/2014/main" id="{3556EB7A-D80E-D30D-18CA-AAB05856BA80}"/>
               </a:ext>
             </a:extLst>
           </p:cNvPr>
@@ -10393,7 +10915,7 @@
         <p:spPr>
           <a:xfrm>
             <a:off x="762000" y="2921000"/>
-            <a:ext cx="4572000" cy="2021066"/>
+            <a:ext cx="4572000" cy="1982594"/>
           </a:xfrm>
           <a:prstGeom prst="rect">
             <a:avLst/>
@@ -10408,7 +10930,7 @@
           <a:p>
             <a:pPr marL="342900" indent="-342900">
               <a:spcAft>
-                <a:spcPts val="800"/>
+                <a:spcPts val="700"/>
               </a:spcAft>
               <a:buFont typeface="+mj-lt"/>
               <a:buChar char="•"/>
@@ -10426,7 +10948,7 @@
           <a:p>
             <a:pPr marL="342900" indent="-342900">
               <a:spcAft>
-                <a:spcPts val="800"/>
+                <a:spcPts val="700"/>
               </a:spcAft>
               <a:buFont typeface="+mj-lt"/>
               <a:buChar char="•"/>
@@ -10444,7 +10966,7 @@
           <a:p>
             <a:pPr marL="342900" indent="-342900">
               <a:spcAft>
-                <a:spcPts val="800"/>
+                <a:spcPts val="700"/>
               </a:spcAft>
               <a:buFont typeface="+mj-lt"/>
               <a:buChar char="•"/>
@@ -10456,13 +10978,13 @@
                 </a:solidFill>
                 <a:latin typeface="Aptos" panose="020B0004020202020204" pitchFamily="34" charset="0"/>
               </a:rPr>
-              <a:t>TotalSF e TotalBathrooms entraram entre os principais preditores</a:t>
+              <a:t>TotalSF e TotalBathrooms aparecem entre os principais preditores</a:t>
             </a:r>
           </a:p>
           <a:p>
             <a:pPr marL="342900" indent="-342900">
               <a:spcAft>
-                <a:spcPts val="800"/>
+                <a:spcPts val="700"/>
               </a:spcAft>
               <a:buFont typeface="+mj-lt"/>
               <a:buChar char="•"/>
@@ -10474,7 +10996,7 @@
                 </a:solidFill>
                 <a:latin typeface="Aptos" panose="020B0004020202020204" pitchFamily="34" charset="0"/>
               </a:rPr>
-              <a:t>Métricas usadas: MAE, RMSE e R²</a:t>
+              <a:t>Métricas: MAE, RMSE e R²</a:t>
             </a:r>
           </a:p>
         </p:txBody>
@@ -10484,7 +11006,7 @@
           <p:cNvPr id="13" name="Imagem 12">
             <a:extLst>
               <a:ext uri="{FF2B5EF4-FFF2-40B4-BE49-F238E27FC236}">
-                <a16:creationId xmlns:a16="http://schemas.microsoft.com/office/drawing/2014/main" id="{60F9257D-4228-4674-DCB4-0C757D9C63E4}"/>
+                <a16:creationId xmlns:a16="http://schemas.microsoft.com/office/drawing/2014/main" id="{28B5F3D0-D46C-2E77-7CF5-DCE0DAB2264D}"/>
               </a:ext>
             </a:extLst>
           </p:cNvPr>
@@ -10507,8 +11029,8 @@
         </p:blipFill>
         <p:spPr>
           <a:xfrm>
-            <a:off x="5818597" y="1427867"/>
-            <a:ext cx="6104331" cy="2021066"/>
+            <a:off x="7397089" y="1955960"/>
+            <a:ext cx="2223822" cy="736279"/>
           </a:xfrm>
           <a:prstGeom prst="rect">
             <a:avLst/>
@@ -10520,7 +11042,7 @@
           <p:cNvPr id="15" name="Imagem 14">
             <a:extLst>
               <a:ext uri="{FF2B5EF4-FFF2-40B4-BE49-F238E27FC236}">
-                <a16:creationId xmlns:a16="http://schemas.microsoft.com/office/drawing/2014/main" id="{CDAF79EB-ABE7-300B-18E3-E9C8FE00F15C}"/>
+                <a16:creationId xmlns:a16="http://schemas.microsoft.com/office/drawing/2014/main" id="{F942006B-F15D-9255-A619-C94EB96F3CE0}"/>
               </a:ext>
             </a:extLst>
           </p:cNvPr>
@@ -10543,8 +11065,8 @@
         </p:blipFill>
         <p:spPr>
           <a:xfrm>
-            <a:off x="5424738" y="3979106"/>
-            <a:ext cx="6498190" cy="2516134"/>
+            <a:off x="7449056" y="4447334"/>
+            <a:ext cx="2119888" cy="820832"/>
           </a:xfrm>
           <a:prstGeom prst="rect">
             <a:avLst/>
@@ -10554,7 +11076,7 @@
     </p:spTree>
     <p:extLst>
       <p:ext uri="{BB962C8B-B14F-4D97-AF65-F5344CB8AC3E}">
-        <p14:creationId xmlns:p14="http://schemas.microsoft.com/office/powerpoint/2010/main" val="3542610667"/>
+        <p14:creationId xmlns:p14="http://schemas.microsoft.com/office/powerpoint/2010/main" val="437234010"/>
       </p:ext>
     </p:extLst>
   </p:cSld>
@@ -10594,7 +11116,7 @@
           <p:cNvPr id="2" name="Retângulo 1">
             <a:extLst>
               <a:ext uri="{FF2B5EF4-FFF2-40B4-BE49-F238E27FC236}">
-                <a16:creationId xmlns:a16="http://schemas.microsoft.com/office/drawing/2014/main" id="{F64CA704-C171-86CB-9D5F-463DE2709505}"/>
+                <a16:creationId xmlns:a16="http://schemas.microsoft.com/office/drawing/2014/main" id="{85F1BC9D-DE24-A4B9-E7BD-1477337BD874}"/>
               </a:ext>
             </a:extLst>
           </p:cNvPr>
@@ -10662,7 +11184,7 @@
           <p:cNvPr id="3" name="CaixaDeTexto 2">
             <a:extLst>
               <a:ext uri="{FF2B5EF4-FFF2-40B4-BE49-F238E27FC236}">
-                <a16:creationId xmlns:a16="http://schemas.microsoft.com/office/drawing/2014/main" id="{369CA5D1-2457-7963-2B08-C1409DB26517}"/>
+                <a16:creationId xmlns:a16="http://schemas.microsoft.com/office/drawing/2014/main" id="{A123EF5F-2C72-F644-29C2-E2BFB1652546}"/>
               </a:ext>
             </a:extLst>
           </p:cNvPr>
@@ -10672,7 +11194,7 @@
         <p:spPr>
           <a:xfrm>
             <a:off x="355600" y="127000"/>
-            <a:ext cx="8890000" cy="420628"/>
+            <a:ext cx="8636000" cy="420628"/>
           </a:xfrm>
           <a:prstGeom prst="rect">
             <a:avLst/>
@@ -10702,7 +11224,7 @@
           <p:cNvPr id="4" name="CaixaDeTexto 3">
             <a:extLst>
               <a:ext uri="{FF2B5EF4-FFF2-40B4-BE49-F238E27FC236}">
-                <a16:creationId xmlns:a16="http://schemas.microsoft.com/office/drawing/2014/main" id="{9920E6B4-61D3-206A-BCA2-B12989F79726}"/>
+                <a16:creationId xmlns:a16="http://schemas.microsoft.com/office/drawing/2014/main" id="{8D1651D7-3630-3615-13B6-185BBA89893A}"/>
               </a:ext>
             </a:extLst>
           </p:cNvPr>
@@ -10711,8 +11233,8 @@
         </p:nvSpPr>
         <p:spPr>
           <a:xfrm>
-            <a:off x="8890000" y="190500"/>
-            <a:ext cx="2946400" cy="235962"/>
+            <a:off x="8763000" y="190500"/>
+            <a:ext cx="3073400" cy="235962"/>
           </a:xfrm>
           <a:prstGeom prst="rect">
             <a:avLst/>
@@ -10743,7 +11265,7 @@
           <p:cNvPr id="5" name="CaixaDeTexto 4">
             <a:extLst>
               <a:ext uri="{FF2B5EF4-FFF2-40B4-BE49-F238E27FC236}">
-                <a16:creationId xmlns:a16="http://schemas.microsoft.com/office/drawing/2014/main" id="{E055E293-F950-D81D-06D0-AA4686D8D508}"/>
+                <a16:creationId xmlns:a16="http://schemas.microsoft.com/office/drawing/2014/main" id="{D60366E2-3442-6394-5529-98686F9E7A8A}"/>
               </a:ext>
             </a:extLst>
           </p:cNvPr>
@@ -10753,7 +11275,7 @@
         <p:spPr>
           <a:xfrm>
             <a:off x="762000" y="1206500"/>
-            <a:ext cx="4953000" cy="2698175"/>
+            <a:ext cx="4953000" cy="2659702"/>
           </a:xfrm>
           <a:prstGeom prst="rect">
             <a:avLst/>
@@ -10768,7 +11290,7 @@
           <a:p>
             <a:pPr marL="457200" indent="-457200">
               <a:spcAft>
-                <a:spcPts val="800"/>
+                <a:spcPts val="700"/>
               </a:spcAft>
               <a:buFont typeface="+mj-lt"/>
               <a:buChar char="•"/>
@@ -10786,7 +11308,7 @@
           <a:p>
             <a:pPr marL="457200" indent="-457200">
               <a:spcAft>
-                <a:spcPts val="800"/>
+                <a:spcPts val="700"/>
               </a:spcAft>
               <a:buFont typeface="+mj-lt"/>
               <a:buChar char="•"/>
@@ -10804,7 +11326,7 @@
           <a:p>
             <a:pPr marL="457200" indent="-457200">
               <a:spcAft>
-                <a:spcPts val="800"/>
+                <a:spcPts val="700"/>
               </a:spcAft>
               <a:buFont typeface="+mj-lt"/>
               <a:buChar char="•"/>
@@ -10822,7 +11344,7 @@
           <a:p>
             <a:pPr marL="457200" indent="-457200">
               <a:spcAft>
-                <a:spcPts val="800"/>
+                <a:spcPts val="700"/>
               </a:spcAft>
               <a:buFont typeface="+mj-lt"/>
               <a:buChar char="•"/>
@@ -10844,7 +11366,7 @@
           <p:cNvPr id="6" name="Retângulo 5">
             <a:extLst>
               <a:ext uri="{FF2B5EF4-FFF2-40B4-BE49-F238E27FC236}">
-                <a16:creationId xmlns:a16="http://schemas.microsoft.com/office/drawing/2014/main" id="{FB7AE0BF-A906-CFBA-CE7E-839B37655991}"/>
+                <a16:creationId xmlns:a16="http://schemas.microsoft.com/office/drawing/2014/main" id="{40A0C32E-762F-9D8B-A72C-5B63585799D5}"/>
               </a:ext>
             </a:extLst>
           </p:cNvPr>
@@ -10854,7 +11376,7 @@
         <p:spPr>
           <a:xfrm>
             <a:off x="889000" y="4381500"/>
-            <a:ext cx="2222500" cy="1168400"/>
+            <a:ext cx="2222500" cy="1117600"/>
           </a:xfrm>
           <a:prstGeom prst="rect">
             <a:avLst/>
@@ -10898,7 +11420,7 @@
           <p:cNvPr id="7" name="CaixaDeTexto 6">
             <a:extLst>
               <a:ext uri="{FF2B5EF4-FFF2-40B4-BE49-F238E27FC236}">
-                <a16:creationId xmlns:a16="http://schemas.microsoft.com/office/drawing/2014/main" id="{1478AC0B-BBB4-CC99-C856-AD8B02D0E69D}"/>
+                <a16:creationId xmlns:a16="http://schemas.microsoft.com/office/drawing/2014/main" id="{A7A1C645-D86F-DCB4-83CF-E2F7D9B6640E}"/>
               </a:ext>
             </a:extLst>
           </p:cNvPr>
@@ -10907,8 +11429,8 @@
         </p:nvSpPr>
         <p:spPr>
           <a:xfrm>
-            <a:off x="1016000" y="4508500"/>
-            <a:ext cx="1968500" cy="451406"/>
+            <a:off x="1016000" y="4495800"/>
+            <a:ext cx="1968500" cy="436017"/>
           </a:xfrm>
           <a:prstGeom prst="rect">
             <a:avLst/>
@@ -10923,7 +11445,7 @@
           <a:p>
             <a:pPr algn="ctr"/>
             <a:r>
-              <a:rPr lang="pt-BR" sz="2600" b="1">
+              <a:rPr lang="pt-BR" sz="2500" b="1">
                 <a:solidFill>
                   <a:srgbClr val="268984"/>
                 </a:solidFill>
@@ -10939,7 +11461,7 @@
           <p:cNvPr id="8" name="CaixaDeTexto 7">
             <a:extLst>
               <a:ext uri="{FF2B5EF4-FFF2-40B4-BE49-F238E27FC236}">
-                <a16:creationId xmlns:a16="http://schemas.microsoft.com/office/drawing/2014/main" id="{09189EA9-8AA4-8D77-A7D1-D9BC34FFF319}"/>
+                <a16:creationId xmlns:a16="http://schemas.microsoft.com/office/drawing/2014/main" id="{12D71B04-DB11-3AD5-27DD-92069D631E9D}"/>
               </a:ext>
             </a:extLst>
           </p:cNvPr>
@@ -10948,8 +11470,8 @@
         </p:nvSpPr>
         <p:spPr>
           <a:xfrm>
-            <a:off x="1016000" y="5016500"/>
-            <a:ext cx="1968500" cy="251351"/>
+            <a:off x="1016000" y="5003800"/>
+            <a:ext cx="1968500" cy="235962"/>
           </a:xfrm>
           <a:prstGeom prst="rect">
             <a:avLst/>
@@ -10964,7 +11486,7 @@
           <a:p>
             <a:pPr algn="ctr"/>
             <a:r>
-              <a:rPr lang="pt-BR" sz="1300">
+              <a:rPr lang="pt-BR" sz="1200">
                 <a:solidFill>
                   <a:srgbClr val="585F69"/>
                 </a:solidFill>
@@ -10980,7 +11502,7 @@
           <p:cNvPr id="9" name="Retângulo 8">
             <a:extLst>
               <a:ext uri="{FF2B5EF4-FFF2-40B4-BE49-F238E27FC236}">
-                <a16:creationId xmlns:a16="http://schemas.microsoft.com/office/drawing/2014/main" id="{6CEDB81D-EFE1-0A63-6FFB-28123FDB441F}"/>
+                <a16:creationId xmlns:a16="http://schemas.microsoft.com/office/drawing/2014/main" id="{727C92D4-E522-658B-04F8-0B6669863214}"/>
               </a:ext>
             </a:extLst>
           </p:cNvPr>
@@ -10990,7 +11512,7 @@
         <p:spPr>
           <a:xfrm>
             <a:off x="3429000" y="4381500"/>
-            <a:ext cx="2222500" cy="1168400"/>
+            <a:ext cx="2222500" cy="1117600"/>
           </a:xfrm>
           <a:prstGeom prst="rect">
             <a:avLst/>
@@ -11034,7 +11556,7 @@
           <p:cNvPr id="10" name="CaixaDeTexto 9">
             <a:extLst>
               <a:ext uri="{FF2B5EF4-FFF2-40B4-BE49-F238E27FC236}">
-                <a16:creationId xmlns:a16="http://schemas.microsoft.com/office/drawing/2014/main" id="{F583DF0F-DDEE-7832-CB09-ECD9739CCBEF}"/>
+                <a16:creationId xmlns:a16="http://schemas.microsoft.com/office/drawing/2014/main" id="{3AFD468E-20B5-F1EB-BD11-C86116A1EE14}"/>
               </a:ext>
             </a:extLst>
           </p:cNvPr>
@@ -11043,8 +11565,8 @@
         </p:nvSpPr>
         <p:spPr>
           <a:xfrm>
-            <a:off x="3556000" y="4508500"/>
-            <a:ext cx="1968500" cy="451406"/>
+            <a:off x="3556000" y="4495800"/>
+            <a:ext cx="1968500" cy="436017"/>
           </a:xfrm>
           <a:prstGeom prst="rect">
             <a:avLst/>
@@ -11059,7 +11581,7 @@
           <a:p>
             <a:pPr algn="ctr"/>
             <a:r>
-              <a:rPr lang="pt-BR" sz="2600" b="1">
+              <a:rPr lang="pt-BR" sz="2500" b="1">
                 <a:solidFill>
                   <a:srgbClr val="589C66"/>
                 </a:solidFill>
@@ -11075,7 +11597,7 @@
           <p:cNvPr id="11" name="CaixaDeTexto 10">
             <a:extLst>
               <a:ext uri="{FF2B5EF4-FFF2-40B4-BE49-F238E27FC236}">
-                <a16:creationId xmlns:a16="http://schemas.microsoft.com/office/drawing/2014/main" id="{E41F751E-DF79-3F85-5F7B-001064E62EF0}"/>
+                <a16:creationId xmlns:a16="http://schemas.microsoft.com/office/drawing/2014/main" id="{99527D2E-CE83-ECE8-9D6A-497A4754830F}"/>
               </a:ext>
             </a:extLst>
           </p:cNvPr>
@@ -11084,8 +11606,8 @@
         </p:nvSpPr>
         <p:spPr>
           <a:xfrm>
-            <a:off x="3556000" y="5016500"/>
-            <a:ext cx="1968500" cy="251351"/>
+            <a:off x="3556000" y="5003800"/>
+            <a:ext cx="1968500" cy="235962"/>
           </a:xfrm>
           <a:prstGeom prst="rect">
             <a:avLst/>
@@ -11100,7 +11622,7 @@
           <a:p>
             <a:pPr algn="ctr"/>
             <a:r>
-              <a:rPr lang="pt-BR" sz="1300">
+              <a:rPr lang="pt-BR" sz="1200">
                 <a:solidFill>
                   <a:srgbClr val="585F69"/>
                 </a:solidFill>
@@ -11116,7 +11638,7 @@
           <p:cNvPr id="13" name="Imagem 12">
             <a:extLst>
               <a:ext uri="{FF2B5EF4-FFF2-40B4-BE49-F238E27FC236}">
-                <a16:creationId xmlns:a16="http://schemas.microsoft.com/office/drawing/2014/main" id="{34B1A0A8-47F4-5C14-F9F5-BA1EFAF8496B}"/>
+                <a16:creationId xmlns:a16="http://schemas.microsoft.com/office/drawing/2014/main" id="{76106AE4-DDD9-78A9-F0EC-767417E00ADF}"/>
               </a:ext>
             </a:extLst>
           </p:cNvPr>
@@ -11139,8 +11661,8 @@
         </p:blipFill>
         <p:spPr>
           <a:xfrm>
-            <a:off x="5984017" y="1140456"/>
-            <a:ext cx="5967207" cy="2428593"/>
+            <a:off x="7669460" y="1854528"/>
+            <a:ext cx="1933080" cy="786744"/>
           </a:xfrm>
           <a:prstGeom prst="rect">
             <a:avLst/>
@@ -11152,7 +11674,7 @@
           <p:cNvPr id="15" name="Imagem 14">
             <a:extLst>
               <a:ext uri="{FF2B5EF4-FFF2-40B4-BE49-F238E27FC236}">
-                <a16:creationId xmlns:a16="http://schemas.microsoft.com/office/drawing/2014/main" id="{8BC509A5-A72D-1B9D-CFD1-15AAFC2257D7}"/>
+                <a16:creationId xmlns:a16="http://schemas.microsoft.com/office/drawing/2014/main" id="{6ECCED9C-9422-85ED-D78F-381E3C03188C}"/>
               </a:ext>
             </a:extLst>
           </p:cNvPr>
@@ -11175,8 +11697,8 @@
         </p:blipFill>
         <p:spPr>
           <a:xfrm>
-            <a:off x="6207126" y="4020532"/>
-            <a:ext cx="5744098" cy="2494637"/>
+            <a:off x="7642933" y="4426465"/>
+            <a:ext cx="1986135" cy="862570"/>
           </a:xfrm>
           <a:prstGeom prst="rect">
             <a:avLst/>
@@ -11186,7 +11708,7 @@
     </p:spTree>
     <p:extLst>
       <p:ext uri="{BB962C8B-B14F-4D97-AF65-F5344CB8AC3E}">
-        <p14:creationId xmlns:p14="http://schemas.microsoft.com/office/powerpoint/2010/main" val="1183279124"/>
+        <p14:creationId xmlns:p14="http://schemas.microsoft.com/office/powerpoint/2010/main" val="4007176513"/>
       </p:ext>
     </p:extLst>
   </p:cSld>
@@ -11226,7 +11748,7 @@
           <p:cNvPr id="2" name="Retângulo 1">
             <a:extLst>
               <a:ext uri="{FF2B5EF4-FFF2-40B4-BE49-F238E27FC236}">
-                <a16:creationId xmlns:a16="http://schemas.microsoft.com/office/drawing/2014/main" id="{87CFAFA0-13C5-16E8-61F1-9D1CFC67260E}"/>
+                <a16:creationId xmlns:a16="http://schemas.microsoft.com/office/drawing/2014/main" id="{09503240-B81A-59E8-9BFF-5EF911C35A23}"/>
               </a:ext>
             </a:extLst>
           </p:cNvPr>
@@ -11294,7 +11816,7 @@
           <p:cNvPr id="3" name="CaixaDeTexto 2">
             <a:extLst>
               <a:ext uri="{FF2B5EF4-FFF2-40B4-BE49-F238E27FC236}">
-                <a16:creationId xmlns:a16="http://schemas.microsoft.com/office/drawing/2014/main" id="{B8DDE1AC-1C72-7A0C-8E25-B73B32FA2CB5}"/>
+                <a16:creationId xmlns:a16="http://schemas.microsoft.com/office/drawing/2014/main" id="{8BF21CD9-D268-394F-C748-AFC1B7A5E69E}"/>
               </a:ext>
             </a:extLst>
           </p:cNvPr>
@@ -11304,7 +11826,7 @@
         <p:spPr>
           <a:xfrm>
             <a:off x="355600" y="127000"/>
-            <a:ext cx="8890000" cy="420628"/>
+            <a:ext cx="8636000" cy="420628"/>
           </a:xfrm>
           <a:prstGeom prst="rect">
             <a:avLst/>
@@ -11334,7 +11856,7 @@
           <p:cNvPr id="4" name="CaixaDeTexto 3">
             <a:extLst>
               <a:ext uri="{FF2B5EF4-FFF2-40B4-BE49-F238E27FC236}">
-                <a16:creationId xmlns:a16="http://schemas.microsoft.com/office/drawing/2014/main" id="{33594372-9B86-E677-A276-B7ED189F9269}"/>
+                <a16:creationId xmlns:a16="http://schemas.microsoft.com/office/drawing/2014/main" id="{9576876E-2B55-4D5E-FAF5-E188623617A1}"/>
               </a:ext>
             </a:extLst>
           </p:cNvPr>
@@ -11343,8 +11865,8 @@
         </p:nvSpPr>
         <p:spPr>
           <a:xfrm>
-            <a:off x="8890000" y="190500"/>
-            <a:ext cx="2946400" cy="235962"/>
+            <a:off x="8763000" y="190500"/>
+            <a:ext cx="3073400" cy="235962"/>
           </a:xfrm>
           <a:prstGeom prst="rect">
             <a:avLst/>
@@ -11375,7 +11897,7 @@
           <p:cNvPr id="5" name="CaixaDeTexto 4">
             <a:extLst>
               <a:ext uri="{FF2B5EF4-FFF2-40B4-BE49-F238E27FC236}">
-                <a16:creationId xmlns:a16="http://schemas.microsoft.com/office/drawing/2014/main" id="{30F858D3-439F-302E-CED9-AA66344937F0}"/>
+                <a16:creationId xmlns:a16="http://schemas.microsoft.com/office/drawing/2014/main" id="{ECE01CAC-1E17-EE77-515D-81A9A13E0452}"/>
               </a:ext>
             </a:extLst>
           </p:cNvPr>
@@ -11385,7 +11907,7 @@
         <p:spPr>
           <a:xfrm>
             <a:off x="635000" y="1168400"/>
-            <a:ext cx="4953000" cy="2677656"/>
+            <a:ext cx="4953000" cy="2626360"/>
           </a:xfrm>
           <a:prstGeom prst="rect">
             <a:avLst/>
@@ -11400,7 +11922,7 @@
           <a:p>
             <a:pPr marL="342900" indent="-342900">
               <a:spcAft>
-                <a:spcPts val="800"/>
+                <a:spcPts val="700"/>
               </a:spcAft>
               <a:buFont typeface="+mj-lt"/>
               <a:buChar char="•"/>
@@ -11412,13 +11934,13 @@
                 </a:solidFill>
                 <a:latin typeface="Aptos" panose="020B0004020202020204" pitchFamily="34" charset="0"/>
               </a:rPr>
-              <a:t>K-Means para encontrar perfis de imóveis sem usar o preço no treino</a:t>
+              <a:t>K-Means para perfis de imóveis sem usar preço no treino</a:t>
             </a:r>
           </a:p>
           <a:p>
             <a:pPr marL="342900" indent="-342900">
               <a:spcAft>
-                <a:spcPts val="800"/>
+                <a:spcPts val="700"/>
               </a:spcAft>
               <a:buFont typeface="+mj-lt"/>
               <a:buChar char="•"/>
@@ -11436,7 +11958,7 @@
           <a:p>
             <a:pPr marL="342900" indent="-342900">
               <a:spcAft>
-                <a:spcPts val="800"/>
+                <a:spcPts val="700"/>
               </a:spcAft>
               <a:buFont typeface="+mj-lt"/>
               <a:buChar char="•"/>
@@ -11448,13 +11970,13 @@
                 </a:solidFill>
                 <a:latin typeface="Aptos" panose="020B0004020202020204" pitchFamily="34" charset="0"/>
               </a:rPr>
-              <a:t>PCA e t-SNE usados para visualização em 2D</a:t>
+              <a:t>PCA e t-SNE para visualização em 2D</a:t>
             </a:r>
           </a:p>
           <a:p>
             <a:pPr marL="342900" indent="-342900">
               <a:spcAft>
-                <a:spcPts val="800"/>
+                <a:spcPts val="700"/>
               </a:spcAft>
               <a:buFont typeface="+mj-lt"/>
               <a:buChar char="•"/>
@@ -11472,7 +11994,7 @@
           <a:p>
             <a:pPr marL="342900" indent="-342900">
               <a:spcAft>
-                <a:spcPts val="800"/>
+                <a:spcPts val="700"/>
               </a:spcAft>
               <a:buFont typeface="+mj-lt"/>
               <a:buChar char="•"/>
@@ -11494,7 +12016,7 @@
           <p:cNvPr id="7" name="Imagem 6">
             <a:extLst>
               <a:ext uri="{FF2B5EF4-FFF2-40B4-BE49-F238E27FC236}">
-                <a16:creationId xmlns:a16="http://schemas.microsoft.com/office/drawing/2014/main" id="{0B9E817C-82F3-E527-47B0-3706827B93FE}"/>
+                <a16:creationId xmlns:a16="http://schemas.microsoft.com/office/drawing/2014/main" id="{BB3A50C3-5087-571C-2ABD-4B3A5D32915B}"/>
               </a:ext>
             </a:extLst>
           </p:cNvPr>
@@ -11517,44 +12039,8 @@
         </p:blipFill>
         <p:spPr>
           <a:xfrm>
-            <a:off x="6253514" y="844394"/>
-            <a:ext cx="4807468" cy="2856164"/>
-          </a:xfrm>
-          <a:prstGeom prst="rect">
-            <a:avLst/>
-          </a:prstGeom>
-        </p:spPr>
-      </p:pic>
-      <p:pic>
-        <p:nvPicPr>
-          <p:cNvPr id="9" name="Imagem 8">
-            <a:extLst>
-              <a:ext uri="{FF2B5EF4-FFF2-40B4-BE49-F238E27FC236}">
-                <a16:creationId xmlns:a16="http://schemas.microsoft.com/office/drawing/2014/main" id="{165D44F0-CEFE-2BD6-BEC2-8A80C8BFA605}"/>
-              </a:ext>
-            </a:extLst>
-          </p:cNvPr>
-          <p:cNvPicPr>
-            <a:picLocks noChangeAspect="1"/>
-          </p:cNvPicPr>
-          <p:nvPr/>
-        </p:nvPicPr>
-        <p:blipFill>
-          <a:blip r:embed="rId4">
-            <a:extLst>
-              <a:ext uri="{28A0092B-C50C-407E-A947-70E740481C1C}">
-                <a14:useLocalDpi xmlns:a14="http://schemas.microsoft.com/office/drawing/2010/main" val="0"/>
-              </a:ext>
-            </a:extLst>
-          </a:blip>
-          <a:stretch>
-            <a:fillRect/>
-          </a:stretch>
-        </p:blipFill>
-        <p:spPr>
-          <a:xfrm>
-            <a:off x="6252757" y="4002049"/>
-            <a:ext cx="4808225" cy="2855951"/>
+            <a:off x="7508709" y="2720059"/>
+            <a:ext cx="2064081" cy="592382"/>
           </a:xfrm>
           <a:prstGeom prst="rect">
             <a:avLst/>
@@ -11564,7 +12050,7 @@
     </p:spTree>
     <p:extLst>
       <p:ext uri="{BB962C8B-B14F-4D97-AF65-F5344CB8AC3E}">
-        <p14:creationId xmlns:p14="http://schemas.microsoft.com/office/powerpoint/2010/main" val="2081593449"/>
+        <p14:creationId xmlns:p14="http://schemas.microsoft.com/office/powerpoint/2010/main" val="3605585362"/>
       </p:ext>
     </p:extLst>
   </p:cSld>
@@ -11604,7 +12090,7 @@
           <p:cNvPr id="2" name="Retângulo 1">
             <a:extLst>
               <a:ext uri="{FF2B5EF4-FFF2-40B4-BE49-F238E27FC236}">
-                <a16:creationId xmlns:a16="http://schemas.microsoft.com/office/drawing/2014/main" id="{E52DF8D2-5BB6-DD74-51C6-CDF24F366299}"/>
+                <a16:creationId xmlns:a16="http://schemas.microsoft.com/office/drawing/2014/main" id="{D00B01BE-0E54-E6F4-E632-F821F428F06B}"/>
               </a:ext>
             </a:extLst>
           </p:cNvPr>
@@ -11672,7 +12158,7 @@
           <p:cNvPr id="3" name="CaixaDeTexto 2">
             <a:extLst>
               <a:ext uri="{FF2B5EF4-FFF2-40B4-BE49-F238E27FC236}">
-                <a16:creationId xmlns:a16="http://schemas.microsoft.com/office/drawing/2014/main" id="{09E88E0A-B65B-86F3-FCC5-A5CA59DF2EE2}"/>
+                <a16:creationId xmlns:a16="http://schemas.microsoft.com/office/drawing/2014/main" id="{6B357B2F-978B-8E20-53A1-9E18B638C534}"/>
               </a:ext>
             </a:extLst>
           </p:cNvPr>
@@ -11682,7 +12168,7 @@
         <p:spPr>
           <a:xfrm>
             <a:off x="355600" y="127000"/>
-            <a:ext cx="8890000" cy="420628"/>
+            <a:ext cx="8636000" cy="420628"/>
           </a:xfrm>
           <a:prstGeom prst="rect">
             <a:avLst/>
@@ -11712,7 +12198,7 @@
           <p:cNvPr id="4" name="CaixaDeTexto 3">
             <a:extLst>
               <a:ext uri="{FF2B5EF4-FFF2-40B4-BE49-F238E27FC236}">
-                <a16:creationId xmlns:a16="http://schemas.microsoft.com/office/drawing/2014/main" id="{82122A82-5685-07F7-16D6-AF3C96C26851}"/>
+                <a16:creationId xmlns:a16="http://schemas.microsoft.com/office/drawing/2014/main" id="{9413760F-5764-E507-511A-7664010C8C53}"/>
               </a:ext>
             </a:extLst>
           </p:cNvPr>
@@ -11721,8 +12207,8 @@
         </p:nvSpPr>
         <p:spPr>
           <a:xfrm>
-            <a:off x="8890000" y="190500"/>
-            <a:ext cx="2946400" cy="235962"/>
+            <a:off x="8763000" y="190500"/>
+            <a:ext cx="3073400" cy="235962"/>
           </a:xfrm>
           <a:prstGeom prst="rect">
             <a:avLst/>
@@ -11753,7 +12239,7 @@
           <p:cNvPr id="5" name="CaixaDeTexto 4">
             <a:extLst>
               <a:ext uri="{FF2B5EF4-FFF2-40B4-BE49-F238E27FC236}">
-                <a16:creationId xmlns:a16="http://schemas.microsoft.com/office/drawing/2014/main" id="{C340E915-8F94-431A-14FF-08D3448961EB}"/>
+                <a16:creationId xmlns:a16="http://schemas.microsoft.com/office/drawing/2014/main" id="{C4D43B73-3EC5-B513-3ABC-F904D4CE857F}"/>
               </a:ext>
             </a:extLst>
           </p:cNvPr>
@@ -11763,7 +12249,7 @@
         <p:spPr>
           <a:xfrm>
             <a:off x="698500" y="1168400"/>
-            <a:ext cx="5016500" cy="2954655"/>
+            <a:ext cx="5016500" cy="2626360"/>
           </a:xfrm>
           <a:prstGeom prst="rect">
             <a:avLst/>
@@ -11778,7 +12264,7 @@
           <a:p>
             <a:pPr marL="342900" indent="-342900">
               <a:spcAft>
-                <a:spcPts val="800"/>
+                <a:spcPts val="700"/>
               </a:spcAft>
               <a:buFont typeface="+mj-lt"/>
               <a:buChar char="•"/>
@@ -11790,13 +12276,13 @@
                 </a:solidFill>
                 <a:latin typeface="Aptos" panose="020B0004020202020204" pitchFamily="34" charset="0"/>
               </a:rPr>
-              <a:t>Apriori exigiu binarização das variáveis em tags interpretáveis</a:t>
+              <a:t>Apriori exigiu binarização em tags interpretáveis</a:t>
             </a:r>
           </a:p>
           <a:p>
             <a:pPr marL="342900" indent="-342900">
               <a:spcAft>
-                <a:spcPts val="800"/>
+                <a:spcPts val="700"/>
               </a:spcAft>
               <a:buFont typeface="+mj-lt"/>
               <a:buChar char="•"/>
@@ -11814,7 +12300,7 @@
           <a:p>
             <a:pPr marL="342900" indent="-342900">
               <a:spcAft>
-                <a:spcPts val="800"/>
+                <a:spcPts val="700"/>
               </a:spcAft>
               <a:buFont typeface="+mj-lt"/>
               <a:buChar char="•"/>
@@ -11826,13 +12312,13 @@
                 </a:solidFill>
                 <a:latin typeface="Aptos" panose="020B0004020202020204" pitchFamily="34" charset="0"/>
               </a:rPr>
-              <a:t>Associações fortes envolveram casas grandes, bairros premium e garagens maiores</a:t>
+              <a:t>Associações fortes envolvem casas grandes, bairros premium e garagens maiores</a:t>
             </a:r>
           </a:p>
           <a:p>
             <a:pPr marL="342900" indent="-342900">
               <a:spcAft>
-                <a:spcPts val="800"/>
+                <a:spcPts val="700"/>
               </a:spcAft>
               <a:buFont typeface="+mj-lt"/>
               <a:buChar char="•"/>
@@ -11850,7 +12336,7 @@
           <a:p>
             <a:pPr marL="342900" indent="-342900">
               <a:spcAft>
-                <a:spcPts val="800"/>
+                <a:spcPts val="700"/>
               </a:spcAft>
               <a:buFont typeface="+mj-lt"/>
               <a:buChar char="•"/>
@@ -11862,7 +12348,7 @@
                 </a:solidFill>
                 <a:latin typeface="Aptos" panose="020B0004020202020204" pitchFamily="34" charset="0"/>
               </a:rPr>
-              <a:t>Outliers ajudam a entender casos extremos que podem distorcer modelos</a:t>
+              <a:t>Outliers ajudam a entender casos extremos</a:t>
             </a:r>
           </a:p>
         </p:txBody>
@@ -11872,7 +12358,7 @@
           <p:cNvPr id="7" name="Imagem 6">
             <a:extLst>
               <a:ext uri="{FF2B5EF4-FFF2-40B4-BE49-F238E27FC236}">
-                <a16:creationId xmlns:a16="http://schemas.microsoft.com/office/drawing/2014/main" id="{02E2C14E-2B0B-968B-1A76-F06400ABE9AF}"/>
+                <a16:creationId xmlns:a16="http://schemas.microsoft.com/office/drawing/2014/main" id="{FD963736-6F79-0DED-8B6A-7FF98787C6CF}"/>
               </a:ext>
             </a:extLst>
           </p:cNvPr>
@@ -11895,44 +12381,8 @@
         </p:blipFill>
         <p:spPr>
           <a:xfrm>
-            <a:off x="5869448" y="858262"/>
-            <a:ext cx="4015403" cy="2985857"/>
-          </a:xfrm>
-          <a:prstGeom prst="rect">
-            <a:avLst/>
-          </a:prstGeom>
-        </p:spPr>
-      </p:pic>
-      <p:pic>
-        <p:nvPicPr>
-          <p:cNvPr id="9" name="Imagem 8">
-            <a:extLst>
-              <a:ext uri="{FF2B5EF4-FFF2-40B4-BE49-F238E27FC236}">
-                <a16:creationId xmlns:a16="http://schemas.microsoft.com/office/drawing/2014/main" id="{3C9BBE2C-BA56-078E-409D-242DC37B258A}"/>
-              </a:ext>
-            </a:extLst>
-          </p:cNvPr>
-          <p:cNvPicPr>
-            <a:picLocks noChangeAspect="1"/>
-          </p:cNvPicPr>
-          <p:nvPr/>
-        </p:nvPicPr>
-        <p:blipFill>
-          <a:blip r:embed="rId4">
-            <a:extLst>
-              <a:ext uri="{28A0092B-C50C-407E-A947-70E740481C1C}">
-                <a14:useLocalDpi xmlns:a14="http://schemas.microsoft.com/office/drawing/2010/main" val="0"/>
-              </a:ext>
-            </a:extLst>
-          </a:blip>
-          <a:stretch>
-            <a:fillRect/>
-          </a:stretch>
-        </p:blipFill>
-        <p:spPr>
-          <a:xfrm>
-            <a:off x="8109494" y="3844119"/>
-            <a:ext cx="4019358" cy="2985856"/>
+            <a:off x="7680854" y="2646166"/>
+            <a:ext cx="1910293" cy="740168"/>
           </a:xfrm>
           <a:prstGeom prst="rect">
             <a:avLst/>
@@ -11942,7 +12392,7 @@
     </p:spTree>
     <p:extLst>
       <p:ext uri="{BB962C8B-B14F-4D97-AF65-F5344CB8AC3E}">
-        <p14:creationId xmlns:p14="http://schemas.microsoft.com/office/powerpoint/2010/main" val="3878047824"/>
+        <p14:creationId xmlns:p14="http://schemas.microsoft.com/office/powerpoint/2010/main" val="2692539705"/>
       </p:ext>
     </p:extLst>
   </p:cSld>

--- a/slides/apresentacao_house_prices_c3.pptx
+++ b/slides/apresentacao_house_prices_c3.pptx
@@ -17,8 +17,8 @@
     <p:sldId id="262" r:id="rId8"/>
     <p:sldId id="263" r:id="rId9"/>
     <p:sldId id="264" r:id="rId10"/>
-    <p:sldId id="265" r:id="rId11"/>
-    <p:sldId id="266" r:id="rId12"/>
+    <p:sldId id="266" r:id="rId11"/>
+    <p:sldId id="269" r:id="rId12"/>
     <p:sldId id="267" r:id="rId13"/>
     <p:sldId id="268" r:id="rId14"/>
   </p:sldIdLst>
@@ -119,6 +119,11 @@
       </a:defRPr>
     </a:lvl9pPr>
   </p:defaultTextStyle>
+  <p:extLst>
+    <p:ext uri="{EFAFB233-063F-42B5-8137-9DF3F51BA10A}">
+      <p15:sldGuideLst xmlns:p15="http://schemas.microsoft.com/office/powerpoint/2012/main"/>
+    </p:ext>
+  </p:extLst>
 </p:presentation>
 </file>
 
@@ -604,7 +609,7 @@
           <a:p>
             <a:r>
               <a:rPr lang="pt-BR"/>
-              <a:t>Natalia: explicar que esse slide responde diretamente ao feedback da avaliação: faltavam gráficos dos modelos no notebook 06.</a:t>
+              <a:t>Natalia: reforçar que visualização é usada para guiar o leitor, não apenas ilustrar.</a:t>
             </a:r>
           </a:p>
         </p:txBody>
@@ -635,7 +640,7 @@
     </p:spTree>
     <p:extLst>
       <p:ext uri="{BB962C8B-B14F-4D97-AF65-F5344CB8AC3E}">
-        <p14:creationId xmlns:p14="http://schemas.microsoft.com/office/powerpoint/2010/main" val="4048604703"/>
+        <p14:creationId xmlns:p14="http://schemas.microsoft.com/office/powerpoint/2010/main" val="2206641937"/>
       </p:ext>
     </p:extLst>
   </p:cSld>
@@ -650,7 +655,13 @@
   <p:cSld>
     <p:spTree>
       <p:nvGrpSpPr>
-        <p:cNvPr id="1" name=""/>
+        <p:cNvPr id="1" name="">
+          <a:extLst>
+            <a:ext uri="{FF2B5EF4-FFF2-40B4-BE49-F238E27FC236}">
+              <a16:creationId xmlns:a16="http://schemas.microsoft.com/office/drawing/2014/main" id="{A08AA723-A32B-82EA-ABF3-42B54D06AF57}"/>
+            </a:ext>
+          </a:extLst>
+        </p:cNvPr>
         <p:cNvGrpSpPr/>
         <p:nvPr/>
       </p:nvGrpSpPr>
@@ -664,7 +675,13 @@
       </p:grpSpPr>
       <p:sp>
         <p:nvSpPr>
-          <p:cNvPr id="2" name="Espaço Reservado para Imagem de Slide 1"/>
+          <p:cNvPr id="2" name="Espaço Reservado para Imagem de Slide 1">
+            <a:extLst>
+              <a:ext uri="{FF2B5EF4-FFF2-40B4-BE49-F238E27FC236}">
+                <a16:creationId xmlns:a16="http://schemas.microsoft.com/office/drawing/2014/main" id="{8F59AA70-C9CD-25EA-DAC3-5DE62C4CE7C5}"/>
+              </a:ext>
+            </a:extLst>
+          </p:cNvPr>
           <p:cNvSpPr>
             <a:spLocks noGrp="1" noRot="1" noChangeAspect="1"/>
           </p:cNvSpPr>
@@ -676,7 +693,13 @@
       </p:sp>
       <p:sp>
         <p:nvSpPr>
-          <p:cNvPr id="3" name="Espaço Reservado para Anotações 2"/>
+          <p:cNvPr id="3" name="Espaço Reservado para Anotações 2">
+            <a:extLst>
+              <a:ext uri="{FF2B5EF4-FFF2-40B4-BE49-F238E27FC236}">
+                <a16:creationId xmlns:a16="http://schemas.microsoft.com/office/drawing/2014/main" id="{DEF80783-20D6-A56B-520E-682178AAE4C0}"/>
+              </a:ext>
+            </a:extLst>
+          </p:cNvPr>
           <p:cNvSpPr>
             <a:spLocks noGrp="1"/>
           </p:cNvSpPr>
@@ -691,14 +714,20 @@
           <a:p>
             <a:r>
               <a:rPr lang="pt-BR"/>
-              <a:t>Natalia: reforçar que visualização é usada para guiar o leitor, não apenas ilustrar.</a:t>
-            </a:r>
-          </a:p>
-        </p:txBody>
-      </p:sp>
-      <p:sp>
-        <p:nvSpPr>
-          <p:cNvPr id="4" name="Espaço Reservado para Número de Slide 3"/>
+              <a:t>Natalia: explicar que esse slide responde diretamente ao feedback da avaliação: faltavam gráficos dos modelos no notebook 06.</a:t>
+            </a:r>
+          </a:p>
+        </p:txBody>
+      </p:sp>
+      <p:sp>
+        <p:nvSpPr>
+          <p:cNvPr id="4" name="Espaço Reservado para Número de Slide 3">
+            <a:extLst>
+              <a:ext uri="{FF2B5EF4-FFF2-40B4-BE49-F238E27FC236}">
+                <a16:creationId xmlns:a16="http://schemas.microsoft.com/office/drawing/2014/main" id="{751BF492-2EEF-7B04-A9AB-6672AEF09B6C}"/>
+              </a:ext>
+            </a:extLst>
+          </p:cNvPr>
           <p:cNvSpPr>
             <a:spLocks noGrp="1"/>
           </p:cNvSpPr>
@@ -722,7 +751,7 @@
     </p:spTree>
     <p:extLst>
       <p:ext uri="{BB962C8B-B14F-4D97-AF65-F5344CB8AC3E}">
-        <p14:creationId xmlns:p14="http://schemas.microsoft.com/office/powerpoint/2010/main" val="2206641937"/>
+        <p14:creationId xmlns:p14="http://schemas.microsoft.com/office/powerpoint/2010/main" val="809457441"/>
       </p:ext>
     </p:extLst>
   </p:cSld>
@@ -5034,7 +5063,7 @@
         </p:nvSpPr>
         <p:spPr>
           <a:xfrm>
-            <a:off x="1333500" y="3302000"/>
+            <a:off x="1333500" y="3213715"/>
             <a:ext cx="2286000" cy="1117600"/>
           </a:xfrm>
           <a:prstGeom prst="rect">
@@ -5170,7 +5199,7 @@
         </p:nvSpPr>
         <p:spPr>
           <a:xfrm>
-            <a:off x="3810000" y="3302000"/>
+            <a:off x="3810000" y="3213715"/>
             <a:ext cx="2286000" cy="1117600"/>
           </a:xfrm>
           <a:prstGeom prst="rect">
@@ -5306,7 +5335,7 @@
         </p:nvSpPr>
         <p:spPr>
           <a:xfrm>
-            <a:off x="6286500" y="3302000"/>
+            <a:off x="6286500" y="3213715"/>
             <a:ext cx="2286000" cy="1117600"/>
           </a:xfrm>
           <a:prstGeom prst="rect">
@@ -5442,7 +5471,7 @@
         </p:nvSpPr>
         <p:spPr>
           <a:xfrm>
-            <a:off x="8763000" y="3302000"/>
+            <a:off x="8763000" y="3213715"/>
             <a:ext cx="2286000" cy="1117600"/>
           </a:xfrm>
           <a:prstGeom prst="rect">
@@ -5648,7 +5677,7 @@
           <p:cNvPr id="2" name="Retângulo 1">
             <a:extLst>
               <a:ext uri="{FF2B5EF4-FFF2-40B4-BE49-F238E27FC236}">
-                <a16:creationId xmlns:a16="http://schemas.microsoft.com/office/drawing/2014/main" id="{9689A4C5-9ABE-BFE9-132A-102C92C5ECF5}"/>
+                <a16:creationId xmlns:a16="http://schemas.microsoft.com/office/drawing/2014/main" id="{B6D25A27-2BDF-148A-8D85-5C41DECE5B79}"/>
               </a:ext>
             </a:extLst>
           </p:cNvPr>
@@ -5716,7 +5745,7 @@
           <p:cNvPr id="3" name="CaixaDeTexto 2">
             <a:extLst>
               <a:ext uri="{FF2B5EF4-FFF2-40B4-BE49-F238E27FC236}">
-                <a16:creationId xmlns:a16="http://schemas.microsoft.com/office/drawing/2014/main" id="{AFF1B0FE-AE5A-9E1B-3737-175EF100EB2F}"/>
+                <a16:creationId xmlns:a16="http://schemas.microsoft.com/office/drawing/2014/main" id="{0C96A9D2-C4C1-758C-105B-F92F8FB0A442}"/>
               </a:ext>
             </a:extLst>
           </p:cNvPr>
@@ -5740,14 +5769,29 @@
           <a:lstStyle/>
           <a:p>
             <a:r>
-              <a:rPr lang="pt-BR" sz="2400" b="1">
+              <a:rPr lang="pt-BR" sz="2400" b="1" dirty="0">
                 <a:solidFill>
                   <a:srgbClr val="FFFFFF"/>
                 </a:solidFill>
                 <a:latin typeface="Aptos" panose="020B0004020202020204" pitchFamily="34" charset="0"/>
               </a:rPr>
-              <a:t>Notebook 06: Resultados Consolidados</a:t>
-            </a:r>
+              <a:t>Visualização e </a:t>
+            </a:r>
+            <a:r>
+              <a:rPr lang="pt-BR" sz="2400" b="1" dirty="0" err="1">
+                <a:solidFill>
+                  <a:srgbClr val="FFFFFF"/>
+                </a:solidFill>
+                <a:latin typeface="Aptos" panose="020B0004020202020204" pitchFamily="34" charset="0"/>
+              </a:rPr>
+              <a:t>Storytelling</a:t>
+            </a:r>
+            <a:endParaRPr lang="pt-BR" sz="2400" b="1" dirty="0">
+              <a:solidFill>
+                <a:srgbClr val="FFFFFF"/>
+              </a:solidFill>
+              <a:latin typeface="Aptos" panose="020B0004020202020204" pitchFamily="34" charset="0"/>
+            </a:endParaRPr>
           </a:p>
         </p:txBody>
       </p:sp>
@@ -5756,7 +5800,7 @@
           <p:cNvPr id="4" name="CaixaDeTexto 3">
             <a:extLst>
               <a:ext uri="{FF2B5EF4-FFF2-40B4-BE49-F238E27FC236}">
-                <a16:creationId xmlns:a16="http://schemas.microsoft.com/office/drawing/2014/main" id="{3EDC3378-647B-E7C4-A12A-6266A964B90F}"/>
+                <a16:creationId xmlns:a16="http://schemas.microsoft.com/office/drawing/2014/main" id="{96ADCF12-1C7F-9EB1-38B7-500B90DE0DE0}"/>
               </a:ext>
             </a:extLst>
           </p:cNvPr>
@@ -5794,10 +5838,10 @@
       </p:sp>
       <p:sp>
         <p:nvSpPr>
-          <p:cNvPr id="5" name="CaixaDeTexto 4">
-            <a:extLst>
-              <a:ext uri="{FF2B5EF4-FFF2-40B4-BE49-F238E27FC236}">
-                <a16:creationId xmlns:a16="http://schemas.microsoft.com/office/drawing/2014/main" id="{C1DB72EC-6131-A713-E0DB-B29CE4691885}"/>
+          <p:cNvPr id="8" name="CaixaDeTexto 7">
+            <a:extLst>
+              <a:ext uri="{FF2B5EF4-FFF2-40B4-BE49-F238E27FC236}">
+                <a16:creationId xmlns:a16="http://schemas.microsoft.com/office/drawing/2014/main" id="{39C760CB-6477-A97E-844E-FC4EA9A83AFF}"/>
               </a:ext>
             </a:extLst>
           </p:cNvPr>
@@ -5806,8 +5850,8 @@
         </p:nvSpPr>
         <p:spPr>
           <a:xfrm>
-            <a:off x="685800" y="1168400"/>
-            <a:ext cx="4445000" cy="3180358"/>
+            <a:off x="833597" y="940707"/>
+            <a:ext cx="10524805" cy="328295"/>
           </a:xfrm>
           <a:prstGeom prst="rect">
             <a:avLst/>
@@ -5815,108 +5859,30 @@
           <a:noFill/>
         </p:spPr>
         <p:txBody>
-          <a:bodyPr vert="horz" lIns="50800" tIns="25400" rIns="50800" bIns="25400" rtlCol="0">
+          <a:bodyPr vert="horz" wrap="square" lIns="50800" tIns="25400" rIns="50800" bIns="25400" rtlCol="0">
             <a:spAutoFit/>
           </a:bodyPr>
           <a:lstStyle/>
           <a:p>
-            <a:pPr marL="342900" indent="-342900">
-              <a:spcAft>
-                <a:spcPts val="700"/>
-              </a:spcAft>
-              <a:buFont typeface="+mj-lt"/>
-              <a:buChar char="•"/>
-            </a:pPr>
-            <a:r>
-              <a:rPr lang="pt-BR">
-                <a:solidFill>
-                  <a:srgbClr val="1E2227"/>
+            <a:pPr algn="ctr"/>
+            <a:r>
+              <a:rPr lang="pt-BR" b="1" dirty="0">
+                <a:solidFill>
+                  <a:srgbClr val="162B3A"/>
                 </a:solidFill>
                 <a:latin typeface="Aptos" panose="020B0004020202020204" pitchFamily="34" charset="0"/>
               </a:rPr>
-              <a:t>Nova seção reúne os resultados dos modelos em painéis visuais</a:t>
-            </a:r>
-          </a:p>
-          <a:p>
-            <a:pPr marL="342900" indent="-342900">
-              <a:spcAft>
-                <a:spcPts val="700"/>
-              </a:spcAft>
-              <a:buFont typeface="+mj-lt"/>
-              <a:buChar char="•"/>
-            </a:pPr>
-            <a:r>
-              <a:rPr lang="pt-BR">
-                <a:solidFill>
-                  <a:srgbClr val="1E2227"/>
-                </a:solidFill>
-                <a:latin typeface="Aptos" panose="020B0004020202020204" pitchFamily="34" charset="0"/>
-              </a:rPr>
-              <a:t>Supervisionados: regressão e classificação no mesmo fluxo</a:t>
-            </a:r>
-          </a:p>
-          <a:p>
-            <a:pPr marL="342900" indent="-342900">
-              <a:spcAft>
-                <a:spcPts val="700"/>
-              </a:spcAft>
-              <a:buFont typeface="+mj-lt"/>
-              <a:buChar char="•"/>
-            </a:pPr>
-            <a:r>
-              <a:rPr lang="pt-BR">
-                <a:solidFill>
-                  <a:srgbClr val="1E2227"/>
-                </a:solidFill>
-                <a:latin typeface="Aptos" panose="020B0004020202020204" pitchFamily="34" charset="0"/>
-              </a:rPr>
-              <a:t>Não supervisionados: clusters, PCA/t-SNE e perfis médios</a:t>
-            </a:r>
-          </a:p>
-          <a:p>
-            <a:pPr marL="342900" indent="-342900">
-              <a:spcAft>
-                <a:spcPts val="700"/>
-              </a:spcAft>
-              <a:buFont typeface="+mj-lt"/>
-              <a:buChar char="•"/>
-            </a:pPr>
-            <a:r>
-              <a:rPr lang="pt-BR">
-                <a:solidFill>
-                  <a:srgbClr val="1E2227"/>
-                </a:solidFill>
-                <a:latin typeface="Aptos" panose="020B0004020202020204" pitchFamily="34" charset="0"/>
-              </a:rPr>
-              <a:t>Associação e outliers: Apriori e LOF em visão consolidada</a:t>
-            </a:r>
-          </a:p>
-          <a:p>
-            <a:pPr marL="342900" indent="-342900">
-              <a:spcAft>
-                <a:spcPts val="700"/>
-              </a:spcAft>
-              <a:buFont typeface="+mj-lt"/>
-              <a:buChar char="•"/>
-            </a:pPr>
-            <a:r>
-              <a:rPr lang="pt-BR">
-                <a:solidFill>
-                  <a:srgbClr val="1E2227"/>
-                </a:solidFill>
-                <a:latin typeface="Aptos" panose="020B0004020202020204" pitchFamily="34" charset="0"/>
-              </a:rPr>
-              <a:t>Placeholders removidos e conclusão executiva atualizada</a:t>
+              <a:t>Preço é resultado da combinação entre tamanho, qualidade, estrutura e idade do imóvel.</a:t>
             </a:r>
           </a:p>
         </p:txBody>
       </p:sp>
       <p:pic>
         <p:nvPicPr>
-          <p:cNvPr id="7" name="Imagem 6">
-            <a:extLst>
-              <a:ext uri="{FF2B5EF4-FFF2-40B4-BE49-F238E27FC236}">
-                <a16:creationId xmlns:a16="http://schemas.microsoft.com/office/drawing/2014/main" id="{6869CB4F-30D5-58F4-0C2E-AFAEA1613D46}"/>
+          <p:cNvPr id="9" name="Imagem 8">
+            <a:extLst>
+              <a:ext uri="{FF2B5EF4-FFF2-40B4-BE49-F238E27FC236}">
+                <a16:creationId xmlns:a16="http://schemas.microsoft.com/office/drawing/2014/main" id="{73FE442C-DEA0-BA2F-A65B-79EEEF656209}"/>
               </a:ext>
             </a:extLst>
           </p:cNvPr>
@@ -5939,44 +5905,8 @@
         </p:blipFill>
         <p:spPr>
           <a:xfrm>
-            <a:off x="7079588" y="1795675"/>
-            <a:ext cx="2223824" cy="637751"/>
-          </a:xfrm>
-          <a:prstGeom prst="rect">
-            <a:avLst/>
-          </a:prstGeom>
-        </p:spPr>
-      </p:pic>
-      <p:pic>
-        <p:nvPicPr>
-          <p:cNvPr id="9" name="Imagem 8">
-            <a:extLst>
-              <a:ext uri="{FF2B5EF4-FFF2-40B4-BE49-F238E27FC236}">
-                <a16:creationId xmlns:a16="http://schemas.microsoft.com/office/drawing/2014/main" id="{F8C2AB76-27B6-65E4-5B12-0445C9C3F811}"/>
-              </a:ext>
-            </a:extLst>
-          </p:cNvPr>
-          <p:cNvPicPr>
-            <a:picLocks noChangeAspect="1"/>
-          </p:cNvPicPr>
-          <p:nvPr/>
-        </p:nvPicPr>
-        <p:blipFill>
-          <a:blip r:embed="rId4">
-            <a:extLst>
-              <a:ext uri="{28A0092B-C50C-407E-A947-70E740481C1C}">
-                <a14:useLocalDpi xmlns:a14="http://schemas.microsoft.com/office/drawing/2010/main" val="0"/>
-              </a:ext>
-            </a:extLst>
-          </a:blip>
-          <a:stretch>
-            <a:fillRect/>
-          </a:stretch>
-        </p:blipFill>
-        <p:spPr>
-          <a:xfrm>
-            <a:off x="7670512" y="4423363"/>
-            <a:ext cx="1041976" cy="602074"/>
+            <a:off x="913476" y="1473110"/>
+            <a:ext cx="10765069" cy="5323522"/>
           </a:xfrm>
           <a:prstGeom prst="rect">
             <a:avLst/>
@@ -5986,7 +5916,7 @@
     </p:spTree>
     <p:extLst>
       <p:ext uri="{BB962C8B-B14F-4D97-AF65-F5344CB8AC3E}">
-        <p14:creationId xmlns:p14="http://schemas.microsoft.com/office/powerpoint/2010/main" val="2049991879"/>
+        <p14:creationId xmlns:p14="http://schemas.microsoft.com/office/powerpoint/2010/main" val="1732430115"/>
       </p:ext>
     </p:extLst>
   </p:cSld>
@@ -6009,7 +5939,13 @@
     </p:bg>
     <p:spTree>
       <p:nvGrpSpPr>
-        <p:cNvPr id="1" name=""/>
+        <p:cNvPr id="1" name="">
+          <a:extLst>
+            <a:ext uri="{FF2B5EF4-FFF2-40B4-BE49-F238E27FC236}">
+              <a16:creationId xmlns:a16="http://schemas.microsoft.com/office/drawing/2014/main" id="{3223A6D0-A5DE-33B0-92F1-F784F63A25AA}"/>
+            </a:ext>
+          </a:extLst>
+        </p:cNvPr>
         <p:cNvGrpSpPr/>
         <p:nvPr/>
       </p:nvGrpSpPr>
@@ -6026,7 +5962,7 @@
           <p:cNvPr id="2" name="Retângulo 1">
             <a:extLst>
               <a:ext uri="{FF2B5EF4-FFF2-40B4-BE49-F238E27FC236}">
-                <a16:creationId xmlns:a16="http://schemas.microsoft.com/office/drawing/2014/main" id="{B6D25A27-2BDF-148A-8D85-5C41DECE5B79}"/>
+                <a16:creationId xmlns:a16="http://schemas.microsoft.com/office/drawing/2014/main" id="{4FB9926A-E5FC-2C01-6EA1-FD885EB0D94C}"/>
               </a:ext>
             </a:extLst>
           </p:cNvPr>
@@ -6094,7 +6030,7 @@
           <p:cNvPr id="3" name="CaixaDeTexto 2">
             <a:extLst>
               <a:ext uri="{FF2B5EF4-FFF2-40B4-BE49-F238E27FC236}">
-                <a16:creationId xmlns:a16="http://schemas.microsoft.com/office/drawing/2014/main" id="{0C96A9D2-C4C1-758C-105B-F92F8FB0A442}"/>
+                <a16:creationId xmlns:a16="http://schemas.microsoft.com/office/drawing/2014/main" id="{93B2D268-8170-A576-241E-748E084CB8F4}"/>
               </a:ext>
             </a:extLst>
           </p:cNvPr>
@@ -6118,13 +6054,13 @@
           <a:lstStyle/>
           <a:p>
             <a:r>
-              <a:rPr lang="pt-BR" sz="2400" b="1">
+              <a:rPr lang="pt-BR" sz="2400" b="1" dirty="0">
                 <a:solidFill>
                   <a:srgbClr val="FFFFFF"/>
                 </a:solidFill>
                 <a:latin typeface="Aptos" panose="020B0004020202020204" pitchFamily="34" charset="0"/>
               </a:rPr>
-              <a:t>Visualização e Storytelling</a:t>
+              <a:t>Resultados Consolidados</a:t>
             </a:r>
           </a:p>
         </p:txBody>
@@ -6134,7 +6070,7 @@
           <p:cNvPr id="4" name="CaixaDeTexto 3">
             <a:extLst>
               <a:ext uri="{FF2B5EF4-FFF2-40B4-BE49-F238E27FC236}">
-                <a16:creationId xmlns:a16="http://schemas.microsoft.com/office/drawing/2014/main" id="{96ADCF12-1C7F-9EB1-38B7-500B90DE0DE0}"/>
+                <a16:creationId xmlns:a16="http://schemas.microsoft.com/office/drawing/2014/main" id="{4E3B655B-5CA2-F6F8-FEED-2AC6E2589C01}"/>
               </a:ext>
             </a:extLst>
           </p:cNvPr>
@@ -6170,131 +6106,12 @@
           </a:p>
         </p:txBody>
       </p:sp>
-      <p:sp>
-        <p:nvSpPr>
-          <p:cNvPr id="5" name="CaixaDeTexto 4">
-            <a:extLst>
-              <a:ext uri="{FF2B5EF4-FFF2-40B4-BE49-F238E27FC236}">
-                <a16:creationId xmlns:a16="http://schemas.microsoft.com/office/drawing/2014/main" id="{65A3445B-AF67-C2CC-1FAC-6FDBAED97B45}"/>
-              </a:ext>
-            </a:extLst>
-          </p:cNvPr>
-          <p:cNvSpPr txBox="1"/>
-          <p:nvPr/>
-        </p:nvSpPr>
-        <p:spPr>
-          <a:xfrm>
-            <a:off x="736600" y="1206500"/>
-            <a:ext cx="4699000" cy="3334246"/>
-          </a:xfrm>
-          <a:prstGeom prst="rect">
-            <a:avLst/>
-          </a:prstGeom>
-          <a:noFill/>
-        </p:spPr>
-        <p:txBody>
-          <a:bodyPr vert="horz" lIns="50800" tIns="25400" rIns="50800" bIns="25400" rtlCol="0">
-            <a:spAutoFit/>
-          </a:bodyPr>
-          <a:lstStyle/>
-          <a:p>
-            <a:pPr marL="457200" indent="-457200">
-              <a:spcAft>
-                <a:spcPts val="700"/>
-              </a:spcAft>
-              <a:buFont typeface="+mj-lt"/>
-              <a:buChar char="•"/>
-            </a:pPr>
-            <a:r>
-              <a:rPr lang="pt-BR" sz="1900">
-                <a:solidFill>
-                  <a:srgbClr val="1E2227"/>
-                </a:solidFill>
-                <a:latin typeface="Aptos" panose="020B0004020202020204" pitchFamily="34" charset="0"/>
-              </a:rPr>
-              <a:t>Distribuições mostram assimetria à direita em SalePrice</a:t>
-            </a:r>
-          </a:p>
-          <a:p>
-            <a:pPr marL="457200" indent="-457200">
-              <a:spcAft>
-                <a:spcPts val="700"/>
-              </a:spcAft>
-              <a:buFont typeface="+mj-lt"/>
-              <a:buChar char="•"/>
-            </a:pPr>
-            <a:r>
-              <a:rPr lang="pt-BR" sz="1900">
-                <a:solidFill>
-                  <a:srgbClr val="1E2227"/>
-                </a:solidFill>
-                <a:latin typeface="Aptos" panose="020B0004020202020204" pitchFamily="34" charset="0"/>
-              </a:rPr>
-              <a:t>Heatmap confirma variáveis ligadas ao preço</a:t>
-            </a:r>
-          </a:p>
-          <a:p>
-            <a:pPr marL="457200" indent="-457200">
-              <a:spcAft>
-                <a:spcPts val="700"/>
-              </a:spcAft>
-              <a:buFont typeface="+mj-lt"/>
-              <a:buChar char="•"/>
-            </a:pPr>
-            <a:r>
-              <a:rPr lang="pt-BR" sz="1900">
-                <a:solidFill>
-                  <a:srgbClr val="1E2227"/>
-                </a:solidFill>
-                <a:latin typeface="Aptos" panose="020B0004020202020204" pitchFamily="34" charset="0"/>
-              </a:rPr>
-              <a:t>Scatter e boxplot reforçam impacto de área e qualidade</a:t>
-            </a:r>
-          </a:p>
-          <a:p>
-            <a:pPr marL="457200" indent="-457200">
-              <a:spcAft>
-                <a:spcPts val="700"/>
-              </a:spcAft>
-              <a:buFont typeface="+mj-lt"/>
-              <a:buChar char="•"/>
-            </a:pPr>
-            <a:r>
-              <a:rPr lang="pt-BR" sz="1900">
-                <a:solidFill>
-                  <a:srgbClr val="1E2227"/>
-                </a:solidFill>
-                <a:latin typeface="Aptos" panose="020B0004020202020204" pitchFamily="34" charset="0"/>
-              </a:rPr>
-              <a:t>Parte 5 conecta modelos supervisionados, clusters, Apriori e LOF</a:t>
-            </a:r>
-          </a:p>
-          <a:p>
-            <a:pPr marL="457200" indent="-457200">
-              <a:spcAft>
-                <a:spcPts val="700"/>
-              </a:spcAft>
-              <a:buFont typeface="+mj-lt"/>
-              <a:buChar char="•"/>
-            </a:pPr>
-            <a:r>
-              <a:rPr lang="pt-BR" sz="1900">
-                <a:solidFill>
-                  <a:srgbClr val="1E2227"/>
-                </a:solidFill>
-                <a:latin typeface="Aptos" panose="020B0004020202020204" pitchFamily="34" charset="0"/>
-              </a:rPr>
-              <a:t>Conclusão final sintetiza o raciocínio analítico do projeto</a:t>
-            </a:r>
-          </a:p>
-        </p:txBody>
-      </p:sp>
       <p:pic>
         <p:nvPicPr>
           <p:cNvPr id="7" name="Imagem 6">
             <a:extLst>
               <a:ext uri="{FF2B5EF4-FFF2-40B4-BE49-F238E27FC236}">
-                <a16:creationId xmlns:a16="http://schemas.microsoft.com/office/drawing/2014/main" id="{247BC0D9-9BA1-A992-5F83-82E2CAB5F232}"/>
+                <a16:creationId xmlns:a16="http://schemas.microsoft.com/office/drawing/2014/main" id="{6FD84B28-4535-59C0-D8AD-07CCDCD72202}"/>
               </a:ext>
             </a:extLst>
           </p:cNvPr>
@@ -6317,59 +6134,18 @@
         </p:blipFill>
         <p:spPr>
           <a:xfrm>
-            <a:off x="7815987" y="1797990"/>
-            <a:ext cx="1132026" cy="849019"/>
+            <a:off x="683053" y="1761294"/>
+            <a:ext cx="10950972" cy="4031952"/>
           </a:xfrm>
           <a:prstGeom prst="rect">
             <a:avLst/>
           </a:prstGeom>
         </p:spPr>
       </p:pic>
-      <p:sp>
-        <p:nvSpPr>
-          <p:cNvPr id="8" name="CaixaDeTexto 7">
-            <a:extLst>
-              <a:ext uri="{FF2B5EF4-FFF2-40B4-BE49-F238E27FC236}">
-                <a16:creationId xmlns:a16="http://schemas.microsoft.com/office/drawing/2014/main" id="{39C760CB-6477-A97E-844E-FC4EA9A83AFF}"/>
-              </a:ext>
-            </a:extLst>
-          </p:cNvPr>
-          <p:cNvSpPr txBox="1"/>
-          <p:nvPr/>
-        </p:nvSpPr>
-        <p:spPr>
-          <a:xfrm>
-            <a:off x="1079500" y="4953000"/>
-            <a:ext cx="9779000" cy="789960"/>
-          </a:xfrm>
-          <a:prstGeom prst="rect">
-            <a:avLst/>
-          </a:prstGeom>
-          <a:noFill/>
-        </p:spPr>
-        <p:txBody>
-          <a:bodyPr vert="horz" lIns="50800" tIns="25400" rIns="50800" bIns="25400" rtlCol="0">
-            <a:spAutoFit/>
-          </a:bodyPr>
-          <a:lstStyle/>
-          <a:p>
-            <a:pPr algn="ctr"/>
-            <a:r>
-              <a:rPr lang="pt-BR" sz="2400" b="1">
-                <a:solidFill>
-                  <a:srgbClr val="162B3A"/>
-                </a:solidFill>
-                <a:latin typeface="Aptos" panose="020B0004020202020204" pitchFamily="34" charset="0"/>
-              </a:rPr>
-              <a:t>Mensagem central: preço é resultado da combinação entre tamanho, qualidade, estrutura e idade do imóvel.</a:t>
-            </a:r>
-          </a:p>
-        </p:txBody>
-      </p:sp>
     </p:spTree>
     <p:extLst>
       <p:ext uri="{BB962C8B-B14F-4D97-AF65-F5344CB8AC3E}">
-        <p14:creationId xmlns:p14="http://schemas.microsoft.com/office/powerpoint/2010/main" val="1732430115"/>
+        <p14:creationId xmlns:p14="http://schemas.microsoft.com/office/powerpoint/2010/main" val="3696430209"/>
       </p:ext>
     </p:extLst>
   </p:cSld>
@@ -6542,13 +6318,13 @@
           <a:p>
             <a:pPr algn="r"/>
             <a:r>
-              <a:rPr lang="pt-BR" sz="1200">
+              <a:rPr lang="pt-BR" sz="1200" dirty="0">
                 <a:solidFill>
                   <a:srgbClr val="FFFFFF"/>
                 </a:solidFill>
                 <a:latin typeface="Aptos" panose="020B0004020202020204" pitchFamily="34" charset="0"/>
               </a:rPr>
-              <a:t>fechamento</a:t>
+              <a:t>Fechamento</a:t>
             </a:r>
           </a:p>
         </p:txBody>
@@ -6567,7 +6343,7 @@
         </p:nvSpPr>
         <p:spPr>
           <a:xfrm>
-            <a:off x="825500" y="1206500"/>
+            <a:off x="825500" y="1151268"/>
             <a:ext cx="2413000" cy="1117600"/>
           </a:xfrm>
           <a:prstGeom prst="rect">
@@ -6637,7 +6413,7 @@
           <a:p>
             <a:pPr algn="ctr"/>
             <a:r>
-              <a:rPr lang="pt-BR" sz="2500" b="1">
+              <a:rPr lang="pt-BR" sz="2500" b="1" dirty="0">
                 <a:solidFill>
                   <a:srgbClr val="268984"/>
                 </a:solidFill>
@@ -6703,7 +6479,7 @@
         </p:nvSpPr>
         <p:spPr>
           <a:xfrm>
-            <a:off x="3619500" y="1206500"/>
+            <a:off x="3619500" y="1151268"/>
             <a:ext cx="2159000" cy="1117600"/>
           </a:xfrm>
           <a:prstGeom prst="rect">
@@ -6839,7 +6615,7 @@
         </p:nvSpPr>
         <p:spPr>
           <a:xfrm>
-            <a:off x="6159500" y="1206500"/>
+            <a:off x="6159500" y="1151268"/>
             <a:ext cx="2413000" cy="1117600"/>
           </a:xfrm>
           <a:prstGeom prst="rect">
@@ -6975,7 +6751,7 @@
         </p:nvSpPr>
         <p:spPr>
           <a:xfrm>
-            <a:off x="8953500" y="1206500"/>
+            <a:off x="8953500" y="1151268"/>
             <a:ext cx="1905000" cy="1117600"/>
           </a:xfrm>
           <a:prstGeom prst="rect">
@@ -7112,7 +6888,7 @@
         <p:spPr>
           <a:xfrm>
             <a:off x="1333500" y="3175000"/>
-            <a:ext cx="9525000" cy="1949252"/>
+            <a:ext cx="9525000" cy="2205732"/>
           </a:xfrm>
           <a:prstGeom prst="rect">
             <a:avLst/>
@@ -7125,93 +6901,64 @@
           </a:bodyPr>
           <a:lstStyle/>
           <a:p>
-            <a:pPr marL="457200" indent="-457200">
-              <a:spcAft>
-                <a:spcPts val="700"/>
-              </a:spcAft>
-              <a:buFont typeface="+mj-lt"/>
+            <a:endParaRPr lang="pt-BR" sz="2000" dirty="0"/>
+          </a:p>
+          <a:p>
+            <a:pPr marL="285750" indent="-285750">
+              <a:buFont typeface="Arial" panose="020B0604020202020204" pitchFamily="34" charset="0"/>
               <a:buChar char="•"/>
             </a:pPr>
             <a:r>
-              <a:rPr lang="pt-BR" sz="2000">
-                <a:solidFill>
-                  <a:srgbClr val="1E2227"/>
-                </a:solidFill>
-                <a:latin typeface="Aptos" panose="020B0004020202020204" pitchFamily="34" charset="0"/>
-              </a:rPr>
-              <a:t>Todos os critérios técnicos foram contemplados</a:t>
-            </a:r>
-          </a:p>
-          <a:p>
-            <a:pPr marL="457200" indent="-457200">
-              <a:spcAft>
-                <a:spcPts val="700"/>
-              </a:spcAft>
-              <a:buFont typeface="+mj-lt"/>
+              <a:rPr lang="pt-BR" sz="2000" dirty="0"/>
+              <a:t>O preço não depende de uma única variável</a:t>
+            </a:r>
+          </a:p>
+          <a:p>
+            <a:pPr marL="285750" indent="-285750">
+              <a:buFont typeface="Arial" panose="020B0604020202020204" pitchFamily="34" charset="0"/>
               <a:buChar char="•"/>
             </a:pPr>
             <a:r>
-              <a:rPr lang="pt-BR" sz="2000">
-                <a:solidFill>
-                  <a:srgbClr val="1E2227"/>
-                </a:solidFill>
-                <a:latin typeface="Aptos" panose="020B0004020202020204" pitchFamily="34" charset="0"/>
-              </a:rPr>
-              <a:t>Notebook 06 agora inclui gráficos consolidados dos modelos</a:t>
-            </a:r>
-          </a:p>
-          <a:p>
-            <a:pPr marL="457200" indent="-457200">
-              <a:spcAft>
-                <a:spcPts val="700"/>
-              </a:spcAft>
-              <a:buFont typeface="+mj-lt"/>
+              <a:rPr lang="pt-BR" sz="2000" dirty="0"/>
+              <a:t>Qualidade geral, área total, área habitável, banheiros, garagem e idade são sinais centrais</a:t>
+            </a:r>
+          </a:p>
+          <a:p>
+            <a:pPr marL="285750" indent="-285750">
+              <a:buFont typeface="Arial" panose="020B0604020202020204" pitchFamily="34" charset="0"/>
               <a:buChar char="•"/>
             </a:pPr>
             <a:r>
-              <a:rPr lang="pt-BR" sz="2000">
-                <a:solidFill>
-                  <a:srgbClr val="1E2227"/>
-                </a:solidFill>
-                <a:latin typeface="Aptos" panose="020B0004020202020204" pitchFamily="34" charset="0"/>
-              </a:rPr>
-              <a:t>Storytelling foi atualizado sem placeholders</a:t>
-            </a:r>
-          </a:p>
-          <a:p>
-            <a:pPr marL="457200" indent="-457200">
-              <a:spcAft>
-                <a:spcPts val="700"/>
-              </a:spcAft>
-              <a:buFont typeface="+mj-lt"/>
+              <a:rPr lang="pt-BR" sz="2000" dirty="0"/>
+              <a:t>Feature </a:t>
+            </a:r>
+            <a:r>
+              <a:rPr lang="pt-BR" sz="2000" dirty="0" err="1"/>
+              <a:t>engineering</a:t>
+            </a:r>
+            <a:r>
+              <a:rPr lang="pt-BR" sz="2000" dirty="0"/>
+              <a:t> melhorou a interpretação e alimentou melhor os modelos</a:t>
+            </a:r>
+          </a:p>
+          <a:p>
+            <a:pPr marL="285750" indent="-285750">
+              <a:buFont typeface="Arial" panose="020B0604020202020204" pitchFamily="34" charset="0"/>
               <a:buChar char="•"/>
             </a:pPr>
             <a:r>
-              <a:rPr lang="pt-BR" sz="2000">
-                <a:solidFill>
-                  <a:srgbClr val="1E2227"/>
-                </a:solidFill>
-                <a:latin typeface="Aptos" panose="020B0004020202020204" pitchFamily="34" charset="0"/>
-              </a:rPr>
-              <a:t>Feature engineering aparece nos modelos e na interpretação</a:t>
-            </a:r>
-          </a:p>
-          <a:p>
-            <a:pPr marL="457200" indent="-457200">
-              <a:spcAft>
-                <a:spcPts val="700"/>
-              </a:spcAft>
-              <a:buFont typeface="+mj-lt"/>
+              <a:rPr lang="pt-BR" sz="2000" dirty="0"/>
+              <a:t>Modelos supervisionados tiveram forte poder preditivo</a:t>
+            </a:r>
+          </a:p>
+          <a:p>
+            <a:pPr marL="285750" indent="-285750">
+              <a:buFont typeface="Arial" panose="020B0604020202020204" pitchFamily="34" charset="0"/>
               <a:buChar char="•"/>
             </a:pPr>
             <a:r>
-              <a:rPr lang="pt-BR" sz="2000">
-                <a:solidFill>
-                  <a:srgbClr val="1E2227"/>
-                </a:solidFill>
-                <a:latin typeface="Aptos" panose="020B0004020202020204" pitchFamily="34" charset="0"/>
-              </a:rPr>
-              <a:t>O preço é explicado por tamanho, qualidade, estrutura, idade e conservação</a:t>
+              <a:rPr lang="pt-BR" sz="2000" dirty="0"/>
+              <a:t>Modelos não supervisionados revelaram perfis e anomalias úteis</a:t>
             </a:r>
           </a:p>
         </p:txBody>
@@ -7392,13 +7139,13 @@
           <a:p>
             <a:pPr algn="r"/>
             <a:r>
-              <a:rPr lang="pt-BR" sz="1200">
+              <a:rPr lang="pt-BR" sz="1200" dirty="0">
                 <a:solidFill>
                   <a:srgbClr val="FFFFFF"/>
                 </a:solidFill>
                 <a:latin typeface="Aptos" panose="020B0004020202020204" pitchFamily="34" charset="0"/>
               </a:rPr>
-              <a:t>obrigado</a:t>
+              <a:t>Fim</a:t>
             </a:r>
           </a:p>
         </p:txBody>
@@ -7417,7 +7164,7 @@
         </p:nvSpPr>
         <p:spPr>
           <a:xfrm>
-            <a:off x="1016000" y="1841500"/>
+            <a:off x="923946" y="3259127"/>
             <a:ext cx="10160000" cy="728405"/>
           </a:xfrm>
           <a:prstGeom prst="rect">
@@ -7433,149 +7180,13 @@
           <a:p>
             <a:pPr algn="ctr"/>
             <a:r>
-              <a:rPr lang="pt-BR" sz="4400" b="1">
+              <a:rPr lang="pt-BR" sz="4400" b="1" dirty="0">
                 <a:solidFill>
                   <a:srgbClr val="162B3A"/>
                 </a:solidFill>
                 <a:latin typeface="Aptos" panose="020B0004020202020204" pitchFamily="34" charset="0"/>
               </a:rPr>
               <a:t>Obrigado!</a:t>
-            </a:r>
-          </a:p>
-        </p:txBody>
-      </p:sp>
-      <p:sp>
-        <p:nvSpPr>
-          <p:cNvPr id="6" name="CaixaDeTexto 5">
-            <a:extLst>
-              <a:ext uri="{FF2B5EF4-FFF2-40B4-BE49-F238E27FC236}">
-                <a16:creationId xmlns:a16="http://schemas.microsoft.com/office/drawing/2014/main" id="{1B249FE1-7FED-FEBC-6038-574EC5ED85D2}"/>
-              </a:ext>
-            </a:extLst>
-          </p:cNvPr>
-          <p:cNvSpPr txBox="1"/>
-          <p:nvPr/>
-        </p:nvSpPr>
-        <p:spPr>
-          <a:xfrm>
-            <a:off x="1651000" y="3048000"/>
-            <a:ext cx="8890000" cy="482183"/>
-          </a:xfrm>
-          <a:prstGeom prst="rect">
-            <a:avLst/>
-          </a:prstGeom>
-          <a:noFill/>
-        </p:spPr>
-        <p:txBody>
-          <a:bodyPr vert="horz" lIns="50800" tIns="25400" rIns="50800" bIns="25400" rtlCol="0">
-            <a:spAutoFit/>
-          </a:bodyPr>
-          <a:lstStyle/>
-          <a:p>
-            <a:pPr algn="ctr"/>
-            <a:r>
-              <a:rPr lang="pt-BR" sz="2800">
-                <a:solidFill>
-                  <a:srgbClr val="585F69"/>
-                </a:solidFill>
-                <a:latin typeface="Aptos" panose="020B0004020202020204" pitchFamily="34" charset="0"/>
-              </a:rPr>
-              <a:t>Estamos à disposição para perguntas.</a:t>
-            </a:r>
-          </a:p>
-        </p:txBody>
-      </p:sp>
-      <p:sp>
-        <p:nvSpPr>
-          <p:cNvPr id="7" name="Retângulo 6">
-            <a:extLst>
-              <a:ext uri="{FF2B5EF4-FFF2-40B4-BE49-F238E27FC236}">
-                <a16:creationId xmlns:a16="http://schemas.microsoft.com/office/drawing/2014/main" id="{663A1A4B-89A2-14BC-731F-5E38F6442C40}"/>
-              </a:ext>
-            </a:extLst>
-          </p:cNvPr>
-          <p:cNvSpPr/>
-          <p:nvPr/>
-        </p:nvSpPr>
-        <p:spPr>
-          <a:xfrm>
-            <a:off x="2794000" y="4381500"/>
-            <a:ext cx="6604000" cy="736600"/>
-          </a:xfrm>
-          <a:prstGeom prst="rect">
-            <a:avLst/>
-          </a:prstGeom>
-          <a:solidFill>
-            <a:srgbClr val="F6F8FA"/>
-          </a:solidFill>
-          <a:ln>
-            <a:solidFill>
-              <a:srgbClr val="DCE0E4"/>
-            </a:solidFill>
-          </a:ln>
-        </p:spPr>
-        <p:style>
-          <a:lnRef idx="2">
-            <a:schemeClr val="accent1">
-              <a:shade val="15000"/>
-            </a:schemeClr>
-          </a:lnRef>
-          <a:fillRef idx="1">
-            <a:schemeClr val="accent1"/>
-          </a:fillRef>
-          <a:effectRef idx="0">
-            <a:schemeClr val="accent1"/>
-          </a:effectRef>
-          <a:fontRef idx="minor">
-            <a:schemeClr val="lt1"/>
-          </a:fontRef>
-        </p:style>
-        <p:txBody>
-          <a:bodyPr rtlCol="0" anchor="ctr"/>
-          <a:lstStyle/>
-          <a:p>
-            <a:pPr algn="ctr"/>
-            <a:endParaRPr lang="pt-BR"/>
-          </a:p>
-        </p:txBody>
-      </p:sp>
-      <p:sp>
-        <p:nvSpPr>
-          <p:cNvPr id="8" name="CaixaDeTexto 7">
-            <a:extLst>
-              <a:ext uri="{FF2B5EF4-FFF2-40B4-BE49-F238E27FC236}">
-                <a16:creationId xmlns:a16="http://schemas.microsoft.com/office/drawing/2014/main" id="{CDF51E2E-7B61-D88D-10E3-EDDA3A16A633}"/>
-              </a:ext>
-            </a:extLst>
-          </p:cNvPr>
-          <p:cNvSpPr txBox="1"/>
-          <p:nvPr/>
-        </p:nvSpPr>
-        <p:spPr>
-          <a:xfrm>
-            <a:off x="3111500" y="4521200"/>
-            <a:ext cx="5969000" cy="482183"/>
-          </a:xfrm>
-          <a:prstGeom prst="rect">
-            <a:avLst/>
-          </a:prstGeom>
-          <a:noFill/>
-        </p:spPr>
-        <p:txBody>
-          <a:bodyPr vert="horz" lIns="50800" tIns="25400" rIns="50800" bIns="25400" rtlCol="0">
-            <a:spAutoFit/>
-          </a:bodyPr>
-          <a:lstStyle/>
-          <a:p>
-            <a:pPr algn="ctr"/>
-            <a:r>
-              <a:rPr lang="pt-BR" sz="1400">
-                <a:solidFill>
-                  <a:srgbClr val="1E2227"/>
-                </a:solidFill>
-                <a:latin typeface="Aptos" panose="020B0004020202020204" pitchFamily="34" charset="0"/>
-              </a:rPr>
-              <a:t>Resposta rápida: Silhouette baixo é esperado em dados imobiliários com sobreposição, mas os clusters ainda têm perfis médios interpretáveis.</a:t>
             </a:r>
           </a:p>
         </p:txBody>
@@ -8874,7 +8485,7 @@
         <p:spPr>
           <a:xfrm>
             <a:off x="850900" y="2794000"/>
-            <a:ext cx="1346200" cy="543739"/>
+            <a:ext cx="1346200" cy="266740"/>
           </a:xfrm>
           <a:prstGeom prst="rect">
             <a:avLst/>
@@ -8889,7 +8500,7 @@
           <a:p>
             <a:pPr algn="ctr"/>
             <a:r>
-              <a:rPr lang="pt-BR" sz="1600" b="1">
+              <a:rPr lang="pt-BR" sz="1400" b="1" dirty="0">
                 <a:solidFill>
                   <a:srgbClr val="162B3A"/>
                 </a:solidFill>
@@ -9010,7 +8621,7 @@
         <p:spPr>
           <a:xfrm>
             <a:off x="2730500" y="2794000"/>
-            <a:ext cx="1346200" cy="543739"/>
+            <a:ext cx="1346200" cy="482183"/>
           </a:xfrm>
           <a:prstGeom prst="rect">
             <a:avLst/>
@@ -9025,14 +8636,29 @@
           <a:p>
             <a:pPr algn="ctr"/>
             <a:r>
-              <a:rPr lang="pt-BR" sz="1600" b="1">
+              <a:rPr lang="pt-BR" sz="1400" b="1" dirty="0">
                 <a:solidFill>
                   <a:srgbClr val="162B3A"/>
                 </a:solidFill>
                 <a:latin typeface="Aptos" panose="020B0004020202020204" pitchFamily="34" charset="0"/>
               </a:rPr>
-              <a:t>Feature engineering</a:t>
-            </a:r>
+              <a:t>Feature </a:t>
+            </a:r>
+            <a:r>
+              <a:rPr lang="pt-BR" sz="1400" b="1" dirty="0" err="1">
+                <a:solidFill>
+                  <a:srgbClr val="162B3A"/>
+                </a:solidFill>
+                <a:latin typeface="Aptos" panose="020B0004020202020204" pitchFamily="34" charset="0"/>
+              </a:rPr>
+              <a:t>engineering</a:t>
+            </a:r>
+            <a:endParaRPr lang="pt-BR" sz="1400" b="1" dirty="0">
+              <a:solidFill>
+                <a:srgbClr val="162B3A"/>
+              </a:solidFill>
+              <a:latin typeface="Aptos" panose="020B0004020202020204" pitchFamily="34" charset="0"/>
+            </a:endParaRPr>
           </a:p>
         </p:txBody>
       </p:sp>
@@ -9146,7 +8772,7 @@
         <p:spPr>
           <a:xfrm>
             <a:off x="4610100" y="2794000"/>
-            <a:ext cx="1346200" cy="297517"/>
+            <a:ext cx="1346200" cy="266740"/>
           </a:xfrm>
           <a:prstGeom prst="rect">
             <a:avLst/>
@@ -9161,7 +8787,7 @@
           <a:p>
             <a:pPr algn="ctr"/>
             <a:r>
-              <a:rPr lang="pt-BR" sz="1600" b="1">
+              <a:rPr lang="pt-BR" sz="1400" b="1" dirty="0">
                 <a:solidFill>
                   <a:srgbClr val="162B3A"/>
                 </a:solidFill>
@@ -9169,6 +8795,12 @@
               </a:rPr>
               <a:t>Regressão</a:t>
             </a:r>
+            <a:endParaRPr lang="pt-BR" sz="1600" b="1" dirty="0">
+              <a:solidFill>
+                <a:srgbClr val="162B3A"/>
+              </a:solidFill>
+              <a:latin typeface="Aptos" panose="020B0004020202020204" pitchFamily="34" charset="0"/>
+            </a:endParaRPr>
           </a:p>
         </p:txBody>
       </p:sp>
@@ -9282,7 +8914,7 @@
         <p:spPr>
           <a:xfrm>
             <a:off x="6489700" y="2794000"/>
-            <a:ext cx="1346200" cy="543739"/>
+            <a:ext cx="1346200" cy="266740"/>
           </a:xfrm>
           <a:prstGeom prst="rect">
             <a:avLst/>
@@ -9297,7 +8929,7 @@
           <a:p>
             <a:pPr algn="ctr"/>
             <a:r>
-              <a:rPr lang="pt-BR" sz="1600" b="1">
+              <a:rPr lang="pt-BR" sz="1400" b="1" dirty="0">
                 <a:solidFill>
                   <a:srgbClr val="162B3A"/>
                 </a:solidFill>
@@ -9418,7 +9050,7 @@
         <p:spPr>
           <a:xfrm>
             <a:off x="8369300" y="2794000"/>
-            <a:ext cx="1346200" cy="543739"/>
+            <a:ext cx="1346200" cy="266740"/>
           </a:xfrm>
           <a:prstGeom prst="rect">
             <a:avLst/>
@@ -9433,7 +9065,7 @@
           <a:p>
             <a:pPr algn="ctr"/>
             <a:r>
-              <a:rPr lang="pt-BR" sz="1600" b="1">
+              <a:rPr lang="pt-BR" sz="1400" b="1" dirty="0">
                 <a:solidFill>
                   <a:srgbClr val="162B3A"/>
                 </a:solidFill>
@@ -9554,7 +9186,7 @@
         <p:spPr>
           <a:xfrm>
             <a:off x="10248900" y="2794000"/>
-            <a:ext cx="1346200" cy="789960"/>
+            <a:ext cx="1346200" cy="697627"/>
           </a:xfrm>
           <a:prstGeom prst="rect">
             <a:avLst/>
@@ -9569,14 +9201,29 @@
           <a:p>
             <a:pPr algn="ctr"/>
             <a:r>
-              <a:rPr lang="pt-BR" sz="1600" b="1">
+              <a:rPr lang="pt-BR" sz="1400" b="1" dirty="0">
                 <a:solidFill>
                   <a:srgbClr val="162B3A"/>
                 </a:solidFill>
                 <a:latin typeface="Aptos" panose="020B0004020202020204" pitchFamily="34" charset="0"/>
               </a:rPr>
-              <a:t>Associação, outliers e storytelling</a:t>
-            </a:r>
+              <a:t>Associação, outliers e </a:t>
+            </a:r>
+            <a:r>
+              <a:rPr lang="pt-BR" sz="1400" b="1" dirty="0" err="1">
+                <a:solidFill>
+                  <a:srgbClr val="162B3A"/>
+                </a:solidFill>
+                <a:latin typeface="Aptos" panose="020B0004020202020204" pitchFamily="34" charset="0"/>
+              </a:rPr>
+              <a:t>storytelling</a:t>
+            </a:r>
+            <a:endParaRPr lang="pt-BR" sz="1400" b="1" dirty="0">
+              <a:solidFill>
+                <a:srgbClr val="162B3A"/>
+              </a:solidFill>
+              <a:latin typeface="Aptos" panose="020B0004020202020204" pitchFamily="34" charset="0"/>
+            </a:endParaRPr>
           </a:p>
         </p:txBody>
       </p:sp>
@@ -9955,8 +9602,8 @@
         </p:blipFill>
         <p:spPr>
           <a:xfrm>
-            <a:off x="7525642" y="1783664"/>
-            <a:ext cx="2411215" cy="1004673"/>
+            <a:off x="5895994" y="1104644"/>
+            <a:ext cx="5940406" cy="2475169"/>
           </a:xfrm>
           <a:prstGeom prst="rect">
             <a:avLst/>
@@ -9991,8 +9638,8 @@
         </p:blipFill>
         <p:spPr>
           <a:xfrm>
-            <a:off x="7881573" y="4464662"/>
-            <a:ext cx="1699354" cy="849677"/>
+            <a:off x="6096000" y="3766733"/>
+            <a:ext cx="5801534" cy="2900767"/>
           </a:xfrm>
           <a:prstGeom prst="rect">
             <a:avLst/>
@@ -10319,8 +9966,8 @@
         </p:nvSpPr>
         <p:spPr>
           <a:xfrm>
-            <a:off x="6858000" y="1460500"/>
-            <a:ext cx="3937000" cy="2857500"/>
+            <a:off x="6794500" y="1460499"/>
+            <a:ext cx="3937000" cy="3467441"/>
           </a:xfrm>
           <a:prstGeom prst="rect">
             <a:avLst/>
@@ -10389,13 +10036,13 @@
           <a:p>
             <a:pPr algn="ctr"/>
             <a:r>
-              <a:rPr lang="pt-BR" sz="2400" b="1">
+              <a:rPr lang="pt-BR" sz="2400" b="1" dirty="0">
                 <a:solidFill>
                   <a:srgbClr val="162B3A"/>
                 </a:solidFill>
                 <a:latin typeface="Aptos" panose="020B0004020202020204" pitchFamily="34" charset="0"/>
               </a:rPr>
-              <a:t>Por que isso importa?</a:t>
+              <a:t>Features criadas</a:t>
             </a:r>
           </a:p>
         </p:txBody>
@@ -10915,7 +10562,7 @@
         <p:spPr>
           <a:xfrm>
             <a:off x="762000" y="2921000"/>
-            <a:ext cx="4572000" cy="1982594"/>
+            <a:ext cx="4165941" cy="2259593"/>
           </a:xfrm>
           <a:prstGeom prst="rect">
             <a:avLst/>
@@ -10923,7 +10570,7 @@
           <a:noFill/>
         </p:spPr>
         <p:txBody>
-          <a:bodyPr vert="horz" lIns="50800" tIns="25400" rIns="50800" bIns="25400" rtlCol="0">
+          <a:bodyPr vert="horz" wrap="square" lIns="50800" tIns="25400" rIns="50800" bIns="25400" rtlCol="0">
             <a:spAutoFit/>
           </a:bodyPr>
           <a:lstStyle/>
@@ -10936,14 +10583,47 @@
               <a:buChar char="•"/>
             </a:pPr>
             <a:r>
-              <a:rPr lang="pt-BR">
+              <a:rPr lang="pt-BR" dirty="0">
                 <a:solidFill>
                   <a:srgbClr val="1E2227"/>
                 </a:solidFill>
                 <a:latin typeface="Aptos" panose="020B0004020202020204" pitchFamily="34" charset="0"/>
               </a:rPr>
-              <a:t>Modelo simples: GrLivArea -&gt; SalePrice</a:t>
-            </a:r>
+              <a:t>Modelo simples: </a:t>
+            </a:r>
+            <a:r>
+              <a:rPr lang="pt-BR" dirty="0" err="1">
+                <a:solidFill>
+                  <a:srgbClr val="1E2227"/>
+                </a:solidFill>
+                <a:latin typeface="Aptos" panose="020B0004020202020204" pitchFamily="34" charset="0"/>
+              </a:rPr>
+              <a:t>GrLivArea</a:t>
+            </a:r>
+            <a:r>
+              <a:rPr lang="pt-BR" dirty="0">
+                <a:solidFill>
+                  <a:srgbClr val="1E2227"/>
+                </a:solidFill>
+                <a:latin typeface="Aptos" panose="020B0004020202020204" pitchFamily="34" charset="0"/>
+              </a:rPr>
+              <a:t> -&gt; </a:t>
+            </a:r>
+            <a:r>
+              <a:rPr lang="pt-BR" dirty="0" err="1">
+                <a:solidFill>
+                  <a:srgbClr val="1E2227"/>
+                </a:solidFill>
+                <a:latin typeface="Aptos" panose="020B0004020202020204" pitchFamily="34" charset="0"/>
+              </a:rPr>
+              <a:t>SalePrice</a:t>
+            </a:r>
+            <a:endParaRPr lang="pt-BR" dirty="0">
+              <a:solidFill>
+                <a:srgbClr val="1E2227"/>
+              </a:solidFill>
+              <a:latin typeface="Aptos" panose="020B0004020202020204" pitchFamily="34" charset="0"/>
+            </a:endParaRPr>
           </a:p>
           <a:p>
             <a:pPr marL="342900" indent="-342900">
@@ -10954,7 +10634,7 @@
               <a:buChar char="•"/>
             </a:pPr>
             <a:r>
-              <a:rPr lang="pt-BR">
+              <a:rPr lang="pt-BR" dirty="0">
                 <a:solidFill>
                   <a:srgbClr val="1E2227"/>
                 </a:solidFill>
@@ -10972,13 +10652,40 @@
               <a:buChar char="•"/>
             </a:pPr>
             <a:r>
-              <a:rPr lang="pt-BR">
+              <a:rPr lang="pt-BR" dirty="0" err="1">
                 <a:solidFill>
                   <a:srgbClr val="1E2227"/>
                 </a:solidFill>
                 <a:latin typeface="Aptos" panose="020B0004020202020204" pitchFamily="34" charset="0"/>
               </a:rPr>
-              <a:t>TotalSF e TotalBathrooms aparecem entre os principais preditores</a:t>
+              <a:t>TotalSF</a:t>
+            </a:r>
+            <a:r>
+              <a:rPr lang="pt-BR" dirty="0">
+                <a:solidFill>
+                  <a:srgbClr val="1E2227"/>
+                </a:solidFill>
+                <a:latin typeface="Aptos" panose="020B0004020202020204" pitchFamily="34" charset="0"/>
+              </a:rPr>
+              <a:t> e </a:t>
+            </a:r>
+            <a:r>
+              <a:rPr lang="pt-BR" dirty="0" err="1">
+                <a:solidFill>
+                  <a:srgbClr val="1E2227"/>
+                </a:solidFill>
+                <a:latin typeface="Aptos" panose="020B0004020202020204" pitchFamily="34" charset="0"/>
+              </a:rPr>
+              <a:t>TotalBathrooms</a:t>
+            </a:r>
+            <a:r>
+              <a:rPr lang="pt-BR" dirty="0">
+                <a:solidFill>
+                  <a:srgbClr val="1E2227"/>
+                </a:solidFill>
+                <a:latin typeface="Aptos" panose="020B0004020202020204" pitchFamily="34" charset="0"/>
+              </a:rPr>
+              <a:t> aparecem entre os principais preditores</a:t>
             </a:r>
           </a:p>
           <a:p>
@@ -10990,7 +10697,7 @@
               <a:buChar char="•"/>
             </a:pPr>
             <a:r>
-              <a:rPr lang="pt-BR">
+              <a:rPr lang="pt-BR" dirty="0">
                 <a:solidFill>
                   <a:srgbClr val="1E2227"/>
                 </a:solidFill>
@@ -11029,8 +10736,8 @@
         </p:blipFill>
         <p:spPr>
           <a:xfrm>
-            <a:off x="7397089" y="1955960"/>
-            <a:ext cx="2223822" cy="736279"/>
+            <a:off x="5588000" y="1044295"/>
+            <a:ext cx="6394925" cy="2259594"/>
           </a:xfrm>
           <a:prstGeom prst="rect">
             <a:avLst/>
@@ -11065,8 +10772,8 @@
         </p:blipFill>
         <p:spPr>
           <a:xfrm>
-            <a:off x="7449056" y="4447334"/>
-            <a:ext cx="2119888" cy="820832"/>
+            <a:off x="4786792" y="3646790"/>
+            <a:ext cx="7329758" cy="3138474"/>
           </a:xfrm>
           <a:prstGeom prst="rect">
             <a:avLst/>
@@ -11661,8 +11368,8 @@
         </p:blipFill>
         <p:spPr>
           <a:xfrm>
-            <a:off x="7669460" y="1854528"/>
-            <a:ext cx="1933080" cy="786744"/>
+            <a:off x="6155085" y="1206500"/>
+            <a:ext cx="5721848" cy="2328734"/>
           </a:xfrm>
           <a:prstGeom prst="rect">
             <a:avLst/>
@@ -11697,8 +11404,8 @@
         </p:blipFill>
         <p:spPr>
           <a:xfrm>
-            <a:off x="7642933" y="4426465"/>
-            <a:ext cx="1986135" cy="862570"/>
+            <a:off x="6139598" y="3976719"/>
+            <a:ext cx="5609896" cy="2436354"/>
           </a:xfrm>
           <a:prstGeom prst="rect">
             <a:avLst/>
@@ -11906,8 +11613,8 @@
         </p:nvSpPr>
         <p:spPr>
           <a:xfrm>
-            <a:off x="635000" y="1168400"/>
-            <a:ext cx="4953000" cy="2626360"/>
+            <a:off x="634999" y="1168400"/>
+            <a:ext cx="5084603" cy="1338828"/>
           </a:xfrm>
           <a:prstGeom prst="rect">
             <a:avLst/>
@@ -11915,7 +11622,7 @@
           <a:noFill/>
         </p:spPr>
         <p:txBody>
-          <a:bodyPr vert="horz" lIns="50800" tIns="25400" rIns="50800" bIns="25400" rtlCol="0">
+          <a:bodyPr vert="horz" wrap="square" lIns="50800" tIns="25400" rIns="50800" bIns="25400" rtlCol="0">
             <a:spAutoFit/>
           </a:bodyPr>
           <a:lstStyle/>
@@ -11928,13 +11635,31 @@
               <a:buChar char="•"/>
             </a:pPr>
             <a:r>
-              <a:rPr lang="pt-BR">
+              <a:rPr lang="pt-BR" dirty="0">
                 <a:solidFill>
                   <a:srgbClr val="1E2227"/>
                 </a:solidFill>
                 <a:latin typeface="Aptos" panose="020B0004020202020204" pitchFamily="34" charset="0"/>
               </a:rPr>
-              <a:t>K-Means para perfis de imóveis sem usar preço no treino</a:t>
+              <a:t>K-</a:t>
+            </a:r>
+            <a:r>
+              <a:rPr lang="pt-BR" dirty="0" err="1">
+                <a:solidFill>
+                  <a:srgbClr val="1E2227"/>
+                </a:solidFill>
+                <a:latin typeface="Aptos" panose="020B0004020202020204" pitchFamily="34" charset="0"/>
+              </a:rPr>
+              <a:t>Means</a:t>
+            </a:r>
+            <a:r>
+              <a:rPr lang="pt-BR" dirty="0">
+                <a:solidFill>
+                  <a:srgbClr val="1E2227"/>
+                </a:solidFill>
+                <a:latin typeface="Aptos" panose="020B0004020202020204" pitchFamily="34" charset="0"/>
+              </a:rPr>
+              <a:t> para perfis de imóveis sem usar preço no treino</a:t>
             </a:r>
           </a:p>
           <a:p>
@@ -11946,13 +11671,40 @@
               <a:buChar char="•"/>
             </a:pPr>
             <a:r>
-              <a:rPr lang="pt-BR">
+              <a:rPr lang="pt-BR" dirty="0" err="1">
                 <a:solidFill>
                   <a:srgbClr val="1E2227"/>
                 </a:solidFill>
                 <a:latin typeface="Aptos" panose="020B0004020202020204" pitchFamily="34" charset="0"/>
               </a:rPr>
-              <a:t>Elbow Method apoiou a escolha de k</a:t>
+              <a:t>Elbow</a:t>
+            </a:r>
+            <a:r>
+              <a:rPr lang="pt-BR" dirty="0">
+                <a:solidFill>
+                  <a:srgbClr val="1E2227"/>
+                </a:solidFill>
+                <a:latin typeface="Aptos" panose="020B0004020202020204" pitchFamily="34" charset="0"/>
+              </a:rPr>
+              <a:t> </a:t>
+            </a:r>
+            <a:r>
+              <a:rPr lang="pt-BR" dirty="0" err="1">
+                <a:solidFill>
+                  <a:srgbClr val="1E2227"/>
+                </a:solidFill>
+                <a:latin typeface="Aptos" panose="020B0004020202020204" pitchFamily="34" charset="0"/>
+              </a:rPr>
+              <a:t>Method</a:t>
+            </a:r>
+            <a:r>
+              <a:rPr lang="pt-BR" dirty="0">
+                <a:solidFill>
+                  <a:srgbClr val="1E2227"/>
+                </a:solidFill>
+                <a:latin typeface="Aptos" panose="020B0004020202020204" pitchFamily="34" charset="0"/>
+              </a:rPr>
+              <a:t> apoiou a escolha de k</a:t>
             </a:r>
           </a:p>
           <a:p>
@@ -11964,7 +11716,7 @@
               <a:buChar char="•"/>
             </a:pPr>
             <a:r>
-              <a:rPr lang="pt-BR">
+              <a:rPr lang="pt-BR" dirty="0">
                 <a:solidFill>
                   <a:srgbClr val="1E2227"/>
                 </a:solidFill>
@@ -11973,6 +11725,71 @@
               <a:t>PCA e t-SNE para visualização em 2D</a:t>
             </a:r>
           </a:p>
+        </p:txBody>
+      </p:sp>
+      <p:pic>
+        <p:nvPicPr>
+          <p:cNvPr id="7" name="Imagem 6">
+            <a:extLst>
+              <a:ext uri="{FF2B5EF4-FFF2-40B4-BE49-F238E27FC236}">
+                <a16:creationId xmlns:a16="http://schemas.microsoft.com/office/drawing/2014/main" id="{BB3A50C3-5087-571C-2ABD-4B3A5D32915B}"/>
+              </a:ext>
+            </a:extLst>
+          </p:cNvPr>
+          <p:cNvPicPr>
+            <a:picLocks noChangeAspect="1"/>
+          </p:cNvPicPr>
+          <p:nvPr/>
+        </p:nvPicPr>
+        <p:blipFill>
+          <a:blip r:embed="rId3">
+            <a:extLst>
+              <a:ext uri="{28A0092B-C50C-407E-A947-70E740481C1C}">
+                <a14:useLocalDpi xmlns:a14="http://schemas.microsoft.com/office/drawing/2010/main" val="0"/>
+              </a:ext>
+            </a:extLst>
+          </a:blip>
+          <a:stretch>
+            <a:fillRect/>
+          </a:stretch>
+        </p:blipFill>
+        <p:spPr>
+          <a:xfrm>
+            <a:off x="634999" y="3047776"/>
+            <a:ext cx="10922000" cy="3134564"/>
+          </a:xfrm>
+          <a:prstGeom prst="rect">
+            <a:avLst/>
+          </a:prstGeom>
+        </p:spPr>
+      </p:pic>
+      <p:sp>
+        <p:nvSpPr>
+          <p:cNvPr id="8" name="CaixaDeTexto 7">
+            <a:extLst>
+              <a:ext uri="{FF2B5EF4-FFF2-40B4-BE49-F238E27FC236}">
+                <a16:creationId xmlns:a16="http://schemas.microsoft.com/office/drawing/2014/main" id="{EB414AAA-E5F4-009F-F888-A1429B146186}"/>
+              </a:ext>
+            </a:extLst>
+          </p:cNvPr>
+          <p:cNvSpPr txBox="1"/>
+          <p:nvPr/>
+        </p:nvSpPr>
+        <p:spPr>
+          <a:xfrm>
+            <a:off x="6247376" y="1168400"/>
+            <a:ext cx="5309623" cy="1290097"/>
+          </a:xfrm>
+          <a:prstGeom prst="rect">
+            <a:avLst/>
+          </a:prstGeom>
+          <a:noFill/>
+        </p:spPr>
+        <p:txBody>
+          <a:bodyPr wrap="square">
+            <a:spAutoFit/>
+          </a:bodyPr>
+          <a:lstStyle/>
           <a:p>
             <a:pPr marL="342900" indent="-342900">
               <a:spcAft>
@@ -11982,7 +11799,7 @@
               <a:buChar char="•"/>
             </a:pPr>
             <a:r>
-              <a:rPr lang="pt-BR">
+              <a:rPr lang="pt-BR" dirty="0">
                 <a:solidFill>
                   <a:srgbClr val="1E2227"/>
                 </a:solidFill>
@@ -12000,53 +11817,26 @@
               <a:buChar char="•"/>
             </a:pPr>
             <a:r>
-              <a:rPr lang="pt-BR">
+              <a:rPr lang="pt-BR" dirty="0" err="1">
                 <a:solidFill>
                   <a:srgbClr val="1E2227"/>
                 </a:solidFill>
                 <a:latin typeface="Aptos" panose="020B0004020202020204" pitchFamily="34" charset="0"/>
               </a:rPr>
-              <a:t>Silhouette Score: 0,1520, positivo mas com sobreposição natural</a:t>
-            </a:r>
-          </a:p>
-        </p:txBody>
-      </p:sp>
-      <p:pic>
-        <p:nvPicPr>
-          <p:cNvPr id="7" name="Imagem 6">
-            <a:extLst>
-              <a:ext uri="{FF2B5EF4-FFF2-40B4-BE49-F238E27FC236}">
-                <a16:creationId xmlns:a16="http://schemas.microsoft.com/office/drawing/2014/main" id="{BB3A50C3-5087-571C-2ABD-4B3A5D32915B}"/>
-              </a:ext>
-            </a:extLst>
-          </p:cNvPr>
-          <p:cNvPicPr>
-            <a:picLocks noChangeAspect="1"/>
-          </p:cNvPicPr>
-          <p:nvPr/>
-        </p:nvPicPr>
-        <p:blipFill>
-          <a:blip r:embed="rId3">
-            <a:extLst>
-              <a:ext uri="{28A0092B-C50C-407E-A947-70E740481C1C}">
-                <a14:useLocalDpi xmlns:a14="http://schemas.microsoft.com/office/drawing/2010/main" val="0"/>
-              </a:ext>
-            </a:extLst>
-          </a:blip>
-          <a:stretch>
-            <a:fillRect/>
-          </a:stretch>
-        </p:blipFill>
-        <p:spPr>
-          <a:xfrm>
-            <a:off x="7508709" y="2720059"/>
-            <a:ext cx="2064081" cy="592382"/>
-          </a:xfrm>
-          <a:prstGeom prst="rect">
-            <a:avLst/>
-          </a:prstGeom>
-        </p:spPr>
-      </p:pic>
+              <a:t>Silhouette</a:t>
+            </a:r>
+            <a:r>
+              <a:rPr lang="pt-BR" dirty="0">
+                <a:solidFill>
+                  <a:srgbClr val="1E2227"/>
+                </a:solidFill>
+                <a:latin typeface="Aptos" panose="020B0004020202020204" pitchFamily="34" charset="0"/>
+              </a:rPr>
+              <a:t> Score: 0,1520, positivo mas com sobreposição natural</a:t>
+            </a:r>
+          </a:p>
+        </p:txBody>
+      </p:sp>
     </p:spTree>
     <p:extLst>
       <p:ext uri="{BB962C8B-B14F-4D97-AF65-F5344CB8AC3E}">
@@ -12249,7 +12039,7 @@
         <p:spPr>
           <a:xfrm>
             <a:off x="698500" y="1168400"/>
-            <a:ext cx="5016500" cy="2626360"/>
+            <a:ext cx="5016500" cy="1615827"/>
           </a:xfrm>
           <a:prstGeom prst="rect">
             <a:avLst/>
@@ -12270,13 +12060,58 @@
               <a:buChar char="•"/>
             </a:pPr>
             <a:r>
-              <a:rPr lang="pt-BR">
+              <a:rPr lang="pt-BR" dirty="0" err="1">
                 <a:solidFill>
                   <a:srgbClr val="1E2227"/>
                 </a:solidFill>
                 <a:latin typeface="Aptos" panose="020B0004020202020204" pitchFamily="34" charset="0"/>
               </a:rPr>
-              <a:t>Apriori exigiu binarização em tags interpretáveis</a:t>
+              <a:t>Apriori</a:t>
+            </a:r>
+            <a:r>
+              <a:rPr lang="pt-BR" dirty="0">
+                <a:solidFill>
+                  <a:srgbClr val="1E2227"/>
+                </a:solidFill>
+                <a:latin typeface="Aptos" panose="020B0004020202020204" pitchFamily="34" charset="0"/>
+              </a:rPr>
+              <a:t> exigiu </a:t>
+            </a:r>
+            <a:r>
+              <a:rPr lang="pt-BR" dirty="0" err="1">
+                <a:solidFill>
+                  <a:srgbClr val="1E2227"/>
+                </a:solidFill>
+                <a:latin typeface="Aptos" panose="020B0004020202020204" pitchFamily="34" charset="0"/>
+              </a:rPr>
+              <a:t>binarização</a:t>
+            </a:r>
+            <a:r>
+              <a:rPr lang="pt-BR" dirty="0">
+                <a:solidFill>
+                  <a:srgbClr val="1E2227"/>
+                </a:solidFill>
+                <a:latin typeface="Aptos" panose="020B0004020202020204" pitchFamily="34" charset="0"/>
+              </a:rPr>
+              <a:t> em </a:t>
+            </a:r>
+            <a:r>
+              <a:rPr lang="pt-BR" dirty="0" err="1">
+                <a:solidFill>
+                  <a:srgbClr val="1E2227"/>
+                </a:solidFill>
+                <a:latin typeface="Aptos" panose="020B0004020202020204" pitchFamily="34" charset="0"/>
+              </a:rPr>
+              <a:t>tags</a:t>
+            </a:r>
+            <a:r>
+              <a:rPr lang="pt-BR" dirty="0">
+                <a:solidFill>
+                  <a:srgbClr val="1E2227"/>
+                </a:solidFill>
+                <a:latin typeface="Aptos" panose="020B0004020202020204" pitchFamily="34" charset="0"/>
+              </a:rPr>
+              <a:t> interpretáveis</a:t>
             </a:r>
           </a:p>
           <a:p>
@@ -12288,14 +12123,29 @@
               <a:buChar char="•"/>
             </a:pPr>
             <a:r>
-              <a:rPr lang="pt-BR">
+              <a:rPr lang="pt-BR" dirty="0">
                 <a:solidFill>
                   <a:srgbClr val="1E2227"/>
                 </a:solidFill>
                 <a:latin typeface="Aptos" panose="020B0004020202020204" pitchFamily="34" charset="0"/>
               </a:rPr>
-              <a:t>Regras avaliadas por suporte, confiança e lift</a:t>
-            </a:r>
+              <a:t>Regras avaliadas por suporte, confiança e </a:t>
+            </a:r>
+            <a:r>
+              <a:rPr lang="pt-BR" dirty="0" err="1">
+                <a:solidFill>
+                  <a:srgbClr val="1E2227"/>
+                </a:solidFill>
+                <a:latin typeface="Aptos" panose="020B0004020202020204" pitchFamily="34" charset="0"/>
+              </a:rPr>
+              <a:t>lift</a:t>
+            </a:r>
+            <a:endParaRPr lang="pt-BR" dirty="0">
+              <a:solidFill>
+                <a:srgbClr val="1E2227"/>
+              </a:solidFill>
+              <a:latin typeface="Aptos" panose="020B0004020202020204" pitchFamily="34" charset="0"/>
+            </a:endParaRPr>
           </a:p>
           <a:p>
             <a:pPr marL="342900" indent="-342900">
@@ -12306,7 +12156,7 @@
               <a:buChar char="•"/>
             </a:pPr>
             <a:r>
-              <a:rPr lang="pt-BR">
+              <a:rPr lang="pt-BR" dirty="0">
                 <a:solidFill>
                   <a:srgbClr val="1E2227"/>
                 </a:solidFill>
@@ -12315,6 +12165,71 @@
               <a:t>Associações fortes envolvem casas grandes, bairros premium e garagens maiores</a:t>
             </a:r>
           </a:p>
+        </p:txBody>
+      </p:sp>
+      <p:pic>
+        <p:nvPicPr>
+          <p:cNvPr id="7" name="Imagem 6">
+            <a:extLst>
+              <a:ext uri="{FF2B5EF4-FFF2-40B4-BE49-F238E27FC236}">
+                <a16:creationId xmlns:a16="http://schemas.microsoft.com/office/drawing/2014/main" id="{FD963736-6F79-0DED-8B6A-7FF98787C6CF}"/>
+              </a:ext>
+            </a:extLst>
+          </p:cNvPr>
+          <p:cNvPicPr>
+            <a:picLocks noChangeAspect="1"/>
+          </p:cNvPicPr>
+          <p:nvPr/>
+        </p:nvPicPr>
+        <p:blipFill>
+          <a:blip r:embed="rId3">
+            <a:extLst>
+              <a:ext uri="{28A0092B-C50C-407E-A947-70E740481C1C}">
+                <a14:useLocalDpi xmlns:a14="http://schemas.microsoft.com/office/drawing/2010/main" val="0"/>
+              </a:ext>
+            </a:extLst>
+          </a:blip>
+          <a:stretch>
+            <a:fillRect/>
+          </a:stretch>
+        </p:blipFill>
+        <p:spPr>
+          <a:xfrm>
+            <a:off x="1683027" y="3097449"/>
+            <a:ext cx="8921558" cy="3456774"/>
+          </a:xfrm>
+          <a:prstGeom prst="rect">
+            <a:avLst/>
+          </a:prstGeom>
+        </p:spPr>
+      </p:pic>
+      <p:sp>
+        <p:nvSpPr>
+          <p:cNvPr id="8" name="CaixaDeTexto 7">
+            <a:extLst>
+              <a:ext uri="{FF2B5EF4-FFF2-40B4-BE49-F238E27FC236}">
+                <a16:creationId xmlns:a16="http://schemas.microsoft.com/office/drawing/2014/main" id="{40E5C67B-0F1B-0AC5-7A28-3080A7F74780}"/>
+              </a:ext>
+            </a:extLst>
+          </p:cNvPr>
+          <p:cNvSpPr txBox="1"/>
+          <p:nvPr/>
+        </p:nvSpPr>
+        <p:spPr>
+          <a:xfrm>
+            <a:off x="6477002" y="1240214"/>
+            <a:ext cx="6097022" cy="736099"/>
+          </a:xfrm>
+          <a:prstGeom prst="rect">
+            <a:avLst/>
+          </a:prstGeom>
+          <a:noFill/>
+        </p:spPr>
+        <p:txBody>
+          <a:bodyPr wrap="square">
+            <a:spAutoFit/>
+          </a:bodyPr>
+          <a:lstStyle/>
           <a:p>
             <a:pPr marL="342900" indent="-342900">
               <a:spcAft>
@@ -12324,7 +12239,7 @@
               <a:buChar char="•"/>
             </a:pPr>
             <a:r>
-              <a:rPr lang="pt-BR">
+              <a:rPr lang="pt-BR" dirty="0">
                 <a:solidFill>
                   <a:srgbClr val="1E2227"/>
                 </a:solidFill>
@@ -12342,7 +12257,7 @@
               <a:buChar char="•"/>
             </a:pPr>
             <a:r>
-              <a:rPr lang="pt-BR">
+              <a:rPr lang="pt-BR" dirty="0">
                 <a:solidFill>
                   <a:srgbClr val="1E2227"/>
                 </a:solidFill>
@@ -12353,42 +12268,6 @@
           </a:p>
         </p:txBody>
       </p:sp>
-      <p:pic>
-        <p:nvPicPr>
-          <p:cNvPr id="7" name="Imagem 6">
-            <a:extLst>
-              <a:ext uri="{FF2B5EF4-FFF2-40B4-BE49-F238E27FC236}">
-                <a16:creationId xmlns:a16="http://schemas.microsoft.com/office/drawing/2014/main" id="{FD963736-6F79-0DED-8B6A-7FF98787C6CF}"/>
-              </a:ext>
-            </a:extLst>
-          </p:cNvPr>
-          <p:cNvPicPr>
-            <a:picLocks noChangeAspect="1"/>
-          </p:cNvPicPr>
-          <p:nvPr/>
-        </p:nvPicPr>
-        <p:blipFill>
-          <a:blip r:embed="rId3">
-            <a:extLst>
-              <a:ext uri="{28A0092B-C50C-407E-A947-70E740481C1C}">
-                <a14:useLocalDpi xmlns:a14="http://schemas.microsoft.com/office/drawing/2010/main" val="0"/>
-              </a:ext>
-            </a:extLst>
-          </a:blip>
-          <a:stretch>
-            <a:fillRect/>
-          </a:stretch>
-        </p:blipFill>
-        <p:spPr>
-          <a:xfrm>
-            <a:off x="7680854" y="2646166"/>
-            <a:ext cx="1910293" cy="740168"/>
-          </a:xfrm>
-          <a:prstGeom prst="rect">
-            <a:avLst/>
-          </a:prstGeom>
-        </p:spPr>
-      </p:pic>
     </p:spTree>
     <p:extLst>
       <p:ext uri="{BB962C8B-B14F-4D97-AF65-F5344CB8AC3E}">
